--- a/SmartData-BiQuery-Sunum.pptx
+++ b/SmartData-BiQuery-Sunum.pptx
@@ -5,7 +5,7 @@
     <p:sldMasterId id="2147483648" r:id="rId1"/>
   </p:sldMasterIdLst>
   <p:notesMasterIdLst>
-    <p:notesMasterId r:id="rId23"/>
+    <p:notesMasterId r:id="rId25"/>
   </p:notesMasterIdLst>
   <p:sldIdLst>
     <p:sldId id="256" r:id="rId2"/>
@@ -15,20 +15,22 @@
     <p:sldId id="260" r:id="rId6"/>
     <p:sldId id="261" r:id="rId7"/>
     <p:sldId id="262" r:id="rId8"/>
-    <p:sldId id="263" r:id="rId9"/>
-    <p:sldId id="264" r:id="rId10"/>
-    <p:sldId id="265" r:id="rId11"/>
-    <p:sldId id="266" r:id="rId12"/>
-    <p:sldId id="267" r:id="rId13"/>
-    <p:sldId id="268" r:id="rId14"/>
-    <p:sldId id="269" r:id="rId15"/>
-    <p:sldId id="270" r:id="rId16"/>
-    <p:sldId id="271" r:id="rId17"/>
-    <p:sldId id="272" r:id="rId18"/>
-    <p:sldId id="273" r:id="rId19"/>
-    <p:sldId id="274" r:id="rId20"/>
-    <p:sldId id="275" r:id="rId21"/>
-    <p:sldId id="276" r:id="rId22"/>
+    <p:sldId id="277" r:id="rId9"/>
+    <p:sldId id="278" r:id="rId10"/>
+    <p:sldId id="279" r:id="rId11"/>
+    <p:sldId id="263" r:id="rId12"/>
+    <p:sldId id="264" r:id="rId13"/>
+    <p:sldId id="265" r:id="rId14"/>
+    <p:sldId id="266" r:id="rId15"/>
+    <p:sldId id="267" r:id="rId16"/>
+    <p:sldId id="268" r:id="rId17"/>
+    <p:sldId id="269" r:id="rId18"/>
+    <p:sldId id="270" r:id="rId19"/>
+    <p:sldId id="271" r:id="rId20"/>
+    <p:sldId id="272" r:id="rId21"/>
+    <p:sldId id="273" r:id="rId22"/>
+    <p:sldId id="274" r:id="rId23"/>
+    <p:sldId id="275" r:id="rId24"/>
   </p:sldIdLst>
   <p:sldSz cx="12192000" cy="6858000"/>
   <p:notesSz cx="6858000" cy="12192000"/>
@@ -135,7 +137,7 @@
 <file path=ppt/charts/chart1.xml><?xml version="1.0" encoding="utf-8"?>
 <c:chartSpace xmlns:c="http://schemas.openxmlformats.org/drawingml/2006/chart" xmlns:a="http://schemas.openxmlformats.org/drawingml/2006/main" xmlns:r="http://schemas.openxmlformats.org/officeDocument/2006/relationships" xmlns:c16r2="http://schemas.microsoft.com/office/drawing/2015/06/chart">
   <c:date1904 val="0"/>
-  <c:lang val="en-US"/>
+  <c:lang val="tr-TR"/>
   <c:roundedCorners val="1"/>
   <c:style val="2"/>
   <c:chart>
@@ -380,7 +382,7 @@
 <file path=ppt/charts/chart2.xml><?xml version="1.0" encoding="utf-8"?>
 <c:chartSpace xmlns:c="http://schemas.openxmlformats.org/drawingml/2006/chart" xmlns:a="http://schemas.openxmlformats.org/drawingml/2006/main" xmlns:r="http://schemas.openxmlformats.org/officeDocument/2006/relationships" xmlns:c16r2="http://schemas.microsoft.com/office/drawing/2015/06/chart">
   <c:date1904 val="0"/>
-  <c:lang val="en-US"/>
+  <c:lang val="tr-TR"/>
   <c:roundedCorners val="1"/>
   <c:style val="2"/>
   <c:chart>
@@ -1058,7 +1060,8 @@
           <a:p>
             <a:r>
               <a:rPr lang="en-US" dirty="0"/>
-              <a:t>Klip 4,5 sn. 'İşte az önce anlattığım panel' deyip devam et. (6 sn)</a:t>
+              <a:t>NEDEN LLM'e tek başına güvenmiyoruz? Çünkü kâr payı oranı gibi bir alanda halüsinasyon kabul edilemez. Yanlış oran müşteriye yansır.
+Bu yüzden kural katmanı önce çalışıyor — deterministik, aynı metin her zaman aynı sonuç. LLM yalnızca kuralın yakalayamadığı serbest ifadelerde devreye giriyor. Ve tamamen kapatılabiliyor; bu birazdanki kurum içi iddiasının temeli. (32 sn)</a:t>
             </a:r>
           </a:p>
         </p:txBody>
@@ -1089,7 +1092,7 @@
     </p:spTree>
     <p:extLst>
       <p:ext uri="{BB962C8B-B14F-4D97-AF65-F5344CB8AC3E}">
-        <p14:creationId xmlns:p14="http://schemas.microsoft.com/office/powerpoint/2010/main" val="1024086991"/>
+        <p14:creationId xmlns:p14="http://schemas.microsoft.com/office/powerpoint/2010/main" val="2022376271"/>
       </p:ext>
     </p:extLst>
   </p:cSld>
@@ -1145,7 +1148,7 @@
           <a:p>
             <a:r>
               <a:rPr lang="en-US" dirty="0"/>
-              <a:t>Klip devam ediyor, metin değişti; kutu 3B düzlemde döndü. (6 sn)</a:t>
+              <a:t>EN ÖNEMLİ BÖLÜM. Sorduktan sonra iki saniye bekle — jüri de bunu merak ediyor. (4 sn)</a:t>
             </a:r>
           </a:p>
         </p:txBody>
@@ -1232,7 +1235,9 @@
           <a:p>
             <a:r>
               <a:rPr lang="en-US" dirty="0"/>
-              <a:t>Metrik dev geliyor, sonraki slaytta sol sütuna oturuyor (byChar — rakamlar döner). (3 sn)</a:t>
+              <a:t>SUNUMUN EN ÖNEMLİ 40 SANİYESİ.
+NEDEN bu sayıya güvenelim? Çoğu NLP çözümü bir sonuç verir ve 'güven bana' der. Biz her değerin kaynağını gösteriyoruz: metnin hangi ifadesinden, hangi yöntemle, ne güvenle çıkarıldı.
+Bir banka için bu süs değil zorunluluk — denetim ekibi 'bu sayı nereden geldi' diye sorduğunda cevap bir tık uzakta. Ekrandaki örnek gerçek bir Albaraka metni; kesme işaretinden önce boşluk var, standart bir regex burada tökezler. (40 sn)</a:t>
             </a:r>
           </a:p>
         </p:txBody>
@@ -1319,8 +1324,7 @@
           <a:p>
             <a:r>
               <a:rPr lang="en-US" dirty="0"/>
-              <a:t>Peki NE KADAR doğru? Bu sayıları iddia etmiyoruz, ölçüyoruz — üstelik ölçüm araçları boru hattının içinde, her çalıştırmada otomatik koşuyor.
-İki yönden bakıyoruz: çıkardığımız değer metinde gerçekten var mı, ve metinde gösterge varken alanı boş mu bıraktık? Yedi alanın altısında kaçak sıfır. (30 sn)</a:t>
+              <a:t>Klip 4,5 sn. 'İşte az önce anlattığım panel' deyip devam et. (6 sn)</a:t>
             </a:r>
           </a:p>
         </p:txBody>
@@ -1407,7 +1411,7 @@
           <a:p>
             <a:r>
               <a:rPr lang="en-US" dirty="0"/>
-              <a:t>Ürün bölümü. Video zaten gösterecek, hızlı geç. (3 sn)</a:t>
+              <a:t>Klip devam ediyor, metin değişti; kutu 3B düzlemde döndü. (6 sn)</a:t>
             </a:r>
           </a:p>
         </p:txBody>
@@ -1494,8 +1498,7 @@
           <a:p>
             <a:r>
               <a:rPr lang="en-US" dirty="0"/>
-              <a:t>Analist bununla NE YAPIYOR? Soldaki grafik en somut cevap: üç ürün, üç ayrı bant, aralarında hiç çakışma yok. Konut yüzde 2,90'dan başlıyor, ihtiyaç 4,99'a çıkıyor. Bu tabloyu elle çıkarmak saatler sürerdi.
-Chatbot'ta aynı veri iki dille anlatılıyor: müşteriye sade, analiste pazar payı ve rakip boşluğu. Taksit tutarlarını biz hesaplamıyoruz — banka ne yayımladıysa o. (31 sn)</a:t>
+              <a:t>Metrik dev geliyor, sonraki slaytta sol sütuna oturuyor (byChar — rakamlar döner). (3 sn)</a:t>
             </a:r>
           </a:p>
         </p:txBody>
@@ -1582,7 +1585,8 @@
           <a:p>
             <a:r>
               <a:rPr lang="en-US" dirty="0"/>
-              <a:t>Klip 5 sn. Rapor aşağı kayıyor. (6 sn)</a:t>
+              <a:t>Peki NE KADAR doğru? Bu sayıları iddia etmiyoruz, ölçüyoruz — üstelik ölçüm araçları boru hattının içinde, her çalıştırmada otomatik koşuyor.
+İki yönden bakıyoruz: çıkardığımız değer metinde gerçekten var mı, ve metinde gösterge varken alanı boş mu bıraktık? Yedi alanın altısında kaçak sıfır. (30 sn)</a:t>
             </a:r>
           </a:p>
         </p:txBody>
@@ -1669,7 +1673,7 @@
           <a:p>
             <a:r>
               <a:rPr lang="en-US" dirty="0"/>
-              <a:t>Aynı çekim sürüyor, metin değişti. (6 sn)</a:t>
+              <a:t>Ürün bölümü. Video zaten gösterecek, hızlı geç. (3 sn)</a:t>
             </a:r>
           </a:p>
         </p:txBody>
@@ -1756,7 +1760,8 @@
           <a:p>
             <a:r>
               <a:rPr lang="en-US" dirty="0"/>
-              <a:t>İKİNCİ EN ÖNEMLİ BÖLÜM. Bankacı jüri üyesi için satın alma şartı. (4 sn)</a:t>
+              <a:t>Analist bununla NE YAPIYOR? Soldaki grafik en somut cevap: üç ürün, üç ayrı bant, aralarında hiç çakışma yok. Konut yüzde 2,90'dan başlıyor, ihtiyaç 4,99'a çıkıyor. Bu tabloyu elle çıkarmak saatler sürerdi.
+Chatbot'ta aynı veri iki dille anlatılıyor: müşteriye sade, analiste pazar payı ve rakip boşluğu. Taksit tutarlarını biz hesaplamıyoruz — banka ne yayımladıysa o. (31 sn)</a:t>
             </a:r>
           </a:p>
         </p:txBody>
@@ -1843,9 +1848,7 @@
           <a:p>
             <a:r>
               <a:rPr lang="en-US" dirty="0"/>
-              <a:t>NEDEN bir banka bunu kurabilir? Çünkü veri kurumdan hiç çıkmıyor — ve bunu iddia etmiyoruz, gösteriyoruz.
-Python'un ağ katmanını yamaladık; localhost dışına çıkan her bağlantı hata veriyor. Sonra şartnamenin KENDİ örnek metnini işledik. Sonuç ekranda: tek bir dış çağrı yapılmadan hepsi doğru çıkarıldı.
-Bir banka için bu pazarlama cümlesi değil, satın alma şartı. (40 sn)</a:t>
+              <a:t>Klip 5 sn. Rapor aşağı kayıyor. (6 sn)</a:t>
             </a:r>
           </a:p>
         </p:txBody>
@@ -2019,7 +2022,7 @@
           <a:p>
             <a:r>
               <a:rPr lang="en-US" dirty="0"/>
-              <a:t>Kapsam eksiğimizi biliyoruz, sıradaki işimiz o. Teşekkürler. (10 sn)</a:t>
+              <a:t>Aynı çekim sürüyor, metin değişti. (6 sn)</a:t>
             </a:r>
           </a:p>
         </p:txBody>
@@ -2106,7 +2109,7 @@
           <a:p>
             <a:r>
               <a:rPr lang="en-US" dirty="0"/>
-              <a:t>Kapsam eksiğimizi biliyoruz, sıradaki işimiz o. Teşekkürler. (10 sn)</a:t>
+              <a:t>İKİNCİ EN ÖNEMLİ BÖLÜM. Bankacı jüri üyesi için satın alma şartı. (4 sn)</a:t>
             </a:r>
           </a:p>
         </p:txBody>
@@ -2137,7 +2140,183 @@
     </p:spTree>
     <p:extLst>
       <p:ext uri="{BB962C8B-B14F-4D97-AF65-F5344CB8AC3E}">
-        <p14:creationId xmlns:p14="http://schemas.microsoft.com/office/powerpoint/2010/main" val="3078850074"/>
+        <p14:creationId xmlns:p14="http://schemas.microsoft.com/office/powerpoint/2010/main" val="1024086991"/>
+      </p:ext>
+    </p:extLst>
+  </p:cSld>
+  <p:clrMapOvr>
+    <a:masterClrMapping/>
+  </p:clrMapOvr>
+</p:notes>
+</file>
+
+<file path=ppt/notesSlides/notesSlide22.xml><?xml version="1.0" encoding="utf-8"?>
+<p:notes xmlns:a="http://schemas.openxmlformats.org/drawingml/2006/main" xmlns:r="http://schemas.openxmlformats.org/officeDocument/2006/relationships" xmlns:p="http://schemas.openxmlformats.org/presentationml/2006/main">
+  <p:cSld>
+    <p:spTree>
+      <p:nvGrpSpPr>
+        <p:cNvPr id="1" name=""/>
+        <p:cNvGrpSpPr/>
+        <p:nvPr/>
+      </p:nvGrpSpPr>
+      <p:grpSpPr>
+        <a:xfrm>
+          <a:off x="0" y="0"/>
+          <a:ext cx="0" cy="0"/>
+          <a:chOff x="0" y="0"/>
+          <a:chExt cx="0" cy="0"/>
+        </a:xfrm>
+      </p:grpSpPr>
+      <p:sp>
+        <p:nvSpPr>
+          <p:cNvPr id="2" name="Slide Image Placeholder 1"/>
+          <p:cNvSpPr>
+            <a:spLocks noGrp="1" noRot="1" noChangeAspect="1"/>
+          </p:cNvSpPr>
+          <p:nvPr>
+            <p:ph type="sldImg"/>
+          </p:nvPr>
+        </p:nvSpPr>
+        <p:spPr/>
+      </p:sp>
+      <p:sp>
+        <p:nvSpPr>
+          <p:cNvPr id="3" name="Notes Placeholder 2"/>
+          <p:cNvSpPr>
+            <a:spLocks noGrp="1"/>
+          </p:cNvSpPr>
+          <p:nvPr>
+            <p:ph type="body" idx="1"/>
+          </p:nvPr>
+        </p:nvSpPr>
+        <p:spPr/>
+        <p:txBody>
+          <a:bodyPr/>
+          <a:lstStyle/>
+          <a:p>
+            <a:r>
+              <a:rPr lang="en-US" dirty="0"/>
+              <a:t>NEDEN bir banka bunu kurabilir? Çünkü veri kurumdan hiç çıkmıyor — ve bunu iddia etmiyoruz, gösteriyoruz.
+Python'un ağ katmanını yamaladık; localhost dışına çıkan her bağlantı hata veriyor. Sonra şartnamenin KENDİ örnek metnini işledik. Sonuç ekranda: tek bir dış çağrı yapılmadan hepsi doğru çıkarıldı.
+Bir banka için bu pazarlama cümlesi değil, satın alma şartı. (40 sn)</a:t>
+            </a:r>
+          </a:p>
+        </p:txBody>
+      </p:sp>
+      <p:sp>
+        <p:nvSpPr>
+          <p:cNvPr id="4" name="Slide Number Placeholder 3"/>
+          <p:cNvSpPr>
+            <a:spLocks noGrp="1"/>
+          </p:cNvSpPr>
+          <p:nvPr>
+            <p:ph type="sldNum" sz="quarter" idx="10"/>
+          </p:nvPr>
+        </p:nvSpPr>
+        <p:spPr/>
+        <p:txBody>
+          <a:bodyPr/>
+          <a:lstStyle/>
+          <a:p>
+            <a:fld id="{F7021451-1387-4CA6-816F-3879F97B5CBC}" type="slidenum">
+              <a:rPr lang="en-US"/>
+              <a:t>22</a:t>
+            </a:fld>
+            <a:endParaRPr lang="en-US"/>
+          </a:p>
+        </p:txBody>
+      </p:sp>
+    </p:spTree>
+    <p:extLst>
+      <p:ext uri="{BB962C8B-B14F-4D97-AF65-F5344CB8AC3E}">
+        <p14:creationId xmlns:p14="http://schemas.microsoft.com/office/powerpoint/2010/main" val="1024086991"/>
+      </p:ext>
+    </p:extLst>
+  </p:cSld>
+  <p:clrMapOvr>
+    <a:masterClrMapping/>
+  </p:clrMapOvr>
+</p:notes>
+</file>
+
+<file path=ppt/notesSlides/notesSlide23.xml><?xml version="1.0" encoding="utf-8"?>
+<p:notes xmlns:a="http://schemas.openxmlformats.org/drawingml/2006/main" xmlns:r="http://schemas.openxmlformats.org/officeDocument/2006/relationships" xmlns:p="http://schemas.openxmlformats.org/presentationml/2006/main">
+  <p:cSld>
+    <p:spTree>
+      <p:nvGrpSpPr>
+        <p:cNvPr id="1" name=""/>
+        <p:cNvGrpSpPr/>
+        <p:nvPr/>
+      </p:nvGrpSpPr>
+      <p:grpSpPr>
+        <a:xfrm>
+          <a:off x="0" y="0"/>
+          <a:ext cx="0" cy="0"/>
+          <a:chOff x="0" y="0"/>
+          <a:chExt cx="0" cy="0"/>
+        </a:xfrm>
+      </p:grpSpPr>
+      <p:sp>
+        <p:nvSpPr>
+          <p:cNvPr id="2" name="Slide Image Placeholder 1"/>
+          <p:cNvSpPr>
+            <a:spLocks noGrp="1" noRot="1" noChangeAspect="1"/>
+          </p:cNvSpPr>
+          <p:nvPr>
+            <p:ph type="sldImg"/>
+          </p:nvPr>
+        </p:nvSpPr>
+        <p:spPr/>
+      </p:sp>
+      <p:sp>
+        <p:nvSpPr>
+          <p:cNvPr id="3" name="Notes Placeholder 2"/>
+          <p:cNvSpPr>
+            <a:spLocks noGrp="1"/>
+          </p:cNvSpPr>
+          <p:nvPr>
+            <p:ph type="body" idx="1"/>
+          </p:nvPr>
+        </p:nvSpPr>
+        <p:spPr/>
+        <p:txBody>
+          <a:bodyPr/>
+          <a:lstStyle/>
+          <a:p>
+            <a:r>
+              <a:rPr lang="en-US" dirty="0"/>
+              <a:t>Kapsam eksiğimizi biliyoruz, sıradaki işimiz o. Teşekkürler. (10 sn)</a:t>
+            </a:r>
+          </a:p>
+        </p:txBody>
+      </p:sp>
+      <p:sp>
+        <p:nvSpPr>
+          <p:cNvPr id="4" name="Slide Number Placeholder 3"/>
+          <p:cNvSpPr>
+            <a:spLocks noGrp="1"/>
+          </p:cNvSpPr>
+          <p:nvPr>
+            <p:ph type="sldNum" sz="quarter" idx="10"/>
+          </p:nvPr>
+        </p:nvSpPr>
+        <p:spPr/>
+        <p:txBody>
+          <a:bodyPr/>
+          <a:lstStyle/>
+          <a:p>
+            <a:fld id="{F7021451-1387-4CA6-816F-3879F97B5CBC}" type="slidenum">
+              <a:rPr lang="en-US"/>
+              <a:t>23</a:t>
+            </a:fld>
+            <a:endParaRPr lang="en-US"/>
+          </a:p>
+        </p:txBody>
+      </p:sp>
+    </p:spTree>
+    <p:extLst>
+      <p:ext uri="{BB962C8B-B14F-4D97-AF65-F5344CB8AC3E}">
+        <p14:creationId xmlns:p14="http://schemas.microsoft.com/office/powerpoint/2010/main" val="1024086991"/>
       </p:ext>
     </p:extLst>
   </p:cSld>
@@ -2631,7 +2810,8 @@
           <a:p>
             <a:r>
               <a:rPr lang="en-US" dirty="0"/>
-              <a:t>EN ÖNEMLİ BÖLÜM. Sorduktan sonra iki saniye bekle — jüri de bunu merak ediyor. (4 sn)</a:t>
+              <a:t>NEDEN LLM'e tek başına güvenmiyoruz? Çünkü kâr payı oranı gibi bir alanda halüsinasyon kabul edilemez. Yanlış oran müşteriye yansır.
+Bu yüzden kural katmanı önce çalışıyor — deterministik, aynı metin her zaman aynı sonuç. LLM yalnızca kuralın yakalayamadığı serbest ifadelerde devreye giriyor. Ve tamamen kapatılabiliyor; bu birazdanki kurum içi iddiasının temeli. (32 sn)</a:t>
             </a:r>
           </a:p>
         </p:txBody>
@@ -2662,7 +2842,7 @@
     </p:spTree>
     <p:extLst>
       <p:ext uri="{BB962C8B-B14F-4D97-AF65-F5344CB8AC3E}">
-        <p14:creationId xmlns:p14="http://schemas.microsoft.com/office/powerpoint/2010/main" val="1024086991"/>
+        <p14:creationId xmlns:p14="http://schemas.microsoft.com/office/powerpoint/2010/main" val="1979675253"/>
       </p:ext>
     </p:extLst>
   </p:cSld>
@@ -2718,9 +2898,8 @@
           <a:p>
             <a:r>
               <a:rPr lang="en-US" dirty="0"/>
-              <a:t>SUNUMUN EN ÖNEMLİ 40 SANİYESİ.
-NEDEN bu sayıya güvenelim? Çoğu NLP çözümü bir sonuç verir ve 'güven bana' der. Biz her değerin kaynağını gösteriyoruz: metnin hangi ifadesinden, hangi yöntemle, ne güvenle çıkarıldı.
-Bir banka için bu süs değil zorunluluk — denetim ekibi 'bu sayı nereden geldi' diye sorduğunda cevap bir tık uzakta. Ekrandaki örnek gerçek bir Albaraka metni; kesme işaretinden önce boşluk var, standart bir regex burada tökezler. (40 sn)</a:t>
+              <a:t>NEDEN LLM'e tek başına güvenmiyoruz? Çünkü kâr payı oranı gibi bir alanda halüsinasyon kabul edilemez. Yanlış oran müşteriye yansır.
+Bu yüzden kural katmanı önce çalışıyor — deterministik, aynı metin her zaman aynı sonuç. LLM yalnızca kuralın yakalayamadığı serbest ifadelerde devreye giriyor. Ve tamamen kapatılabiliyor; bu birazdanki kurum içi iddiasının temeli. (32 sn)</a:t>
             </a:r>
           </a:p>
         </p:txBody>
@@ -2751,7 +2930,7 @@
     </p:spTree>
     <p:extLst>
       <p:ext uri="{BB962C8B-B14F-4D97-AF65-F5344CB8AC3E}">
-        <p14:creationId xmlns:p14="http://schemas.microsoft.com/office/powerpoint/2010/main" val="1024086991"/>
+        <p14:creationId xmlns:p14="http://schemas.microsoft.com/office/powerpoint/2010/main" val="193739515"/>
       </p:ext>
     </p:extLst>
   </p:cSld>
@@ -3216,10 +3395,2504 @@
   <p:clrMapOvr>
     <a:masterClrMapping/>
   </p:clrMapOvr>
+  <p:timing>
+    <p:tnLst>
+      <p:par>
+        <p:cTn id="1" dur="indefinite" restart="never" nodeType="tmRoot"/>
+      </p:par>
+    </p:tnLst>
+  </p:timing>
 </p:sld>
 </file>
 
 <file path=ppt/slides/slide10.xml><?xml version="1.0" encoding="utf-8"?>
+<p:sld xmlns:a="http://schemas.openxmlformats.org/drawingml/2006/main" xmlns:r="http://schemas.openxmlformats.org/officeDocument/2006/relationships" xmlns:p="http://schemas.openxmlformats.org/presentationml/2006/main">
+  <p:cSld>
+    <p:bg>
+      <p:bgPr>
+        <a:blipFill dpi="0" rotWithShape="1">
+          <a:blip r:embed="rId3">
+            <a:lum/>
+          </a:blip>
+          <a:srcRect/>
+          <a:stretch>
+            <a:fillRect/>
+          </a:stretch>
+        </a:blipFill>
+        <a:effectLst/>
+      </p:bgPr>
+    </p:bg>
+    <p:spTree>
+      <p:nvGrpSpPr>
+        <p:cNvPr id="1" name=""/>
+        <p:cNvGrpSpPr/>
+        <p:nvPr/>
+      </p:nvGrpSpPr>
+      <p:grpSpPr>
+        <a:xfrm>
+          <a:off x="0" y="0"/>
+          <a:ext cx="0" cy="0"/>
+          <a:chOff x="0" y="0"/>
+          <a:chExt cx="0" cy="0"/>
+        </a:xfrm>
+      </p:grpSpPr>
+      <p:sp>
+        <p:nvSpPr>
+          <p:cNvPr id="31" name="mrf_dugum2"/>
+          <p:cNvSpPr/>
+          <p:nvPr/>
+        </p:nvSpPr>
+        <p:spPr>
+          <a:xfrm>
+            <a:off x="6565392" y="1880181"/>
+            <a:ext cx="2542032" cy="1426464"/>
+          </a:xfrm>
+          <a:prstGeom prst="roundRect">
+            <a:avLst>
+              <a:gd name="adj" fmla="val 5128"/>
+            </a:avLst>
+          </a:prstGeom>
+          <a:solidFill>
+            <a:srgbClr val="FAFAFA"/>
+          </a:solidFill>
+          <a:ln w="12700">
+            <a:solidFill>
+              <a:srgbClr val="E5E5E5"/>
+            </a:solidFill>
+            <a:prstDash val="solid"/>
+          </a:ln>
+        </p:spPr>
+      </p:sp>
+      <p:sp>
+        <p:nvSpPr>
+          <p:cNvPr id="17" name="mrf_dugum2"/>
+          <p:cNvSpPr/>
+          <p:nvPr/>
+        </p:nvSpPr>
+        <p:spPr>
+          <a:xfrm>
+            <a:off x="3654988" y="1889760"/>
+            <a:ext cx="2542032" cy="1426464"/>
+          </a:xfrm>
+          <a:prstGeom prst="roundRect">
+            <a:avLst>
+              <a:gd name="adj" fmla="val 5128"/>
+            </a:avLst>
+          </a:prstGeom>
+          <a:solidFill>
+            <a:srgbClr val="FAFAFA"/>
+          </a:solidFill>
+          <a:ln w="12700">
+            <a:solidFill>
+              <a:srgbClr val="E5E5E5"/>
+            </a:solidFill>
+            <a:prstDash val="solid"/>
+          </a:ln>
+        </p:spPr>
+      </p:sp>
+      <p:sp>
+        <p:nvSpPr>
+          <p:cNvPr id="2" name="mrf_bolumNo"/>
+          <p:cNvSpPr txBox="1"/>
+          <p:nvPr/>
+        </p:nvSpPr>
+        <p:spPr>
+          <a:xfrm>
+            <a:off x="8695944" y="384048"/>
+            <a:ext cx="2743200" cy="274320"/>
+          </a:xfrm>
+          <a:prstGeom prst="rect">
+            <a:avLst/>
+          </a:prstGeom>
+          <a:noFill/>
+          <a:ln/>
+        </p:spPr>
+        <p:txBody>
+          <a:bodyPr wrap="square" lIns="0" tIns="0" rIns="0" bIns="0" rtlCol="0" anchor="ctr"/>
+          <a:lstStyle/>
+          <a:p>
+            <a:pPr marL="0" indent="0" algn="r">
+              <a:buNone/>
+            </a:pPr>
+            <a:r>
+              <a:rPr lang="en-US" sz="1050" kern="0" spc="240" dirty="0">
+                <a:solidFill>
+                  <a:srgbClr val="A3A3A3"/>
+                </a:solidFill>
+                <a:latin typeface="Segoe UI Semibold" pitchFamily="34" charset="0"/>
+                <a:ea typeface="Segoe UI Semibold" pitchFamily="34" charset="-122"/>
+                <a:cs typeface="Segoe UI Semibold" pitchFamily="34" charset="-120"/>
+              </a:rPr>
+              <a:t>03 · MİMARİ</a:t>
+            </a:r>
+            <a:endParaRPr lang="en-US" sz="1050" dirty="0"/>
+          </a:p>
+        </p:txBody>
+      </p:sp>
+      <p:pic>
+        <p:nvPicPr>
+          <p:cNvPr id="3" name="mrf_logo" descr="logo.png"/>
+          <p:cNvPicPr>
+            <a:picLocks noChangeAspect="1"/>
+          </p:cNvPicPr>
+          <p:nvPr/>
+        </p:nvPicPr>
+        <p:blipFill>
+          <a:blip r:embed="rId4">
+            <a:alphaModFix amt="88000"/>
+          </a:blip>
+          <a:stretch>
+            <a:fillRect/>
+          </a:stretch>
+        </p:blipFill>
+        <p:spPr>
+          <a:xfrm>
+            <a:off x="9957816" y="6144768"/>
+            <a:ext cx="1481328" cy="457200"/>
+          </a:xfrm>
+          <a:prstGeom prst="rect">
+            <a:avLst/>
+          </a:prstGeom>
+        </p:spPr>
+      </p:pic>
+      <p:sp>
+        <p:nvSpPr>
+          <p:cNvPr id="4" name="mrf_marka0"/>
+          <p:cNvSpPr/>
+          <p:nvPr/>
+        </p:nvSpPr>
+        <p:spPr>
+          <a:xfrm>
+            <a:off x="749808" y="457200"/>
+            <a:ext cx="118872" cy="118872"/>
+          </a:xfrm>
+          <a:prstGeom prst="rect">
+            <a:avLst/>
+          </a:prstGeom>
+          <a:solidFill>
+            <a:srgbClr val="2563EB"/>
+          </a:solidFill>
+          <a:ln w="12700">
+            <a:solidFill>
+              <a:srgbClr val="2563EB"/>
+            </a:solidFill>
+            <a:prstDash val="solid"/>
+          </a:ln>
+        </p:spPr>
+      </p:sp>
+      <p:sp>
+        <p:nvSpPr>
+          <p:cNvPr id="5" name="mrf_marka1"/>
+          <p:cNvSpPr/>
+          <p:nvPr/>
+        </p:nvSpPr>
+        <p:spPr>
+          <a:xfrm>
+            <a:off x="905256" y="457200"/>
+            <a:ext cx="118872" cy="118872"/>
+          </a:xfrm>
+          <a:prstGeom prst="rect">
+            <a:avLst/>
+          </a:prstGeom>
+          <a:solidFill>
+            <a:srgbClr val="06B6D4"/>
+          </a:solidFill>
+          <a:ln w="12700">
+            <a:solidFill>
+              <a:srgbClr val="06B6D4"/>
+            </a:solidFill>
+            <a:prstDash val="solid"/>
+          </a:ln>
+        </p:spPr>
+      </p:sp>
+      <p:sp>
+        <p:nvSpPr>
+          <p:cNvPr id="6" name="mrf_marka2"/>
+          <p:cNvSpPr/>
+          <p:nvPr/>
+        </p:nvSpPr>
+        <p:spPr>
+          <a:xfrm>
+            <a:off x="1060704" y="457200"/>
+            <a:ext cx="118872" cy="118872"/>
+          </a:xfrm>
+          <a:prstGeom prst="rect">
+            <a:avLst/>
+          </a:prstGeom>
+          <a:solidFill>
+            <a:srgbClr val="6366F1"/>
+          </a:solidFill>
+          <a:ln w="12700">
+            <a:solidFill>
+              <a:srgbClr val="6366F1"/>
+            </a:solidFill>
+            <a:prstDash val="solid"/>
+          </a:ln>
+        </p:spPr>
+      </p:sp>
+      <p:sp>
+        <p:nvSpPr>
+          <p:cNvPr id="7" name="mrf_soruKucuk"/>
+          <p:cNvSpPr txBox="1"/>
+          <p:nvPr/>
+        </p:nvSpPr>
+        <p:spPr>
+          <a:xfrm>
+            <a:off x="1408176" y="384048"/>
+            <a:ext cx="10030968" cy="274320"/>
+          </a:xfrm>
+          <a:prstGeom prst="rect">
+            <a:avLst/>
+          </a:prstGeom>
+          <a:noFill/>
+          <a:ln/>
+        </p:spPr>
+        <p:txBody>
+          <a:bodyPr wrap="square" lIns="0" tIns="0" rIns="0" bIns="0" rtlCol="0" anchor="ctr"/>
+          <a:lstStyle/>
+          <a:p>
+            <a:pPr marL="0" indent="0" algn="l">
+              <a:buNone/>
+            </a:pPr>
+            <a:r>
+              <a:rPr lang="en-US" sz="1350" dirty="0">
+                <a:solidFill>
+                  <a:srgbClr val="2563EB"/>
+                </a:solidFill>
+                <a:latin typeface="Segoe UI Semibold" pitchFamily="34" charset="0"/>
+                <a:ea typeface="Segoe UI Semibold" pitchFamily="34" charset="-122"/>
+                <a:cs typeface="Segoe UI Semibold" pitchFamily="34" charset="-120"/>
+              </a:rPr>
+              <a:t>Neden LLM'e tek başına güvenmiyoruz?</a:t>
+            </a:r>
+            <a:endParaRPr lang="en-US" sz="1350" dirty="0"/>
+          </a:p>
+        </p:txBody>
+      </p:sp>
+      <p:sp>
+        <p:nvSpPr>
+          <p:cNvPr id="8" name="mrf_baslik"/>
+          <p:cNvSpPr txBox="1"/>
+          <p:nvPr/>
+        </p:nvSpPr>
+        <p:spPr>
+          <a:xfrm>
+            <a:off x="749808" y="932688"/>
+            <a:ext cx="10689336" cy="658368"/>
+          </a:xfrm>
+          <a:prstGeom prst="rect">
+            <a:avLst/>
+          </a:prstGeom>
+          <a:noFill/>
+          <a:ln/>
+        </p:spPr>
+        <p:txBody>
+          <a:bodyPr wrap="square" lIns="0" tIns="0" rIns="0" bIns="0" rtlCol="0" anchor="ctr"/>
+          <a:lstStyle/>
+          <a:p>
+            <a:pPr marL="0" indent="0" algn="l">
+              <a:buNone/>
+            </a:pPr>
+            <a:r>
+              <a:rPr lang="en-US" sz="3700" dirty="0">
+                <a:solidFill>
+                  <a:srgbClr val="171717"/>
+                </a:solidFill>
+                <a:latin typeface="Segoe UI Semibold" pitchFamily="34" charset="0"/>
+                <a:ea typeface="Segoe UI Semibold" pitchFamily="34" charset="-122"/>
+                <a:cs typeface="Segoe UI Semibold" pitchFamily="34" charset="-120"/>
+              </a:rPr>
+              <a:t>Önce kural, sonra LLM</a:t>
+            </a:r>
+            <a:endParaRPr lang="en-US" sz="3700" dirty="0"/>
+          </a:p>
+        </p:txBody>
+      </p:sp>
+      <p:sp>
+        <p:nvSpPr>
+          <p:cNvPr id="9" name="mrf_dugum0"/>
+          <p:cNvSpPr/>
+          <p:nvPr/>
+        </p:nvSpPr>
+        <p:spPr>
+          <a:xfrm>
+            <a:off x="749808" y="1883664"/>
+            <a:ext cx="2542032" cy="1426464"/>
+          </a:xfrm>
+          <a:prstGeom prst="roundRect">
+            <a:avLst>
+              <a:gd name="adj" fmla="val 5128"/>
+            </a:avLst>
+          </a:prstGeom>
+          <a:solidFill>
+            <a:srgbClr val="FAFAFA"/>
+          </a:solidFill>
+          <a:ln w="12700">
+            <a:solidFill>
+              <a:srgbClr val="E5E5E5"/>
+            </a:solidFill>
+            <a:prstDash val="solid"/>
+          </a:ln>
+        </p:spPr>
+      </p:sp>
+      <p:sp>
+        <p:nvSpPr>
+          <p:cNvPr id="10" name="mrf_dugumAd0"/>
+          <p:cNvSpPr txBox="1"/>
+          <p:nvPr/>
+        </p:nvSpPr>
+        <p:spPr>
+          <a:xfrm>
+            <a:off x="877824" y="2066544"/>
+            <a:ext cx="2286000" cy="457200"/>
+          </a:xfrm>
+          <a:prstGeom prst="rect">
+            <a:avLst/>
+          </a:prstGeom>
+          <a:noFill/>
+          <a:ln/>
+        </p:spPr>
+        <p:txBody>
+          <a:bodyPr wrap="square" lIns="0" tIns="0" rIns="0" bIns="0" rtlCol="0" anchor="ctr"/>
+          <a:lstStyle/>
+          <a:p>
+            <a:pPr marL="0" indent="0" algn="ctr">
+              <a:buNone/>
+            </a:pPr>
+            <a:r>
+              <a:rPr lang="en-US" sz="1500" b="1" dirty="0">
+                <a:solidFill>
+                  <a:srgbClr val="525252"/>
+                </a:solidFill>
+                <a:latin typeface="Segoe UI" pitchFamily="34" charset="0"/>
+                <a:ea typeface="Segoe UI" pitchFamily="34" charset="-122"/>
+                <a:cs typeface="Segoe UI" pitchFamily="34" charset="-120"/>
+              </a:rPr>
+              <a:t>Ham metin</a:t>
+            </a:r>
+            <a:endParaRPr lang="en-US" sz="1500" dirty="0"/>
+          </a:p>
+        </p:txBody>
+      </p:sp>
+      <p:sp>
+        <p:nvSpPr>
+          <p:cNvPr id="11" name="Text 8"/>
+          <p:cNvSpPr txBox="1"/>
+          <p:nvPr/>
+        </p:nvSpPr>
+        <p:spPr>
+          <a:xfrm>
+            <a:off x="877824" y="2523744"/>
+            <a:ext cx="2286000" cy="566928"/>
+          </a:xfrm>
+          <a:prstGeom prst="rect">
+            <a:avLst/>
+          </a:prstGeom>
+          <a:noFill/>
+          <a:ln/>
+        </p:spPr>
+        <p:txBody>
+          <a:bodyPr wrap="square" lIns="0" tIns="0" rIns="0" bIns="0" rtlCol="0" anchor="t"/>
+          <a:lstStyle/>
+          <a:p>
+            <a:pPr marL="0" indent="0" algn="ctr">
+              <a:buNone/>
+            </a:pPr>
+            <a:r>
+              <a:rPr lang="en-US" sz="1050" dirty="0">
+                <a:solidFill>
+                  <a:srgbClr val="A3A3A3"/>
+                </a:solidFill>
+                <a:latin typeface="Segoe UI" pitchFamily="34" charset="0"/>
+                <a:ea typeface="Segoe UI" pitchFamily="34" charset="-122"/>
+                <a:cs typeface="Segoe UI" pitchFamily="34" charset="-120"/>
+              </a:rPr>
+              <a:t>banka sayfası</a:t>
+            </a:r>
+            <a:endParaRPr lang="en-US" sz="1050" dirty="0"/>
+          </a:p>
+        </p:txBody>
+      </p:sp>
+      <p:sp>
+        <p:nvSpPr>
+          <p:cNvPr id="12" name="Text 9"/>
+          <p:cNvSpPr txBox="1"/>
+          <p:nvPr/>
+        </p:nvSpPr>
+        <p:spPr>
+          <a:xfrm>
+            <a:off x="3291840" y="1883664"/>
+            <a:ext cx="384048" cy="1426464"/>
+          </a:xfrm>
+          <a:prstGeom prst="rect">
+            <a:avLst/>
+          </a:prstGeom>
+          <a:noFill/>
+          <a:ln/>
+        </p:spPr>
+        <p:txBody>
+          <a:bodyPr wrap="square" lIns="0" tIns="0" rIns="0" bIns="0" rtlCol="0" anchor="ctr"/>
+          <a:lstStyle/>
+          <a:p>
+            <a:pPr marL="0" indent="0" algn="ctr">
+              <a:buNone/>
+            </a:pPr>
+            <a:r>
+              <a:rPr lang="en-US" sz="2600" b="1" dirty="0">
+                <a:solidFill>
+                  <a:srgbClr val="E5E5E5"/>
+                </a:solidFill>
+                <a:latin typeface="Segoe UI" pitchFamily="34" charset="0"/>
+                <a:ea typeface="Segoe UI" pitchFamily="34" charset="-122"/>
+                <a:cs typeface="Segoe UI" pitchFamily="34" charset="-120"/>
+              </a:rPr>
+              <a:t>›</a:t>
+            </a:r>
+            <a:endParaRPr lang="en-US" sz="2600" dirty="0"/>
+          </a:p>
+        </p:txBody>
+      </p:sp>
+      <p:sp>
+        <p:nvSpPr>
+          <p:cNvPr id="14" name="mrf_dugumAd1"/>
+          <p:cNvSpPr txBox="1"/>
+          <p:nvPr/>
+        </p:nvSpPr>
+        <p:spPr>
+          <a:xfrm>
+            <a:off x="3803904" y="2066544"/>
+            <a:ext cx="2286000" cy="457200"/>
+          </a:xfrm>
+          <a:prstGeom prst="rect">
+            <a:avLst/>
+          </a:prstGeom>
+          <a:noFill/>
+          <a:ln/>
+        </p:spPr>
+        <p:txBody>
+          <a:bodyPr wrap="square" lIns="0" tIns="0" rIns="0" bIns="0" rtlCol="0" anchor="ctr"/>
+          <a:lstStyle/>
+          <a:p>
+            <a:pPr marL="0" indent="0" algn="ctr">
+              <a:buNone/>
+            </a:pPr>
+            <a:r>
+              <a:rPr lang="en-US" sz="1500" b="1" dirty="0">
+                <a:solidFill>
+                  <a:srgbClr val="2563EB"/>
+                </a:solidFill>
+                <a:latin typeface="Segoe UI" pitchFamily="34" charset="0"/>
+                <a:ea typeface="Segoe UI" pitchFamily="34" charset="-122"/>
+                <a:cs typeface="Segoe UI" pitchFamily="34" charset="-120"/>
+              </a:rPr>
+              <a:t>Kural tabanlı</a:t>
+            </a:r>
+            <a:endParaRPr lang="en-US" sz="1500" dirty="0"/>
+          </a:p>
+        </p:txBody>
+      </p:sp>
+      <p:sp>
+        <p:nvSpPr>
+          <p:cNvPr id="15" name="Text 12"/>
+          <p:cNvSpPr txBox="1"/>
+          <p:nvPr/>
+        </p:nvSpPr>
+        <p:spPr>
+          <a:xfrm>
+            <a:off x="3803904" y="2523744"/>
+            <a:ext cx="2286000" cy="566928"/>
+          </a:xfrm>
+          <a:prstGeom prst="rect">
+            <a:avLst/>
+          </a:prstGeom>
+          <a:noFill/>
+          <a:ln/>
+        </p:spPr>
+        <p:txBody>
+          <a:bodyPr wrap="square" lIns="0" tIns="0" rIns="0" bIns="0" rtlCol="0" anchor="t"/>
+          <a:lstStyle/>
+          <a:p>
+            <a:pPr marL="0" indent="0" algn="ctr">
+              <a:buNone/>
+            </a:pPr>
+            <a:r>
+              <a:rPr lang="en-US" sz="1050" dirty="0">
+                <a:solidFill>
+                  <a:srgbClr val="A3A3A3"/>
+                </a:solidFill>
+                <a:latin typeface="Segoe UI" pitchFamily="34" charset="0"/>
+                <a:ea typeface="Segoe UI" pitchFamily="34" charset="-122"/>
+                <a:cs typeface="Segoe UI" pitchFamily="34" charset="-120"/>
+              </a:rPr>
+              <a:t>~2.000 satır · deterministik</a:t>
+            </a:r>
+            <a:endParaRPr lang="en-US" sz="1050" dirty="0"/>
+          </a:p>
+        </p:txBody>
+      </p:sp>
+      <p:sp>
+        <p:nvSpPr>
+          <p:cNvPr id="16" name="Text 13"/>
+          <p:cNvSpPr txBox="1"/>
+          <p:nvPr/>
+        </p:nvSpPr>
+        <p:spPr>
+          <a:xfrm>
+            <a:off x="6217920" y="1883664"/>
+            <a:ext cx="384048" cy="1426464"/>
+          </a:xfrm>
+          <a:prstGeom prst="rect">
+            <a:avLst/>
+          </a:prstGeom>
+          <a:noFill/>
+          <a:ln/>
+        </p:spPr>
+        <p:txBody>
+          <a:bodyPr wrap="square" lIns="0" tIns="0" rIns="0" bIns="0" rtlCol="0" anchor="ctr"/>
+          <a:lstStyle/>
+          <a:p>
+            <a:pPr marL="0" indent="0" algn="ctr">
+              <a:buNone/>
+            </a:pPr>
+            <a:r>
+              <a:rPr lang="en-US" sz="2600" b="1" dirty="0">
+                <a:solidFill>
+                  <a:srgbClr val="E5E5E5"/>
+                </a:solidFill>
+                <a:latin typeface="Segoe UI" pitchFamily="34" charset="0"/>
+                <a:ea typeface="Segoe UI" pitchFamily="34" charset="-122"/>
+                <a:cs typeface="Segoe UI" pitchFamily="34" charset="-120"/>
+              </a:rPr>
+              <a:t>›</a:t>
+            </a:r>
+            <a:endParaRPr lang="en-US" sz="2600" dirty="0"/>
+          </a:p>
+        </p:txBody>
+      </p:sp>
+      <p:sp>
+        <p:nvSpPr>
+          <p:cNvPr id="18" name="mrf_dugumAd2"/>
+          <p:cNvSpPr txBox="1"/>
+          <p:nvPr/>
+        </p:nvSpPr>
+        <p:spPr>
+          <a:xfrm>
+            <a:off x="6729984" y="2066544"/>
+            <a:ext cx="2286000" cy="457200"/>
+          </a:xfrm>
+          <a:prstGeom prst="rect">
+            <a:avLst/>
+          </a:prstGeom>
+          <a:noFill/>
+          <a:ln/>
+        </p:spPr>
+        <p:txBody>
+          <a:bodyPr wrap="square" lIns="0" tIns="0" rIns="0" bIns="0" rtlCol="0" anchor="ctr"/>
+          <a:lstStyle/>
+          <a:p>
+            <a:pPr marL="0" indent="0" algn="ctr">
+              <a:buNone/>
+            </a:pPr>
+            <a:r>
+              <a:rPr lang="en-US" sz="1500" b="1" dirty="0">
+                <a:solidFill>
+                  <a:srgbClr val="525252"/>
+                </a:solidFill>
+                <a:latin typeface="Segoe UI" pitchFamily="34" charset="0"/>
+                <a:ea typeface="Segoe UI" pitchFamily="34" charset="-122"/>
+                <a:cs typeface="Segoe UI" pitchFamily="34" charset="-120"/>
+              </a:rPr>
+              <a:t>LLM tamamlayıcı</a:t>
+            </a:r>
+            <a:endParaRPr lang="en-US" sz="1500" dirty="0"/>
+          </a:p>
+        </p:txBody>
+      </p:sp>
+      <p:sp>
+        <p:nvSpPr>
+          <p:cNvPr id="19" name="Text 16"/>
+          <p:cNvSpPr txBox="1"/>
+          <p:nvPr/>
+        </p:nvSpPr>
+        <p:spPr>
+          <a:xfrm>
+            <a:off x="6729984" y="2523744"/>
+            <a:ext cx="2286000" cy="566928"/>
+          </a:xfrm>
+          <a:prstGeom prst="rect">
+            <a:avLst/>
+          </a:prstGeom>
+          <a:noFill/>
+          <a:ln/>
+        </p:spPr>
+        <p:txBody>
+          <a:bodyPr wrap="square" lIns="0" tIns="0" rIns="0" bIns="0" rtlCol="0" anchor="t"/>
+          <a:lstStyle/>
+          <a:p>
+            <a:pPr marL="0" indent="0" algn="ctr">
+              <a:buNone/>
+            </a:pPr>
+            <a:r>
+              <a:rPr lang="en-US" sz="1050" dirty="0">
+                <a:solidFill>
+                  <a:srgbClr val="A3A3A3"/>
+                </a:solidFill>
+                <a:latin typeface="Segoe UI" pitchFamily="34" charset="0"/>
+                <a:ea typeface="Segoe UI" pitchFamily="34" charset="-122"/>
+                <a:cs typeface="Segoe UI" pitchFamily="34" charset="-120"/>
+              </a:rPr>
+              <a:t>yalnızca boş alanlar</a:t>
+            </a:r>
+            <a:endParaRPr lang="en-US" sz="1050" dirty="0"/>
+          </a:p>
+        </p:txBody>
+      </p:sp>
+      <p:sp>
+        <p:nvSpPr>
+          <p:cNvPr id="20" name="Text 17"/>
+          <p:cNvSpPr txBox="1"/>
+          <p:nvPr/>
+        </p:nvSpPr>
+        <p:spPr>
+          <a:xfrm>
+            <a:off x="9144000" y="1883664"/>
+            <a:ext cx="384048" cy="1426464"/>
+          </a:xfrm>
+          <a:prstGeom prst="rect">
+            <a:avLst/>
+          </a:prstGeom>
+          <a:noFill/>
+          <a:ln/>
+        </p:spPr>
+        <p:txBody>
+          <a:bodyPr wrap="square" lIns="0" tIns="0" rIns="0" bIns="0" rtlCol="0" anchor="ctr"/>
+          <a:lstStyle/>
+          <a:p>
+            <a:pPr marL="0" indent="0" algn="ctr">
+              <a:buNone/>
+            </a:pPr>
+            <a:r>
+              <a:rPr lang="en-US" sz="2600" b="1" dirty="0">
+                <a:solidFill>
+                  <a:srgbClr val="E5E5E5"/>
+                </a:solidFill>
+                <a:latin typeface="Segoe UI" pitchFamily="34" charset="0"/>
+                <a:ea typeface="Segoe UI" pitchFamily="34" charset="-122"/>
+                <a:cs typeface="Segoe UI" pitchFamily="34" charset="-120"/>
+              </a:rPr>
+              <a:t>›</a:t>
+            </a:r>
+            <a:endParaRPr lang="en-US" sz="2600" dirty="0"/>
+          </a:p>
+        </p:txBody>
+      </p:sp>
+      <p:sp>
+        <p:nvSpPr>
+          <p:cNvPr id="21" name="mrf_dugum3"/>
+          <p:cNvSpPr/>
+          <p:nvPr/>
+        </p:nvSpPr>
+        <p:spPr>
+          <a:xfrm>
+            <a:off x="9528048" y="1883664"/>
+            <a:ext cx="2542032" cy="1426464"/>
+          </a:xfrm>
+          <a:prstGeom prst="roundRect">
+            <a:avLst>
+              <a:gd name="adj" fmla="val 5128"/>
+            </a:avLst>
+          </a:prstGeom>
+          <a:solidFill>
+            <a:srgbClr val="ECFDF5"/>
+          </a:solidFill>
+          <a:ln w="12700">
+            <a:solidFill>
+              <a:srgbClr val="A7F3D0"/>
+            </a:solidFill>
+            <a:prstDash val="solid"/>
+          </a:ln>
+        </p:spPr>
+      </p:sp>
+      <p:sp>
+        <p:nvSpPr>
+          <p:cNvPr id="22" name="mrf_dugumAd3"/>
+          <p:cNvSpPr txBox="1"/>
+          <p:nvPr/>
+        </p:nvSpPr>
+        <p:spPr>
+          <a:xfrm>
+            <a:off x="9656064" y="2066544"/>
+            <a:ext cx="2286000" cy="457200"/>
+          </a:xfrm>
+          <a:prstGeom prst="rect">
+            <a:avLst/>
+          </a:prstGeom>
+          <a:noFill/>
+          <a:ln/>
+        </p:spPr>
+        <p:txBody>
+          <a:bodyPr wrap="square" lIns="0" tIns="0" rIns="0" bIns="0" rtlCol="0" anchor="ctr"/>
+          <a:lstStyle/>
+          <a:p>
+            <a:pPr marL="0" indent="0" algn="ctr">
+              <a:buNone/>
+            </a:pPr>
+            <a:r>
+              <a:rPr lang="en-US" sz="1500" b="1" dirty="0">
+                <a:solidFill>
+                  <a:srgbClr val="047857"/>
+                </a:solidFill>
+                <a:latin typeface="Segoe UI" pitchFamily="34" charset="0"/>
+                <a:ea typeface="Segoe UI" pitchFamily="34" charset="-122"/>
+                <a:cs typeface="Segoe UI" pitchFamily="34" charset="-120"/>
+              </a:rPr>
+              <a:t>Yapılandırılmış JSON</a:t>
+            </a:r>
+            <a:endParaRPr lang="en-US" sz="1500" dirty="0"/>
+          </a:p>
+        </p:txBody>
+      </p:sp>
+      <p:sp>
+        <p:nvSpPr>
+          <p:cNvPr id="23" name="Text 20"/>
+          <p:cNvSpPr txBox="1"/>
+          <p:nvPr/>
+        </p:nvSpPr>
+        <p:spPr>
+          <a:xfrm>
+            <a:off x="9656064" y="2523744"/>
+            <a:ext cx="2286000" cy="566928"/>
+          </a:xfrm>
+          <a:prstGeom prst="rect">
+            <a:avLst/>
+          </a:prstGeom>
+          <a:noFill/>
+          <a:ln/>
+        </p:spPr>
+        <p:txBody>
+          <a:bodyPr wrap="square" lIns="0" tIns="0" rIns="0" bIns="0" rtlCol="0" anchor="t"/>
+          <a:lstStyle/>
+          <a:p>
+            <a:pPr marL="0" indent="0" algn="ctr">
+              <a:buNone/>
+            </a:pPr>
+            <a:r>
+              <a:rPr lang="en-US" sz="1050" dirty="0">
+                <a:solidFill>
+                  <a:srgbClr val="A3A3A3"/>
+                </a:solidFill>
+                <a:latin typeface="Segoe UI" pitchFamily="34" charset="0"/>
+                <a:ea typeface="Segoe UI" pitchFamily="34" charset="-122"/>
+                <a:cs typeface="Segoe UI" pitchFamily="34" charset="-120"/>
+              </a:rPr>
+              <a:t>kanıtıyla birlikte</a:t>
+            </a:r>
+            <a:endParaRPr lang="en-US" sz="1050" dirty="0"/>
+          </a:p>
+        </p:txBody>
+      </p:sp>
+      <p:sp>
+        <p:nvSpPr>
+          <p:cNvPr id="26" name="Text 23"/>
+          <p:cNvSpPr txBox="1"/>
+          <p:nvPr/>
+        </p:nvSpPr>
+        <p:spPr>
+          <a:xfrm>
+            <a:off x="969264" y="4187952"/>
+            <a:ext cx="5029200" cy="402336"/>
+          </a:xfrm>
+          <a:prstGeom prst="rect">
+            <a:avLst/>
+          </a:prstGeom>
+          <a:noFill/>
+          <a:ln/>
+        </p:spPr>
+        <p:txBody>
+          <a:bodyPr wrap="square" lIns="0" tIns="0" rIns="0" bIns="0" rtlCol="0" anchor="ctr"/>
+          <a:lstStyle/>
+          <a:p>
+            <a:pPr marL="0" indent="0" algn="l">
+              <a:buNone/>
+            </a:pPr>
+            <a:endParaRPr lang="en-US" sz="1250" dirty="0"/>
+          </a:p>
+        </p:txBody>
+      </p:sp>
+      <p:sp>
+        <p:nvSpPr>
+          <p:cNvPr id="27" name="mrf_norm"/>
+          <p:cNvSpPr/>
+          <p:nvPr/>
+        </p:nvSpPr>
+        <p:spPr>
+          <a:xfrm>
+            <a:off x="6620256" y="3657600"/>
+            <a:ext cx="4818888" cy="1097280"/>
+          </a:xfrm>
+          <a:prstGeom prst="roundRect">
+            <a:avLst>
+              <a:gd name="adj" fmla="val 6667"/>
+            </a:avLst>
+          </a:prstGeom>
+          <a:solidFill>
+            <a:srgbClr val="FAFAFA"/>
+          </a:solidFill>
+          <a:ln w="12700">
+            <a:solidFill>
+              <a:srgbClr val="E5E5E5"/>
+            </a:solidFill>
+            <a:prstDash val="solid"/>
+          </a:ln>
+        </p:spPr>
+      </p:sp>
+      <p:sp>
+        <p:nvSpPr>
+          <p:cNvPr id="28" name="Text 25"/>
+          <p:cNvSpPr txBox="1"/>
+          <p:nvPr/>
+        </p:nvSpPr>
+        <p:spPr>
+          <a:xfrm>
+            <a:off x="6784848" y="3767328"/>
+            <a:ext cx="4489704" cy="384048"/>
+          </a:xfrm>
+          <a:prstGeom prst="rect">
+            <a:avLst/>
+          </a:prstGeom>
+          <a:noFill/>
+          <a:ln/>
+        </p:spPr>
+        <p:txBody>
+          <a:bodyPr wrap="square" lIns="0" tIns="0" rIns="0" bIns="0" rtlCol="0" anchor="ctr"/>
+          <a:lstStyle/>
+          <a:p>
+            <a:pPr marL="0" indent="0" algn="ctr">
+              <a:buNone/>
+            </a:pPr>
+            <a:r>
+              <a:rPr lang="en-US" sz="1300" dirty="0">
+                <a:solidFill>
+                  <a:srgbClr val="A3A3A3"/>
+                </a:solidFill>
+                <a:latin typeface="Segoe UI" pitchFamily="34" charset="0"/>
+                <a:ea typeface="Segoe UI" pitchFamily="34" charset="-122"/>
+                <a:cs typeface="Segoe UI" pitchFamily="34" charset="-120"/>
+              </a:rPr>
+              <a:t>%2,05   ·   % 2.05   ·   yüzde 2,05</a:t>
+            </a:r>
+            <a:endParaRPr lang="en-US" sz="1300" dirty="0"/>
+          </a:p>
+        </p:txBody>
+      </p:sp>
+      <p:sp>
+        <p:nvSpPr>
+          <p:cNvPr id="29" name="Text 26"/>
+          <p:cNvSpPr txBox="1"/>
+          <p:nvPr/>
+        </p:nvSpPr>
+        <p:spPr>
+          <a:xfrm>
+            <a:off x="6784848" y="4151376"/>
+            <a:ext cx="4489704" cy="457200"/>
+          </a:xfrm>
+          <a:prstGeom prst="rect">
+            <a:avLst/>
+          </a:prstGeom>
+          <a:noFill/>
+          <a:ln/>
+        </p:spPr>
+        <p:txBody>
+          <a:bodyPr wrap="square" lIns="0" tIns="0" rIns="0" bIns="0" rtlCol="0" anchor="ctr"/>
+          <a:lstStyle/>
+          <a:p>
+            <a:pPr marL="0" indent="0" algn="ctr">
+              <a:buNone/>
+            </a:pPr>
+            <a:r>
+              <a:rPr lang="en-US" sz="2100" b="1" dirty="0">
+                <a:solidFill>
+                  <a:srgbClr val="171717"/>
+                </a:solidFill>
+                <a:latin typeface="Segoe UI" pitchFamily="34" charset="0"/>
+                <a:ea typeface="Segoe UI" pitchFamily="34" charset="-122"/>
+                <a:cs typeface="Segoe UI" pitchFamily="34" charset="-120"/>
+              </a:rPr>
+              <a:t>→   2.05</a:t>
+            </a:r>
+            <a:endParaRPr lang="en-US" sz="2100" dirty="0"/>
+          </a:p>
+        </p:txBody>
+      </p:sp>
+      <p:sp>
+        <p:nvSpPr>
+          <p:cNvPr id="30" name="Text 27"/>
+          <p:cNvSpPr txBox="1"/>
+          <p:nvPr/>
+        </p:nvSpPr>
+        <p:spPr>
+          <a:xfrm>
+            <a:off x="749808" y="6236208"/>
+            <a:ext cx="10689336" cy="274320"/>
+          </a:xfrm>
+          <a:prstGeom prst="rect">
+            <a:avLst/>
+          </a:prstGeom>
+          <a:noFill/>
+          <a:ln/>
+        </p:spPr>
+        <p:txBody>
+          <a:bodyPr wrap="square" lIns="0" tIns="0" rIns="0" bIns="0" rtlCol="0" anchor="ctr"/>
+          <a:lstStyle/>
+          <a:p>
+            <a:pPr marL="0" indent="0" algn="l">
+              <a:buNone/>
+            </a:pPr>
+            <a:r>
+              <a:rPr lang="en-US" sz="1000" dirty="0">
+                <a:solidFill>
+                  <a:srgbClr val="A3A3A3"/>
+                </a:solidFill>
+                <a:latin typeface="Segoe UI" pitchFamily="34" charset="0"/>
+                <a:ea typeface="Segoe UI" pitchFamily="34" charset="-122"/>
+                <a:cs typeface="Segoe UI" pitchFamily="34" charset="-120"/>
+              </a:rPr>
+              <a:t>Normalizasyon: para · oran · vade · tarih  |  Şartname 5.6 ve 5.8</a:t>
+            </a:r>
+            <a:endParaRPr lang="en-US" sz="1000" dirty="0"/>
+          </a:p>
+        </p:txBody>
+      </p:sp>
+      <p:pic>
+        <p:nvPicPr>
+          <p:cNvPr id="32" name="Resim 31"/>
+          <p:cNvPicPr>
+            <a:picLocks noChangeAspect="1"/>
+          </p:cNvPicPr>
+          <p:nvPr/>
+        </p:nvPicPr>
+        <p:blipFill rotWithShape="1">
+          <a:blip r:embed="rId5">
+            <a:extLst>
+              <a:ext uri="{28A0092B-C50C-407E-A947-70E740481C1C}">
+                <a14:useLocalDpi xmlns:a14="http://schemas.microsoft.com/office/drawing/2010/main" val="0"/>
+              </a:ext>
+            </a:extLst>
+          </a:blip>
+          <a:srcRect l="10798" t="9340" r="10966" b="11557"/>
+          <a:stretch/>
+        </p:blipFill>
+        <p:spPr>
+          <a:xfrm>
+            <a:off x="1136904" y="3547872"/>
+            <a:ext cx="4861560" cy="2499360"/>
+          </a:xfrm>
+          <a:prstGeom prst="rect">
+            <a:avLst/>
+          </a:prstGeom>
+        </p:spPr>
+      </p:pic>
+    </p:spTree>
+    <p:extLst>
+      <p:ext uri="{BB962C8B-B14F-4D97-AF65-F5344CB8AC3E}">
+        <p14:creationId xmlns:p14="http://schemas.microsoft.com/office/powerpoint/2010/main" val="3338660283"/>
+      </p:ext>
+    </p:extLst>
+  </p:cSld>
+  <p:clrMapOvr>
+    <a:masterClrMapping/>
+  </p:clrMapOvr>
+  <mc:AlternateContent xmlns:mc="http://schemas.openxmlformats.org/markup-compatibility/2006">
+    <mc:Choice xmlns:p159="http://schemas.microsoft.com/office/powerpoint/2015/09/main" xmlns="" Requires="p159">
+      <p:transition xmlns:p14="http://schemas.microsoft.com/office/powerpoint/2010/main" spd="slow" p14:dur="1300">
+        <p159:morph option="byObject"/>
+      </p:transition>
+    </mc:Choice>
+    <mc:Fallback>
+      <p:transition spd="med">
+        <p:fade/>
+      </p:transition>
+    </mc:Fallback>
+  </mc:AlternateContent>
+</p:sld>
+</file>
+
+<file path=ppt/slides/slide11.xml><?xml version="1.0" encoding="utf-8"?>
+<p:sld xmlns:a="http://schemas.openxmlformats.org/drawingml/2006/main" xmlns:r="http://schemas.openxmlformats.org/officeDocument/2006/relationships" xmlns:p="http://schemas.openxmlformats.org/presentationml/2006/main">
+  <p:cSld name="Slide 8">
+    <p:bg>
+      <p:bgPr>
+        <a:blipFill dpi="0" rotWithShape="1">
+          <a:blip r:embed="rId3">
+            <a:lum/>
+          </a:blip>
+          <a:srcRect/>
+          <a:stretch>
+            <a:fillRect/>
+          </a:stretch>
+        </a:blipFill>
+        <a:effectLst/>
+      </p:bgPr>
+    </p:bg>
+    <p:spTree>
+      <p:nvGrpSpPr>
+        <p:cNvPr id="1" name=""/>
+        <p:cNvGrpSpPr/>
+        <p:nvPr/>
+      </p:nvGrpSpPr>
+      <p:grpSpPr>
+        <a:xfrm>
+          <a:off x="0" y="0"/>
+          <a:ext cx="0" cy="0"/>
+          <a:chOff x="0" y="0"/>
+          <a:chExt cx="0" cy="0"/>
+        </a:xfrm>
+      </p:grpSpPr>
+      <p:sp>
+        <p:nvSpPr>
+          <p:cNvPr id="2" name="mrf_marka0"/>
+          <p:cNvSpPr/>
+          <p:nvPr/>
+        </p:nvSpPr>
+        <p:spPr>
+          <a:xfrm>
+            <a:off x="749808" y="457200"/>
+            <a:ext cx="118872" cy="118872"/>
+          </a:xfrm>
+          <a:prstGeom prst="rect">
+            <a:avLst/>
+          </a:prstGeom>
+          <a:solidFill>
+            <a:srgbClr val="2563EB"/>
+          </a:solidFill>
+          <a:ln w="12700">
+            <a:solidFill>
+              <a:srgbClr val="2563EB"/>
+            </a:solidFill>
+            <a:prstDash val="solid"/>
+          </a:ln>
+        </p:spPr>
+      </p:sp>
+      <p:sp>
+        <p:nvSpPr>
+          <p:cNvPr id="3" name="mrf_marka1"/>
+          <p:cNvSpPr/>
+          <p:nvPr/>
+        </p:nvSpPr>
+        <p:spPr>
+          <a:xfrm>
+            <a:off x="905256" y="457200"/>
+            <a:ext cx="118872" cy="118872"/>
+          </a:xfrm>
+          <a:prstGeom prst="rect">
+            <a:avLst/>
+          </a:prstGeom>
+          <a:solidFill>
+            <a:srgbClr val="06B6D4"/>
+          </a:solidFill>
+          <a:ln w="12700">
+            <a:solidFill>
+              <a:srgbClr val="06B6D4"/>
+            </a:solidFill>
+            <a:prstDash val="solid"/>
+          </a:ln>
+        </p:spPr>
+      </p:sp>
+      <p:sp>
+        <p:nvSpPr>
+          <p:cNvPr id="4" name="mrf_marka2"/>
+          <p:cNvSpPr/>
+          <p:nvPr/>
+        </p:nvSpPr>
+        <p:spPr>
+          <a:xfrm>
+            <a:off x="1060704" y="457200"/>
+            <a:ext cx="118872" cy="118872"/>
+          </a:xfrm>
+          <a:prstGeom prst="rect">
+            <a:avLst/>
+          </a:prstGeom>
+          <a:solidFill>
+            <a:srgbClr val="6366F1"/>
+          </a:solidFill>
+          <a:ln w="12700">
+            <a:solidFill>
+              <a:srgbClr val="6366F1"/>
+            </a:solidFill>
+            <a:prstDash val="solid"/>
+          </a:ln>
+        </p:spPr>
+      </p:sp>
+      <p:sp>
+        <p:nvSpPr>
+          <p:cNvPr id="5" name="mrf_bolumNo"/>
+          <p:cNvSpPr txBox="1"/>
+          <p:nvPr/>
+        </p:nvSpPr>
+        <p:spPr>
+          <a:xfrm>
+            <a:off x="8695944" y="384048"/>
+            <a:ext cx="2743200" cy="274320"/>
+          </a:xfrm>
+          <a:prstGeom prst="rect">
+            <a:avLst/>
+          </a:prstGeom>
+          <a:noFill/>
+          <a:ln/>
+        </p:spPr>
+        <p:txBody>
+          <a:bodyPr wrap="square" lIns="0" tIns="0" rIns="0" bIns="0" rtlCol="0" anchor="ctr"/>
+          <a:lstStyle/>
+          <a:p>
+            <a:pPr marL="0" indent="0" algn="r">
+              <a:buNone/>
+            </a:pPr>
+            <a:r>
+              <a:rPr lang="en-US" sz="1150" kern="0" spc="240" dirty="0">
+                <a:solidFill>
+                  <a:srgbClr val="2563EB"/>
+                </a:solidFill>
+                <a:latin typeface="Segoe UI Semibold" pitchFamily="34" charset="0"/>
+                <a:ea typeface="Segoe UI Semibold" pitchFamily="34" charset="-122"/>
+                <a:cs typeface="Segoe UI Semibold" pitchFamily="34" charset="-120"/>
+              </a:rPr>
+              <a:t>04 · KANIT</a:t>
+            </a:r>
+            <a:endParaRPr lang="en-US" sz="1150" dirty="0"/>
+          </a:p>
+        </p:txBody>
+      </p:sp>
+      <p:sp>
+        <p:nvSpPr>
+          <p:cNvPr id="6" name="mrf_soru"/>
+          <p:cNvSpPr txBox="1"/>
+          <p:nvPr/>
+        </p:nvSpPr>
+        <p:spPr>
+          <a:xfrm>
+            <a:off x="749808" y="2286000"/>
+            <a:ext cx="10689336" cy="2011680"/>
+          </a:xfrm>
+          <a:prstGeom prst="rect">
+            <a:avLst/>
+          </a:prstGeom>
+          <a:noFill/>
+          <a:ln/>
+        </p:spPr>
+        <p:txBody>
+          <a:bodyPr wrap="square" lIns="0" tIns="0" rIns="0" bIns="0" rtlCol="0" anchor="ctr"/>
+          <a:lstStyle/>
+          <a:p>
+            <a:pPr marL="0" indent="0" algn="l">
+              <a:buNone/>
+            </a:pPr>
+            <a:r>
+              <a:rPr lang="en-US" sz="6000" dirty="0">
+                <a:solidFill>
+                  <a:srgbClr val="0F172A"/>
+                </a:solidFill>
+                <a:latin typeface="Segoe UI Black" pitchFamily="34" charset="0"/>
+                <a:ea typeface="Segoe UI Black" pitchFamily="34" charset="-122"/>
+                <a:cs typeface="Segoe UI Black" pitchFamily="34" charset="-120"/>
+              </a:rPr>
+              <a:t>Neden bu sayıya güvenelim?</a:t>
+            </a:r>
+            <a:endParaRPr lang="en-US" sz="6000" dirty="0"/>
+          </a:p>
+        </p:txBody>
+      </p:sp>
+      <p:pic>
+        <p:nvPicPr>
+          <p:cNvPr id="7" name="mrf_logo" descr="logo.png"/>
+          <p:cNvPicPr>
+            <a:picLocks noChangeAspect="1"/>
+          </p:cNvPicPr>
+          <p:nvPr/>
+        </p:nvPicPr>
+        <p:blipFill>
+          <a:blip r:embed="rId4">
+            <a:alphaModFix amt="88000"/>
+          </a:blip>
+          <a:stretch>
+            <a:fillRect/>
+          </a:stretch>
+        </p:blipFill>
+        <p:spPr>
+          <a:xfrm>
+            <a:off x="9957816" y="6144768"/>
+            <a:ext cx="1481328" cy="457200"/>
+          </a:xfrm>
+          <a:prstGeom prst="rect">
+            <a:avLst/>
+          </a:prstGeom>
+        </p:spPr>
+      </p:pic>
+    </p:spTree>
+  </p:cSld>
+  <p:clrMapOvr>
+    <a:masterClrMapping/>
+  </p:clrMapOvr>
+  <mc:AlternateContent xmlns:mc="http://schemas.openxmlformats.org/markup-compatibility/2006">
+    <mc:Choice xmlns:p159="http://schemas.microsoft.com/office/powerpoint/2015/09/main" xmlns="" Requires="p159">
+      <p:transition xmlns:p14="http://schemas.microsoft.com/office/powerpoint/2010/main" spd="slow" p14:dur="1100">
+        <p159:morph option="byObject"/>
+      </p:transition>
+    </mc:Choice>
+    <mc:Fallback>
+      <p:transition spd="med">
+        <p:fade/>
+      </p:transition>
+    </mc:Fallback>
+  </mc:AlternateContent>
+</p:sld>
+</file>
+
+<file path=ppt/slides/slide12.xml><?xml version="1.0" encoding="utf-8"?>
+<p:sld xmlns:a="http://schemas.openxmlformats.org/drawingml/2006/main" xmlns:r="http://schemas.openxmlformats.org/officeDocument/2006/relationships" xmlns:p="http://schemas.openxmlformats.org/presentationml/2006/main">
+  <p:cSld name="Slide 9">
+    <p:bg>
+      <p:bgPr>
+        <a:blipFill dpi="0" rotWithShape="1">
+          <a:blip r:embed="rId3">
+            <a:lum/>
+          </a:blip>
+          <a:srcRect/>
+          <a:stretch>
+            <a:fillRect/>
+          </a:stretch>
+        </a:blipFill>
+        <a:effectLst/>
+      </p:bgPr>
+    </p:bg>
+    <p:spTree>
+      <p:nvGrpSpPr>
+        <p:cNvPr id="1" name=""/>
+        <p:cNvGrpSpPr/>
+        <p:nvPr/>
+      </p:nvGrpSpPr>
+      <p:grpSpPr>
+        <a:xfrm>
+          <a:off x="0" y="0"/>
+          <a:ext cx="0" cy="0"/>
+          <a:chOff x="0" y="0"/>
+          <a:chExt cx="0" cy="0"/>
+        </a:xfrm>
+      </p:grpSpPr>
+      <p:sp>
+        <p:nvSpPr>
+          <p:cNvPr id="2" name="mrf_bolumNo"/>
+          <p:cNvSpPr txBox="1"/>
+          <p:nvPr/>
+        </p:nvSpPr>
+        <p:spPr>
+          <a:xfrm>
+            <a:off x="8695944" y="384048"/>
+            <a:ext cx="2743200" cy="274320"/>
+          </a:xfrm>
+          <a:prstGeom prst="rect">
+            <a:avLst/>
+          </a:prstGeom>
+          <a:noFill/>
+          <a:ln/>
+        </p:spPr>
+        <p:txBody>
+          <a:bodyPr wrap="square" lIns="0" tIns="0" rIns="0" bIns="0" rtlCol="0" anchor="ctr"/>
+          <a:lstStyle/>
+          <a:p>
+            <a:pPr marL="0" indent="0" algn="r">
+              <a:buNone/>
+            </a:pPr>
+            <a:r>
+              <a:rPr lang="en-US" sz="1050" kern="0" spc="240" dirty="0">
+                <a:solidFill>
+                  <a:srgbClr val="A3A3A3"/>
+                </a:solidFill>
+                <a:latin typeface="Segoe UI Semibold" pitchFamily="34" charset="0"/>
+                <a:ea typeface="Segoe UI Semibold" pitchFamily="34" charset="-122"/>
+                <a:cs typeface="Segoe UI Semibold" pitchFamily="34" charset="-120"/>
+              </a:rPr>
+              <a:t>04 · KANIT</a:t>
+            </a:r>
+            <a:endParaRPr lang="en-US" sz="1050" dirty="0"/>
+          </a:p>
+        </p:txBody>
+      </p:sp>
+      <p:pic>
+        <p:nvPicPr>
+          <p:cNvPr id="3" name="mrf_logo" descr="logo.png"/>
+          <p:cNvPicPr>
+            <a:picLocks noChangeAspect="1"/>
+          </p:cNvPicPr>
+          <p:nvPr/>
+        </p:nvPicPr>
+        <p:blipFill>
+          <a:blip r:embed="rId4">
+            <a:alphaModFix amt="88000"/>
+          </a:blip>
+          <a:stretch>
+            <a:fillRect/>
+          </a:stretch>
+        </p:blipFill>
+        <p:spPr>
+          <a:xfrm>
+            <a:off x="9957816" y="6144768"/>
+            <a:ext cx="1481328" cy="457200"/>
+          </a:xfrm>
+          <a:prstGeom prst="rect">
+            <a:avLst/>
+          </a:prstGeom>
+        </p:spPr>
+      </p:pic>
+      <p:sp>
+        <p:nvSpPr>
+          <p:cNvPr id="4" name="mrf_marka0"/>
+          <p:cNvSpPr/>
+          <p:nvPr/>
+        </p:nvSpPr>
+        <p:spPr>
+          <a:xfrm>
+            <a:off x="749808" y="457200"/>
+            <a:ext cx="118872" cy="118872"/>
+          </a:xfrm>
+          <a:prstGeom prst="rect">
+            <a:avLst/>
+          </a:prstGeom>
+          <a:solidFill>
+            <a:srgbClr val="2563EB"/>
+          </a:solidFill>
+          <a:ln w="12700">
+            <a:solidFill>
+              <a:srgbClr val="2563EB"/>
+            </a:solidFill>
+            <a:prstDash val="solid"/>
+          </a:ln>
+        </p:spPr>
+      </p:sp>
+      <p:sp>
+        <p:nvSpPr>
+          <p:cNvPr id="5" name="mrf_marka1"/>
+          <p:cNvSpPr/>
+          <p:nvPr/>
+        </p:nvSpPr>
+        <p:spPr>
+          <a:xfrm>
+            <a:off x="905256" y="457200"/>
+            <a:ext cx="118872" cy="118872"/>
+          </a:xfrm>
+          <a:prstGeom prst="rect">
+            <a:avLst/>
+          </a:prstGeom>
+          <a:solidFill>
+            <a:srgbClr val="06B6D4"/>
+          </a:solidFill>
+          <a:ln w="12700">
+            <a:solidFill>
+              <a:srgbClr val="06B6D4"/>
+            </a:solidFill>
+            <a:prstDash val="solid"/>
+          </a:ln>
+        </p:spPr>
+      </p:sp>
+      <p:sp>
+        <p:nvSpPr>
+          <p:cNvPr id="6" name="mrf_marka2"/>
+          <p:cNvSpPr/>
+          <p:nvPr/>
+        </p:nvSpPr>
+        <p:spPr>
+          <a:xfrm>
+            <a:off x="1060704" y="457200"/>
+            <a:ext cx="118872" cy="118872"/>
+          </a:xfrm>
+          <a:prstGeom prst="rect">
+            <a:avLst/>
+          </a:prstGeom>
+          <a:solidFill>
+            <a:srgbClr val="6366F1"/>
+          </a:solidFill>
+          <a:ln w="12700">
+            <a:solidFill>
+              <a:srgbClr val="6366F1"/>
+            </a:solidFill>
+            <a:prstDash val="solid"/>
+          </a:ln>
+        </p:spPr>
+      </p:sp>
+      <p:sp>
+        <p:nvSpPr>
+          <p:cNvPr id="7" name="mrf_soruKucuk"/>
+          <p:cNvSpPr txBox="1"/>
+          <p:nvPr/>
+        </p:nvSpPr>
+        <p:spPr>
+          <a:xfrm>
+            <a:off x="1408176" y="384048"/>
+            <a:ext cx="10030968" cy="274320"/>
+          </a:xfrm>
+          <a:prstGeom prst="rect">
+            <a:avLst/>
+          </a:prstGeom>
+          <a:noFill/>
+          <a:ln/>
+        </p:spPr>
+        <p:txBody>
+          <a:bodyPr wrap="square" lIns="0" tIns="0" rIns="0" bIns="0" rtlCol="0" anchor="ctr"/>
+          <a:lstStyle/>
+          <a:p>
+            <a:pPr marL="0" indent="0" algn="l">
+              <a:buNone/>
+            </a:pPr>
+            <a:r>
+              <a:rPr lang="en-US" sz="1350" dirty="0">
+                <a:solidFill>
+                  <a:srgbClr val="2563EB"/>
+                </a:solidFill>
+                <a:latin typeface="Segoe UI Semibold" pitchFamily="34" charset="0"/>
+                <a:ea typeface="Segoe UI Semibold" pitchFamily="34" charset="-122"/>
+                <a:cs typeface="Segoe UI Semibold" pitchFamily="34" charset="-120"/>
+              </a:rPr>
+              <a:t>Neden bu sayıya güvenelim?</a:t>
+            </a:r>
+            <a:endParaRPr lang="en-US" sz="1350" dirty="0"/>
+          </a:p>
+        </p:txBody>
+      </p:sp>
+      <p:sp>
+        <p:nvSpPr>
+          <p:cNvPr id="8" name="mrf_baslik"/>
+          <p:cNvSpPr txBox="1"/>
+          <p:nvPr/>
+        </p:nvSpPr>
+        <p:spPr>
+          <a:xfrm>
+            <a:off x="749808" y="932688"/>
+            <a:ext cx="10689336" cy="658368"/>
+          </a:xfrm>
+          <a:prstGeom prst="rect">
+            <a:avLst/>
+          </a:prstGeom>
+          <a:noFill/>
+          <a:ln/>
+        </p:spPr>
+        <p:txBody>
+          <a:bodyPr wrap="square" lIns="0" tIns="0" rIns="0" bIns="0" rtlCol="0" anchor="ctr"/>
+          <a:lstStyle/>
+          <a:p>
+            <a:pPr marL="0" indent="0" algn="l">
+              <a:buNone/>
+            </a:pPr>
+            <a:r>
+              <a:rPr lang="en-US" sz="3700" dirty="0">
+                <a:solidFill>
+                  <a:srgbClr val="171717"/>
+                </a:solidFill>
+                <a:latin typeface="Segoe UI Semibold" pitchFamily="34" charset="0"/>
+                <a:ea typeface="Segoe UI Semibold" pitchFamily="34" charset="-122"/>
+                <a:cs typeface="Segoe UI Semibold" pitchFamily="34" charset="-120"/>
+              </a:rPr>
+              <a:t>Her değerin kaynağı görünür</a:t>
+            </a:r>
+            <a:endParaRPr lang="en-US" sz="3700" dirty="0"/>
+          </a:p>
+        </p:txBody>
+      </p:sp>
+      <p:sp>
+        <p:nvSpPr>
+          <p:cNvPr id="9" name="Text 6"/>
+          <p:cNvSpPr txBox="1"/>
+          <p:nvPr/>
+        </p:nvSpPr>
+        <p:spPr>
+          <a:xfrm>
+            <a:off x="749808" y="1645920"/>
+            <a:ext cx="10689336" cy="420624"/>
+          </a:xfrm>
+          <a:prstGeom prst="rect">
+            <a:avLst/>
+          </a:prstGeom>
+          <a:noFill/>
+          <a:ln/>
+        </p:spPr>
+        <p:txBody>
+          <a:bodyPr wrap="square" lIns="0" tIns="0" rIns="0" bIns="0" rtlCol="0" anchor="ctr"/>
+          <a:lstStyle/>
+          <a:p>
+            <a:pPr marL="0" indent="0" algn="l">
+              <a:buNone/>
+            </a:pPr>
+            <a:r>
+              <a:rPr lang="en-US" sz="1450" dirty="0">
+                <a:solidFill>
+                  <a:srgbClr val="525252"/>
+                </a:solidFill>
+                <a:latin typeface="Segoe UI" pitchFamily="34" charset="0"/>
+                <a:ea typeface="Segoe UI" pitchFamily="34" charset="-122"/>
+                <a:cs typeface="Segoe UI" pitchFamily="34" charset="-120"/>
+              </a:rPr>
+              <a:t>Çoğu NLP çözümü sonucu verir ve “güven bana” der. Biz metnin hangi ifadesinden, hangi yöntemle, ne güvenle çıkardığımızı da gösteriyoruz.</a:t>
+            </a:r>
+            <a:endParaRPr lang="en-US" sz="1450" dirty="0"/>
+          </a:p>
+        </p:txBody>
+      </p:sp>
+      <p:sp>
+        <p:nvSpPr>
+          <p:cNvPr id="10" name="Text 7"/>
+          <p:cNvSpPr txBox="1"/>
+          <p:nvPr/>
+        </p:nvSpPr>
+        <p:spPr>
+          <a:xfrm>
+            <a:off x="749808" y="2286000"/>
+            <a:ext cx="2286000" cy="310896"/>
+          </a:xfrm>
+          <a:prstGeom prst="rect">
+            <a:avLst/>
+          </a:prstGeom>
+          <a:noFill/>
+          <a:ln/>
+        </p:spPr>
+        <p:txBody>
+          <a:bodyPr wrap="square" lIns="0" tIns="0" rIns="0" bIns="0" rtlCol="0" anchor="ctr"/>
+          <a:lstStyle/>
+          <a:p>
+            <a:pPr marL="0" indent="0" algn="l">
+              <a:buNone/>
+            </a:pPr>
+            <a:r>
+              <a:rPr lang="en-US" sz="950" b="1" kern="0" spc="120" dirty="0">
+                <a:solidFill>
+                  <a:srgbClr val="A3A3A3"/>
+                </a:solidFill>
+                <a:latin typeface="Segoe UI" pitchFamily="34" charset="0"/>
+                <a:ea typeface="Segoe UI" pitchFamily="34" charset="-122"/>
+                <a:cs typeface="Segoe UI" pitchFamily="34" charset="-120"/>
+              </a:rPr>
+              <a:t>ALAN</a:t>
+            </a:r>
+            <a:endParaRPr lang="en-US" sz="950" dirty="0"/>
+          </a:p>
+        </p:txBody>
+      </p:sp>
+      <p:sp>
+        <p:nvSpPr>
+          <p:cNvPr id="11" name="Text 8"/>
+          <p:cNvSpPr txBox="1"/>
+          <p:nvPr/>
+        </p:nvSpPr>
+        <p:spPr>
+          <a:xfrm>
+            <a:off x="3035808" y="2286000"/>
+            <a:ext cx="4572000" cy="310896"/>
+          </a:xfrm>
+          <a:prstGeom prst="rect">
+            <a:avLst/>
+          </a:prstGeom>
+          <a:noFill/>
+          <a:ln/>
+        </p:spPr>
+        <p:txBody>
+          <a:bodyPr wrap="square" lIns="0" tIns="0" rIns="0" bIns="0" rtlCol="0" anchor="ctr"/>
+          <a:lstStyle/>
+          <a:p>
+            <a:pPr marL="0" indent="0" algn="l">
+              <a:buNone/>
+            </a:pPr>
+            <a:r>
+              <a:rPr lang="en-US" sz="950" b="1" kern="0" spc="120" dirty="0">
+                <a:solidFill>
+                  <a:srgbClr val="A3A3A3"/>
+                </a:solidFill>
+                <a:latin typeface="Segoe UI" pitchFamily="34" charset="0"/>
+                <a:ea typeface="Segoe UI" pitchFamily="34" charset="-122"/>
+                <a:cs typeface="Segoe UI" pitchFamily="34" charset="-120"/>
+              </a:rPr>
+              <a:t>METINDEKI IFADE</a:t>
+            </a:r>
+            <a:endParaRPr lang="en-US" sz="950" dirty="0"/>
+          </a:p>
+        </p:txBody>
+      </p:sp>
+      <p:sp>
+        <p:nvSpPr>
+          <p:cNvPr id="12" name="Text 9"/>
+          <p:cNvSpPr txBox="1"/>
+          <p:nvPr/>
+        </p:nvSpPr>
+        <p:spPr>
+          <a:xfrm>
+            <a:off x="7607808" y="2286000"/>
+            <a:ext cx="1600200" cy="310896"/>
+          </a:xfrm>
+          <a:prstGeom prst="rect">
+            <a:avLst/>
+          </a:prstGeom>
+          <a:noFill/>
+          <a:ln/>
+        </p:spPr>
+        <p:txBody>
+          <a:bodyPr wrap="square" lIns="0" tIns="0" rIns="0" bIns="0" rtlCol="0" anchor="ctr"/>
+          <a:lstStyle/>
+          <a:p>
+            <a:pPr marL="0" indent="0" algn="ctr">
+              <a:buNone/>
+            </a:pPr>
+            <a:r>
+              <a:rPr lang="en-US" sz="950" b="1" kern="0" spc="120" dirty="0">
+                <a:solidFill>
+                  <a:srgbClr val="A3A3A3"/>
+                </a:solidFill>
+                <a:latin typeface="Segoe UI" pitchFamily="34" charset="0"/>
+                <a:ea typeface="Segoe UI" pitchFamily="34" charset="-122"/>
+                <a:cs typeface="Segoe UI" pitchFamily="34" charset="-120"/>
+              </a:rPr>
+              <a:t>DEĞER</a:t>
+            </a:r>
+            <a:endParaRPr lang="en-US" sz="950" dirty="0"/>
+          </a:p>
+        </p:txBody>
+      </p:sp>
+      <p:sp>
+        <p:nvSpPr>
+          <p:cNvPr id="13" name="Text 10"/>
+          <p:cNvSpPr txBox="1"/>
+          <p:nvPr/>
+        </p:nvSpPr>
+        <p:spPr>
+          <a:xfrm>
+            <a:off x="9208008" y="2286000"/>
+            <a:ext cx="1234440" cy="310896"/>
+          </a:xfrm>
+          <a:prstGeom prst="rect">
+            <a:avLst/>
+          </a:prstGeom>
+          <a:noFill/>
+          <a:ln/>
+        </p:spPr>
+        <p:txBody>
+          <a:bodyPr wrap="square" lIns="0" tIns="0" rIns="0" bIns="0" rtlCol="0" anchor="ctr"/>
+          <a:lstStyle/>
+          <a:p>
+            <a:pPr marL="0" indent="0" algn="ctr">
+              <a:buNone/>
+            </a:pPr>
+            <a:r>
+              <a:rPr lang="en-US" sz="950" b="1" kern="0" spc="120" dirty="0">
+                <a:solidFill>
+                  <a:srgbClr val="A3A3A3"/>
+                </a:solidFill>
+                <a:latin typeface="Segoe UI" pitchFamily="34" charset="0"/>
+                <a:ea typeface="Segoe UI" pitchFamily="34" charset="-122"/>
+                <a:cs typeface="Segoe UI" pitchFamily="34" charset="-120"/>
+              </a:rPr>
+              <a:t>YÖNTEM</a:t>
+            </a:r>
+            <a:endParaRPr lang="en-US" sz="950" dirty="0"/>
+          </a:p>
+        </p:txBody>
+      </p:sp>
+      <p:sp>
+        <p:nvSpPr>
+          <p:cNvPr id="14" name="Text 11"/>
+          <p:cNvSpPr txBox="1"/>
+          <p:nvPr/>
+        </p:nvSpPr>
+        <p:spPr>
+          <a:xfrm>
+            <a:off x="10442448" y="2286000"/>
+            <a:ext cx="996696" cy="310896"/>
+          </a:xfrm>
+          <a:prstGeom prst="rect">
+            <a:avLst/>
+          </a:prstGeom>
+          <a:noFill/>
+          <a:ln/>
+        </p:spPr>
+        <p:txBody>
+          <a:bodyPr wrap="square" lIns="0" tIns="0" rIns="0" bIns="0" rtlCol="0" anchor="ctr"/>
+          <a:lstStyle/>
+          <a:p>
+            <a:pPr marL="0" indent="0" algn="ctr">
+              <a:buNone/>
+            </a:pPr>
+            <a:r>
+              <a:rPr lang="en-US" sz="950" b="1" kern="0" spc="120" dirty="0">
+                <a:solidFill>
+                  <a:srgbClr val="A3A3A3"/>
+                </a:solidFill>
+                <a:latin typeface="Segoe UI" pitchFamily="34" charset="0"/>
+                <a:ea typeface="Segoe UI" pitchFamily="34" charset="-122"/>
+                <a:cs typeface="Segoe UI" pitchFamily="34" charset="-120"/>
+              </a:rPr>
+              <a:t>GÜVEN</a:t>
+            </a:r>
+            <a:endParaRPr lang="en-US" sz="950" dirty="0"/>
+          </a:p>
+        </p:txBody>
+      </p:sp>
+      <p:sp>
+        <p:nvSpPr>
+          <p:cNvPr id="15" name="mrf_kanitSatir0"/>
+          <p:cNvSpPr/>
+          <p:nvPr/>
+        </p:nvSpPr>
+        <p:spPr>
+          <a:xfrm>
+            <a:off x="749808" y="2651760"/>
+            <a:ext cx="10689336" cy="694944"/>
+          </a:xfrm>
+          <a:prstGeom prst="roundRect">
+            <a:avLst>
+              <a:gd name="adj" fmla="val 10526"/>
+            </a:avLst>
+          </a:prstGeom>
+          <a:solidFill>
+            <a:srgbClr val="EFF6FF"/>
+          </a:solidFill>
+          <a:ln w="12700">
+            <a:solidFill>
+              <a:srgbClr val="2563EB"/>
+            </a:solidFill>
+            <a:prstDash val="solid"/>
+          </a:ln>
+        </p:spPr>
+      </p:sp>
+      <p:sp>
+        <p:nvSpPr>
+          <p:cNvPr id="16" name="mrf_kanitHucre0"/>
+          <p:cNvSpPr txBox="1"/>
+          <p:nvPr/>
+        </p:nvSpPr>
+        <p:spPr>
+          <a:xfrm>
+            <a:off x="896112" y="2651760"/>
+            <a:ext cx="2139696" cy="694944"/>
+          </a:xfrm>
+          <a:prstGeom prst="rect">
+            <a:avLst/>
+          </a:prstGeom>
+          <a:noFill/>
+          <a:ln/>
+        </p:spPr>
+        <p:txBody>
+          <a:bodyPr wrap="square" lIns="0" tIns="0" rIns="0" bIns="0" rtlCol="0" anchor="ctr"/>
+          <a:lstStyle/>
+          <a:p>
+            <a:pPr marL="0" indent="0" algn="l">
+              <a:buNone/>
+            </a:pPr>
+            <a:r>
+              <a:rPr lang="en-US" sz="1150" dirty="0">
+                <a:solidFill>
+                  <a:srgbClr val="525252"/>
+                </a:solidFill>
+                <a:latin typeface="Consolas" pitchFamily="34" charset="0"/>
+                <a:ea typeface="Consolas" pitchFamily="34" charset="-122"/>
+                <a:cs typeface="Consolas" pitchFamily="34" charset="-120"/>
+              </a:rPr>
+              <a:t>kar_payi_orani</a:t>
+            </a:r>
+            <a:endParaRPr lang="en-US" sz="1150" dirty="0"/>
+          </a:p>
+        </p:txBody>
+      </p:sp>
+      <p:sp>
+        <p:nvSpPr>
+          <p:cNvPr id="17" name="mrf_kanitHucre1"/>
+          <p:cNvSpPr txBox="1"/>
+          <p:nvPr/>
+        </p:nvSpPr>
+        <p:spPr>
+          <a:xfrm>
+            <a:off x="3182112" y="2651760"/>
+            <a:ext cx="4572000" cy="694944"/>
+          </a:xfrm>
+          <a:prstGeom prst="rect">
+            <a:avLst/>
+          </a:prstGeom>
+          <a:noFill/>
+          <a:ln/>
+        </p:spPr>
+        <p:txBody>
+          <a:bodyPr wrap="square" lIns="0" tIns="0" rIns="0" bIns="0" rtlCol="0" anchor="ctr"/>
+          <a:lstStyle/>
+          <a:p>
+            <a:pPr marL="0" indent="0" algn="l">
+              <a:buNone/>
+            </a:pPr>
+            <a:r>
+              <a:rPr lang="en-US" sz="1250" i="1" dirty="0">
+                <a:solidFill>
+                  <a:srgbClr val="171717"/>
+                </a:solidFill>
+                <a:latin typeface="Calibri" pitchFamily="34" charset="0"/>
+                <a:ea typeface="Calibri" pitchFamily="34" charset="-122"/>
+                <a:cs typeface="Calibri" pitchFamily="34" charset="-120"/>
+              </a:rPr>
+              <a:t>“%2,87 'den başlayan kâr oranları”</a:t>
+            </a:r>
+            <a:endParaRPr lang="en-US" sz="1250" dirty="0"/>
+          </a:p>
+        </p:txBody>
+      </p:sp>
+      <p:sp>
+        <p:nvSpPr>
+          <p:cNvPr id="18" name="mrf_kanitHucre2"/>
+          <p:cNvSpPr txBox="1"/>
+          <p:nvPr/>
+        </p:nvSpPr>
+        <p:spPr>
+          <a:xfrm>
+            <a:off x="7754112" y="2651760"/>
+            <a:ext cx="1600200" cy="694944"/>
+          </a:xfrm>
+          <a:prstGeom prst="rect">
+            <a:avLst/>
+          </a:prstGeom>
+          <a:noFill/>
+          <a:ln/>
+        </p:spPr>
+        <p:txBody>
+          <a:bodyPr wrap="square" lIns="0" tIns="0" rIns="0" bIns="0" rtlCol="0" anchor="ctr"/>
+          <a:lstStyle/>
+          <a:p>
+            <a:pPr marL="0" indent="0" algn="ctr">
+              <a:buNone/>
+            </a:pPr>
+            <a:r>
+              <a:rPr lang="en-US" sz="1150" b="1" dirty="0">
+                <a:solidFill>
+                  <a:srgbClr val="2563EB"/>
+                </a:solidFill>
+                <a:latin typeface="Calibri" pitchFamily="34" charset="0"/>
+                <a:ea typeface="Calibri" pitchFamily="34" charset="-122"/>
+                <a:cs typeface="Calibri" pitchFamily="34" charset="-120"/>
+              </a:rPr>
+              <a:t>2.87</a:t>
+            </a:r>
+            <a:endParaRPr lang="en-US" sz="1150" dirty="0"/>
+          </a:p>
+        </p:txBody>
+      </p:sp>
+      <p:sp>
+        <p:nvSpPr>
+          <p:cNvPr id="19" name="mrf_kanitHucre3"/>
+          <p:cNvSpPr txBox="1"/>
+          <p:nvPr/>
+        </p:nvSpPr>
+        <p:spPr>
+          <a:xfrm>
+            <a:off x="9354312" y="2651760"/>
+            <a:ext cx="1234440" cy="694944"/>
+          </a:xfrm>
+          <a:prstGeom prst="rect">
+            <a:avLst/>
+          </a:prstGeom>
+          <a:noFill/>
+          <a:ln/>
+        </p:spPr>
+        <p:txBody>
+          <a:bodyPr wrap="square" lIns="0" tIns="0" rIns="0" bIns="0" rtlCol="0" anchor="ctr"/>
+          <a:lstStyle/>
+          <a:p>
+            <a:pPr marL="0" indent="0" algn="ctr">
+              <a:buNone/>
+            </a:pPr>
+            <a:r>
+              <a:rPr lang="en-US" sz="1150" dirty="0">
+                <a:solidFill>
+                  <a:srgbClr val="A3A3A3"/>
+                </a:solidFill>
+                <a:latin typeface="Consolas" pitchFamily="34" charset="0"/>
+                <a:ea typeface="Consolas" pitchFamily="34" charset="-122"/>
+                <a:cs typeface="Consolas" pitchFamily="34" charset="-120"/>
+              </a:rPr>
+              <a:t>REGEX</a:t>
+            </a:r>
+            <a:endParaRPr lang="en-US" sz="1150" dirty="0"/>
+          </a:p>
+        </p:txBody>
+      </p:sp>
+      <p:sp>
+        <p:nvSpPr>
+          <p:cNvPr id="20" name="mrf_kanitHucre4"/>
+          <p:cNvSpPr txBox="1"/>
+          <p:nvPr/>
+        </p:nvSpPr>
+        <p:spPr>
+          <a:xfrm>
+            <a:off x="10588752" y="2651760"/>
+            <a:ext cx="996696" cy="694944"/>
+          </a:xfrm>
+          <a:prstGeom prst="rect">
+            <a:avLst/>
+          </a:prstGeom>
+          <a:noFill/>
+          <a:ln/>
+        </p:spPr>
+        <p:txBody>
+          <a:bodyPr wrap="square" lIns="0" tIns="0" rIns="0" bIns="0" rtlCol="0" anchor="ctr"/>
+          <a:lstStyle/>
+          <a:p>
+            <a:pPr marL="0" indent="0" algn="ctr">
+              <a:buNone/>
+            </a:pPr>
+            <a:r>
+              <a:rPr lang="en-US" sz="1150" dirty="0">
+                <a:solidFill>
+                  <a:srgbClr val="047857"/>
+                </a:solidFill>
+                <a:latin typeface="Calibri" pitchFamily="34" charset="0"/>
+                <a:ea typeface="Calibri" pitchFamily="34" charset="-122"/>
+                <a:cs typeface="Calibri" pitchFamily="34" charset="-120"/>
+              </a:rPr>
+              <a:t>0.94</a:t>
+            </a:r>
+            <a:endParaRPr lang="en-US" sz="1150" dirty="0"/>
+          </a:p>
+        </p:txBody>
+      </p:sp>
+      <p:sp>
+        <p:nvSpPr>
+          <p:cNvPr id="21" name="mrf_kanitSatir1"/>
+          <p:cNvSpPr/>
+          <p:nvPr/>
+        </p:nvSpPr>
+        <p:spPr>
+          <a:xfrm>
+            <a:off x="749808" y="3401568"/>
+            <a:ext cx="10689336" cy="694944"/>
+          </a:xfrm>
+          <a:prstGeom prst="roundRect">
+            <a:avLst>
+              <a:gd name="adj" fmla="val 10526"/>
+            </a:avLst>
+          </a:prstGeom>
+          <a:solidFill>
+            <a:srgbClr val="FFFFFF"/>
+          </a:solidFill>
+          <a:ln w="12700">
+            <a:solidFill>
+              <a:srgbClr val="E5E5E5"/>
+            </a:solidFill>
+            <a:prstDash val="solid"/>
+          </a:ln>
+        </p:spPr>
+      </p:sp>
+      <p:sp>
+        <p:nvSpPr>
+          <p:cNvPr id="22" name="Text 19"/>
+          <p:cNvSpPr txBox="1"/>
+          <p:nvPr/>
+        </p:nvSpPr>
+        <p:spPr>
+          <a:xfrm>
+            <a:off x="896112" y="3401568"/>
+            <a:ext cx="2139696" cy="694944"/>
+          </a:xfrm>
+          <a:prstGeom prst="rect">
+            <a:avLst/>
+          </a:prstGeom>
+          <a:noFill/>
+          <a:ln/>
+        </p:spPr>
+        <p:txBody>
+          <a:bodyPr wrap="square" lIns="0" tIns="0" rIns="0" bIns="0" rtlCol="0" anchor="ctr"/>
+          <a:lstStyle/>
+          <a:p>
+            <a:pPr marL="0" indent="0" algn="l">
+              <a:buNone/>
+            </a:pPr>
+            <a:r>
+              <a:rPr lang="en-US" sz="1150" dirty="0">
+                <a:solidFill>
+                  <a:srgbClr val="525252"/>
+                </a:solidFill>
+                <a:latin typeface="Consolas" pitchFamily="34" charset="0"/>
+                <a:ea typeface="Consolas" pitchFamily="34" charset="-122"/>
+                <a:cs typeface="Consolas" pitchFamily="34" charset="-120"/>
+              </a:rPr>
+              <a:t>bitis_tarihi</a:t>
+            </a:r>
+            <a:endParaRPr lang="en-US" sz="1150" dirty="0"/>
+          </a:p>
+        </p:txBody>
+      </p:sp>
+      <p:sp>
+        <p:nvSpPr>
+          <p:cNvPr id="23" name="Text 20"/>
+          <p:cNvSpPr txBox="1"/>
+          <p:nvPr/>
+        </p:nvSpPr>
+        <p:spPr>
+          <a:xfrm>
+            <a:off x="3182112" y="3401568"/>
+            <a:ext cx="4572000" cy="694944"/>
+          </a:xfrm>
+          <a:prstGeom prst="rect">
+            <a:avLst/>
+          </a:prstGeom>
+          <a:noFill/>
+          <a:ln/>
+        </p:spPr>
+        <p:txBody>
+          <a:bodyPr wrap="square" lIns="0" tIns="0" rIns="0" bIns="0" rtlCol="0" anchor="ctr"/>
+          <a:lstStyle/>
+          <a:p>
+            <a:pPr marL="0" indent="0" algn="l">
+              <a:buNone/>
+            </a:pPr>
+            <a:r>
+              <a:rPr lang="en-US" sz="1250" i="1" dirty="0">
+                <a:solidFill>
+                  <a:srgbClr val="171717"/>
+                </a:solidFill>
+                <a:latin typeface="Calibri" pitchFamily="34" charset="0"/>
+                <a:ea typeface="Calibri" pitchFamily="34" charset="-122"/>
+                <a:cs typeface="Calibri" pitchFamily="34" charset="-120"/>
+              </a:rPr>
+              <a:t>“31 Aralık 2026 tarihine kadar”</a:t>
+            </a:r>
+            <a:endParaRPr lang="en-US" sz="1250" dirty="0"/>
+          </a:p>
+        </p:txBody>
+      </p:sp>
+      <p:sp>
+        <p:nvSpPr>
+          <p:cNvPr id="24" name="Text 21"/>
+          <p:cNvSpPr txBox="1"/>
+          <p:nvPr/>
+        </p:nvSpPr>
+        <p:spPr>
+          <a:xfrm>
+            <a:off x="7754112" y="3401568"/>
+            <a:ext cx="1600200" cy="694944"/>
+          </a:xfrm>
+          <a:prstGeom prst="rect">
+            <a:avLst/>
+          </a:prstGeom>
+          <a:noFill/>
+          <a:ln/>
+        </p:spPr>
+        <p:txBody>
+          <a:bodyPr wrap="square" lIns="0" tIns="0" rIns="0" bIns="0" rtlCol="0" anchor="ctr"/>
+          <a:lstStyle/>
+          <a:p>
+            <a:pPr marL="0" indent="0" algn="ctr">
+              <a:buNone/>
+            </a:pPr>
+            <a:r>
+              <a:rPr lang="en-US" sz="1150" b="1" dirty="0">
+                <a:solidFill>
+                  <a:srgbClr val="2563EB"/>
+                </a:solidFill>
+                <a:latin typeface="Calibri" pitchFamily="34" charset="0"/>
+                <a:ea typeface="Calibri" pitchFamily="34" charset="-122"/>
+                <a:cs typeface="Calibri" pitchFamily="34" charset="-120"/>
+              </a:rPr>
+              <a:t>2026-12-31</a:t>
+            </a:r>
+            <a:endParaRPr lang="en-US" sz="1150" dirty="0"/>
+          </a:p>
+        </p:txBody>
+      </p:sp>
+      <p:sp>
+        <p:nvSpPr>
+          <p:cNvPr id="25" name="Text 22"/>
+          <p:cNvSpPr txBox="1"/>
+          <p:nvPr/>
+        </p:nvSpPr>
+        <p:spPr>
+          <a:xfrm>
+            <a:off x="9354312" y="3401568"/>
+            <a:ext cx="1234440" cy="694944"/>
+          </a:xfrm>
+          <a:prstGeom prst="rect">
+            <a:avLst/>
+          </a:prstGeom>
+          <a:noFill/>
+          <a:ln/>
+        </p:spPr>
+        <p:txBody>
+          <a:bodyPr wrap="square" lIns="0" tIns="0" rIns="0" bIns="0" rtlCol="0" anchor="ctr"/>
+          <a:lstStyle/>
+          <a:p>
+            <a:pPr marL="0" indent="0" algn="ctr">
+              <a:buNone/>
+            </a:pPr>
+            <a:r>
+              <a:rPr lang="en-US" sz="1150" dirty="0">
+                <a:solidFill>
+                  <a:srgbClr val="A3A3A3"/>
+                </a:solidFill>
+                <a:latin typeface="Consolas" pitchFamily="34" charset="0"/>
+                <a:ea typeface="Consolas" pitchFamily="34" charset="-122"/>
+                <a:cs typeface="Consolas" pitchFamily="34" charset="-120"/>
+              </a:rPr>
+              <a:t>REGEX</a:t>
+            </a:r>
+            <a:endParaRPr lang="en-US" sz="1150" dirty="0"/>
+          </a:p>
+        </p:txBody>
+      </p:sp>
+      <p:sp>
+        <p:nvSpPr>
+          <p:cNvPr id="26" name="Text 23"/>
+          <p:cNvSpPr txBox="1"/>
+          <p:nvPr/>
+        </p:nvSpPr>
+        <p:spPr>
+          <a:xfrm>
+            <a:off x="10588752" y="3401568"/>
+            <a:ext cx="996696" cy="694944"/>
+          </a:xfrm>
+          <a:prstGeom prst="rect">
+            <a:avLst/>
+          </a:prstGeom>
+          <a:noFill/>
+          <a:ln/>
+        </p:spPr>
+        <p:txBody>
+          <a:bodyPr wrap="square" lIns="0" tIns="0" rIns="0" bIns="0" rtlCol="0" anchor="ctr"/>
+          <a:lstStyle/>
+          <a:p>
+            <a:pPr marL="0" indent="0" algn="ctr">
+              <a:buNone/>
+            </a:pPr>
+            <a:r>
+              <a:rPr lang="en-US" sz="1150" dirty="0">
+                <a:solidFill>
+                  <a:srgbClr val="047857"/>
+                </a:solidFill>
+                <a:latin typeface="Calibri" pitchFamily="34" charset="0"/>
+                <a:ea typeface="Calibri" pitchFamily="34" charset="-122"/>
+                <a:cs typeface="Calibri" pitchFamily="34" charset="-120"/>
+              </a:rPr>
+              <a:t>0.98</a:t>
+            </a:r>
+            <a:endParaRPr lang="en-US" sz="1150" dirty="0"/>
+          </a:p>
+        </p:txBody>
+      </p:sp>
+      <p:sp>
+        <p:nvSpPr>
+          <p:cNvPr id="27" name="mrf_kanitSatir2"/>
+          <p:cNvSpPr/>
+          <p:nvPr/>
+        </p:nvSpPr>
+        <p:spPr>
+          <a:xfrm>
+            <a:off x="749808" y="4151376"/>
+            <a:ext cx="10689336" cy="694944"/>
+          </a:xfrm>
+          <a:prstGeom prst="roundRect">
+            <a:avLst>
+              <a:gd name="adj" fmla="val 10526"/>
+            </a:avLst>
+          </a:prstGeom>
+          <a:solidFill>
+            <a:srgbClr val="FFFFFF"/>
+          </a:solidFill>
+          <a:ln w="12700">
+            <a:solidFill>
+              <a:srgbClr val="E5E5E5"/>
+            </a:solidFill>
+            <a:prstDash val="solid"/>
+          </a:ln>
+        </p:spPr>
+      </p:sp>
+      <p:sp>
+        <p:nvSpPr>
+          <p:cNvPr id="28" name="Text 25"/>
+          <p:cNvSpPr txBox="1"/>
+          <p:nvPr/>
+        </p:nvSpPr>
+        <p:spPr>
+          <a:xfrm>
+            <a:off x="896112" y="4151376"/>
+            <a:ext cx="2139696" cy="694944"/>
+          </a:xfrm>
+          <a:prstGeom prst="rect">
+            <a:avLst/>
+          </a:prstGeom>
+          <a:noFill/>
+          <a:ln/>
+        </p:spPr>
+        <p:txBody>
+          <a:bodyPr wrap="square" lIns="0" tIns="0" rIns="0" bIns="0" rtlCol="0" anchor="ctr"/>
+          <a:lstStyle/>
+          <a:p>
+            <a:pPr marL="0" indent="0" algn="l">
+              <a:buNone/>
+            </a:pPr>
+            <a:r>
+              <a:rPr lang="en-US" sz="1150" dirty="0">
+                <a:solidFill>
+                  <a:srgbClr val="525252"/>
+                </a:solidFill>
+                <a:latin typeface="Consolas" pitchFamily="34" charset="0"/>
+                <a:ea typeface="Consolas" pitchFamily="34" charset="-122"/>
+                <a:cs typeface="Consolas" pitchFamily="34" charset="-120"/>
+              </a:rPr>
+              <a:t>kampanya_turu</a:t>
+            </a:r>
+            <a:endParaRPr lang="en-US" sz="1150" dirty="0"/>
+          </a:p>
+        </p:txBody>
+      </p:sp>
+      <p:sp>
+        <p:nvSpPr>
+          <p:cNvPr id="29" name="Text 26"/>
+          <p:cNvSpPr txBox="1"/>
+          <p:nvPr/>
+        </p:nvSpPr>
+        <p:spPr>
+          <a:xfrm>
+            <a:off x="3182112" y="4151376"/>
+            <a:ext cx="4572000" cy="694944"/>
+          </a:xfrm>
+          <a:prstGeom prst="rect">
+            <a:avLst/>
+          </a:prstGeom>
+          <a:noFill/>
+          <a:ln/>
+        </p:spPr>
+        <p:txBody>
+          <a:bodyPr wrap="square" lIns="0" tIns="0" rIns="0" bIns="0" rtlCol="0" anchor="ctr"/>
+          <a:lstStyle/>
+          <a:p>
+            <a:pPr marL="0" indent="0" algn="l">
+              <a:buNone/>
+            </a:pPr>
+            <a:r>
+              <a:rPr lang="en-US" sz="1250" i="1" dirty="0">
+                <a:solidFill>
+                  <a:srgbClr val="171717"/>
+                </a:solidFill>
+                <a:latin typeface="Calibri" pitchFamily="34" charset="0"/>
+                <a:ea typeface="Calibri" pitchFamily="34" charset="-122"/>
+                <a:cs typeface="Calibri" pitchFamily="34" charset="-120"/>
+              </a:rPr>
+              <a:t>“konut finansmanı fırsatı”</a:t>
+            </a:r>
+            <a:endParaRPr lang="en-US" sz="1250" dirty="0"/>
+          </a:p>
+        </p:txBody>
+      </p:sp>
+      <p:sp>
+        <p:nvSpPr>
+          <p:cNvPr id="30" name="Text 27"/>
+          <p:cNvSpPr txBox="1"/>
+          <p:nvPr/>
+        </p:nvSpPr>
+        <p:spPr>
+          <a:xfrm>
+            <a:off x="7754112" y="4151376"/>
+            <a:ext cx="1600200" cy="694944"/>
+          </a:xfrm>
+          <a:prstGeom prst="rect">
+            <a:avLst/>
+          </a:prstGeom>
+          <a:noFill/>
+          <a:ln/>
+        </p:spPr>
+        <p:txBody>
+          <a:bodyPr wrap="square" lIns="0" tIns="0" rIns="0" bIns="0" rtlCol="0" anchor="ctr"/>
+          <a:lstStyle/>
+          <a:p>
+            <a:pPr marL="0" indent="0" algn="ctr">
+              <a:buNone/>
+            </a:pPr>
+            <a:r>
+              <a:rPr lang="en-US" sz="1150" b="1" dirty="0">
+                <a:solidFill>
+                  <a:srgbClr val="2563EB"/>
+                </a:solidFill>
+                <a:latin typeface="Calibri" pitchFamily="34" charset="0"/>
+                <a:ea typeface="Calibri" pitchFamily="34" charset="-122"/>
+                <a:cs typeface="Calibri" pitchFamily="34" charset="-120"/>
+              </a:rPr>
+              <a:t>konut_finansmani</a:t>
+            </a:r>
+            <a:endParaRPr lang="en-US" sz="1150" dirty="0"/>
+          </a:p>
+        </p:txBody>
+      </p:sp>
+      <p:sp>
+        <p:nvSpPr>
+          <p:cNvPr id="31" name="Text 28"/>
+          <p:cNvSpPr txBox="1"/>
+          <p:nvPr/>
+        </p:nvSpPr>
+        <p:spPr>
+          <a:xfrm>
+            <a:off x="9354312" y="4151376"/>
+            <a:ext cx="1234440" cy="694944"/>
+          </a:xfrm>
+          <a:prstGeom prst="rect">
+            <a:avLst/>
+          </a:prstGeom>
+          <a:noFill/>
+          <a:ln/>
+        </p:spPr>
+        <p:txBody>
+          <a:bodyPr wrap="square" lIns="0" tIns="0" rIns="0" bIns="0" rtlCol="0" anchor="ctr"/>
+          <a:lstStyle/>
+          <a:p>
+            <a:pPr marL="0" indent="0" algn="ctr">
+              <a:buNone/>
+            </a:pPr>
+            <a:r>
+              <a:rPr lang="tr-TR" sz="1150" dirty="0" smtClean="0">
+                <a:solidFill>
+                  <a:srgbClr val="A3A3A3"/>
+                </a:solidFill>
+                <a:latin typeface="Consolas" pitchFamily="34" charset="0"/>
+              </a:rPr>
+              <a:t>LLM</a:t>
+            </a:r>
+            <a:endParaRPr lang="en-US" sz="1150" dirty="0"/>
+          </a:p>
+        </p:txBody>
+      </p:sp>
+      <p:sp>
+        <p:nvSpPr>
+          <p:cNvPr id="32" name="Text 29"/>
+          <p:cNvSpPr txBox="1"/>
+          <p:nvPr/>
+        </p:nvSpPr>
+        <p:spPr>
+          <a:xfrm>
+            <a:off x="10561320" y="4132435"/>
+            <a:ext cx="996696" cy="694944"/>
+          </a:xfrm>
+          <a:prstGeom prst="rect">
+            <a:avLst/>
+          </a:prstGeom>
+          <a:noFill/>
+          <a:ln/>
+        </p:spPr>
+        <p:txBody>
+          <a:bodyPr wrap="square" lIns="0" tIns="0" rIns="0" bIns="0" rtlCol="0" anchor="ctr"/>
+          <a:lstStyle/>
+          <a:p>
+            <a:pPr marL="0" indent="0" algn="ctr">
+              <a:buNone/>
+            </a:pPr>
+            <a:r>
+              <a:rPr lang="en-US" sz="1150" dirty="0">
+                <a:solidFill>
+                  <a:srgbClr val="047857"/>
+                </a:solidFill>
+                <a:latin typeface="Calibri" pitchFamily="34" charset="0"/>
+                <a:ea typeface="Calibri" pitchFamily="34" charset="-122"/>
+                <a:cs typeface="Calibri" pitchFamily="34" charset="-120"/>
+              </a:rPr>
+              <a:t>0.91</a:t>
+            </a:r>
+            <a:endParaRPr lang="en-US" sz="1150" dirty="0"/>
+          </a:p>
+        </p:txBody>
+      </p:sp>
+      <p:sp>
+        <p:nvSpPr>
+          <p:cNvPr id="33" name="Text 30"/>
+          <p:cNvSpPr txBox="1"/>
+          <p:nvPr/>
+        </p:nvSpPr>
+        <p:spPr>
+          <a:xfrm>
+            <a:off x="749808" y="5650992"/>
+            <a:ext cx="10689336" cy="402336"/>
+          </a:xfrm>
+          <a:prstGeom prst="rect">
+            <a:avLst/>
+          </a:prstGeom>
+          <a:noFill/>
+          <a:ln/>
+        </p:spPr>
+        <p:txBody>
+          <a:bodyPr wrap="square" lIns="0" tIns="0" rIns="0" bIns="0" rtlCol="0" anchor="ctr"/>
+          <a:lstStyle/>
+          <a:p>
+            <a:pPr marL="0" indent="0" algn="l">
+              <a:buNone/>
+            </a:pPr>
+            <a:r>
+              <a:rPr lang="en-US" sz="1350" i="1" dirty="0">
+                <a:solidFill>
+                  <a:srgbClr val="171717"/>
+                </a:solidFill>
+                <a:latin typeface="Segoe UI" pitchFamily="34" charset="0"/>
+                <a:ea typeface="Segoe UI" pitchFamily="34" charset="-122"/>
+                <a:cs typeface="Segoe UI" pitchFamily="34" charset="-120"/>
+              </a:rPr>
+              <a:t>Yanlış bir oran müşteriye yansırsa denetim ekibi “bu sayı nereden geldi” diye sorar. Cevap bir tık uzakta.</a:t>
+            </a:r>
+            <a:endParaRPr lang="en-US" sz="1350" dirty="0"/>
+          </a:p>
+        </p:txBody>
+      </p:sp>
+      <p:sp>
+        <p:nvSpPr>
+          <p:cNvPr id="34" name="Text 31"/>
+          <p:cNvSpPr txBox="1"/>
+          <p:nvPr/>
+        </p:nvSpPr>
+        <p:spPr>
+          <a:xfrm>
+            <a:off x="749808" y="6236208"/>
+            <a:ext cx="10689336" cy="274320"/>
+          </a:xfrm>
+          <a:prstGeom prst="rect">
+            <a:avLst/>
+          </a:prstGeom>
+          <a:noFill/>
+          <a:ln/>
+        </p:spPr>
+        <p:txBody>
+          <a:bodyPr wrap="square" lIns="0" tIns="0" rIns="0" bIns="0" rtlCol="0" anchor="ctr"/>
+          <a:lstStyle/>
+          <a:p>
+            <a:pPr marL="0" indent="0" algn="l">
+              <a:buNone/>
+            </a:pPr>
+            <a:r>
+              <a:rPr lang="en-US" sz="1000" dirty="0">
+                <a:solidFill>
+                  <a:srgbClr val="A3A3A3"/>
+                </a:solidFill>
+                <a:latin typeface="Segoe UI" pitchFamily="34" charset="0"/>
+                <a:ea typeface="Segoe UI" pitchFamily="34" charset="-122"/>
+                <a:cs typeface="Segoe UI" pitchFamily="34" charset="-120"/>
+              </a:rPr>
+              <a:t>Arayüzde canlı: Tüm Kampanyalar → kampanya seç → Çıkarım Kanıtları paneli</a:t>
+            </a:r>
+            <a:endParaRPr lang="en-US" sz="1000" dirty="0"/>
+          </a:p>
+        </p:txBody>
+      </p:sp>
+    </p:spTree>
+  </p:cSld>
+  <p:clrMapOvr>
+    <a:masterClrMapping/>
+  </p:clrMapOvr>
+  <mc:AlternateContent xmlns:mc="http://schemas.openxmlformats.org/markup-compatibility/2006">
+    <mc:Choice xmlns:p159="http://schemas.microsoft.com/office/powerpoint/2015/09/main" xmlns="" Requires="p159">
+      <p:transition xmlns:p14="http://schemas.microsoft.com/office/powerpoint/2010/main" spd="slow" p14:dur="1400">
+        <p159:morph option="byObject"/>
+      </p:transition>
+    </mc:Choice>
+    <mc:Fallback>
+      <p:transition spd="med">
+        <p:fade/>
+      </p:transition>
+    </mc:Fallback>
+  </mc:AlternateContent>
+</p:sld>
+</file>
+
+<file path=ppt/slides/slide13.xml><?xml version="1.0" encoding="utf-8"?>
 <p:sld xmlns:a="http://schemas.openxmlformats.org/drawingml/2006/main" xmlns:r="http://schemas.openxmlformats.org/officeDocument/2006/relationships" xmlns:p="http://schemas.openxmlformats.org/presentationml/2006/main">
   <p:cSld name="Slide 10">
     <p:bg>
@@ -3729,13 +6402,13 @@
   <p:clrMapOvr>
     <a:masterClrMapping/>
   </p:clrMapOvr>
-  <mc:AlternateContent xmlns:mc="http://schemas.openxmlformats.org/markup-compatibility/2006" xmlns:p159="http://schemas.microsoft.com/office/powerpoint/2015/09/main">
-    <mc:Choice Requires="p159">
+  <mc:AlternateContent xmlns:mc="http://schemas.openxmlformats.org/markup-compatibility/2006">
+    <mc:Choice xmlns:p159="http://schemas.microsoft.com/office/powerpoint/2015/09/main" xmlns="" Requires="p159">
       <p:transition xmlns:p14="http://schemas.microsoft.com/office/powerpoint/2010/main" spd="slow" p14:dur="1200">
         <p159:morph option="byObject"/>
       </p:transition>
     </mc:Choice>
-    <mc:Fallback xmlns="">
+    <mc:Fallback>
       <p:transition spd="med">
         <p:fade/>
       </p:transition>
@@ -3879,7 +6552,7 @@
 </p:sld>
 </file>
 
-<file path=ppt/slides/slide11.xml><?xml version="1.0" encoding="utf-8"?>
+<file path=ppt/slides/slide14.xml><?xml version="1.0" encoding="utf-8"?>
 <p:sld xmlns:a="http://schemas.openxmlformats.org/drawingml/2006/main" xmlns:r="http://schemas.openxmlformats.org/officeDocument/2006/relationships" xmlns:p="http://schemas.openxmlformats.org/presentationml/2006/main">
   <p:cSld name="Slide 11">
     <p:bg>
@@ -4389,13 +7062,13 @@
   <p:clrMapOvr>
     <a:masterClrMapping/>
   </p:clrMapOvr>
-  <mc:AlternateContent xmlns:mc="http://schemas.openxmlformats.org/markup-compatibility/2006" xmlns:p159="http://schemas.microsoft.com/office/powerpoint/2015/09/main">
-    <mc:Choice Requires="p159">
+  <mc:AlternateContent xmlns:mc="http://schemas.openxmlformats.org/markup-compatibility/2006">
+    <mc:Choice xmlns:p159="http://schemas.microsoft.com/office/powerpoint/2015/09/main" xmlns="" Requires="p159">
       <p:transition xmlns:p14="http://schemas.microsoft.com/office/powerpoint/2010/main" spd="slow" p14:dur="1600">
         <p159:morph option="byObject"/>
       </p:transition>
     </mc:Choice>
-    <mc:Fallback xmlns="">
+    <mc:Fallback>
       <p:transition spd="med">
         <p:fade/>
       </p:transition>
@@ -4539,7 +7212,7 @@
 </p:sld>
 </file>
 
-<file path=ppt/slides/slide12.xml><?xml version="1.0" encoding="utf-8"?>
+<file path=ppt/slides/slide15.xml><?xml version="1.0" encoding="utf-8"?>
 <p:sld xmlns:a="http://schemas.openxmlformats.org/drawingml/2006/main" xmlns:r="http://schemas.openxmlformats.org/officeDocument/2006/relationships" xmlns:p="http://schemas.openxmlformats.org/presentationml/2006/main">
   <p:cSld name="Slide 12">
     <p:bg>
@@ -4832,13 +7505,13 @@
   <p:clrMapOvr>
     <a:masterClrMapping/>
   </p:clrMapOvr>
-  <mc:AlternateContent xmlns:mc="http://schemas.openxmlformats.org/markup-compatibility/2006" xmlns:p159="http://schemas.microsoft.com/office/powerpoint/2015/09/main">
-    <mc:Choice Requires="p159">
+  <mc:AlternateContent xmlns:mc="http://schemas.openxmlformats.org/markup-compatibility/2006">
+    <mc:Choice xmlns:p159="http://schemas.microsoft.com/office/powerpoint/2015/09/main" xmlns="" Requires="p159">
       <p:transition xmlns:p14="http://schemas.microsoft.com/office/powerpoint/2010/main" spd="slow" p14:dur="1100">
         <p159:morph option="byObject"/>
       </p:transition>
     </mc:Choice>
-    <mc:Fallback xmlns="">
+    <mc:Fallback>
       <p:transition spd="med">
         <p:fade/>
       </p:transition>
@@ -4847,7 +7520,7 @@
 </p:sld>
 </file>
 
-<file path=ppt/slides/slide13.xml><?xml version="1.0" encoding="utf-8"?>
+<file path=ppt/slides/slide16.xml><?xml version="1.0" encoding="utf-8"?>
 <p:sld xmlns:a="http://schemas.openxmlformats.org/drawingml/2006/main" xmlns:r="http://schemas.openxmlformats.org/officeDocument/2006/relationships" xmlns:p="http://schemas.openxmlformats.org/presentationml/2006/main">
   <p:cSld name="Slide 13">
     <p:bg>
@@ -5877,13 +8550,13 @@
   <p:clrMapOvr>
     <a:masterClrMapping/>
   </p:clrMapOvr>
-  <mc:AlternateContent xmlns:mc="http://schemas.openxmlformats.org/markup-compatibility/2006" xmlns:p159="http://schemas.microsoft.com/office/powerpoint/2015/09/main">
-    <mc:Choice Requires="p159">
+  <mc:AlternateContent xmlns:mc="http://schemas.openxmlformats.org/markup-compatibility/2006">
+    <mc:Choice xmlns:p159="http://schemas.microsoft.com/office/powerpoint/2015/09/main" xmlns="" Requires="p159">
       <p:transition xmlns:p14="http://schemas.microsoft.com/office/powerpoint/2010/main" spd="slow" p14:dur="1500">
         <p159:morph option="byChar"/>
       </p:transition>
     </mc:Choice>
-    <mc:Fallback xmlns="">
+    <mc:Fallback>
       <p:transition spd="med">
         <p:fade/>
       </p:transition>
@@ -5892,7 +8565,7 @@
 </p:sld>
 </file>
 
-<file path=ppt/slides/slide14.xml><?xml version="1.0" encoding="utf-8"?>
+<file path=ppt/slides/slide17.xml><?xml version="1.0" encoding="utf-8"?>
 <p:sld xmlns:a="http://schemas.openxmlformats.org/drawingml/2006/main" xmlns:r="http://schemas.openxmlformats.org/officeDocument/2006/relationships" xmlns:p="http://schemas.openxmlformats.org/presentationml/2006/main">
   <p:cSld name="Slide 14">
     <p:bg>
@@ -6107,13 +8780,13 @@
   <p:clrMapOvr>
     <a:masterClrMapping/>
   </p:clrMapOvr>
-  <mc:AlternateContent xmlns:mc="http://schemas.openxmlformats.org/markup-compatibility/2006" xmlns:p159="http://schemas.microsoft.com/office/powerpoint/2015/09/main">
-    <mc:Choice Requires="p159">
+  <mc:AlternateContent xmlns:mc="http://schemas.openxmlformats.org/markup-compatibility/2006">
+    <mc:Choice xmlns:p159="http://schemas.microsoft.com/office/powerpoint/2015/09/main" xmlns="" Requires="p159">
       <p:transition xmlns:p14="http://schemas.microsoft.com/office/powerpoint/2010/main" spd="slow" p14:dur="1100">
         <p159:morph option="byObject"/>
       </p:transition>
     </mc:Choice>
-    <mc:Fallback xmlns="">
+    <mc:Fallback>
       <p:transition spd="med">
         <p:fade/>
       </p:transition>
@@ -6122,7 +8795,7 @@
 </p:sld>
 </file>
 
-<file path=ppt/slides/slide15.xml><?xml version="1.0" encoding="utf-8"?>
+<file path=ppt/slides/slide18.xml><?xml version="1.0" encoding="utf-8"?>
 <p:sld xmlns:a="http://schemas.openxmlformats.org/drawingml/2006/main" xmlns:r="http://schemas.openxmlformats.org/officeDocument/2006/relationships" xmlns:p="http://schemas.openxmlformats.org/presentationml/2006/main">
   <p:cSld name="Slide 15">
     <p:bg>
@@ -7834,13 +10507,13 @@
   <p:clrMapOvr>
     <a:masterClrMapping/>
   </p:clrMapOvr>
-  <mc:AlternateContent xmlns:mc="http://schemas.openxmlformats.org/markup-compatibility/2006" xmlns:p159="http://schemas.microsoft.com/office/powerpoint/2015/09/main">
-    <mc:Choice Requires="p159">
+  <mc:AlternateContent xmlns:mc="http://schemas.openxmlformats.org/markup-compatibility/2006">
+    <mc:Choice xmlns:p159="http://schemas.microsoft.com/office/powerpoint/2015/09/main" xmlns="" Requires="p159">
       <p:transition xmlns:p14="http://schemas.microsoft.com/office/powerpoint/2010/main" spd="slow" p14:dur="1300">
         <p159:morph option="byObject"/>
       </p:transition>
     </mc:Choice>
-    <mc:Fallback xmlns="">
+    <mc:Fallback>
       <p:transition spd="med">
         <p:fade/>
       </p:transition>
@@ -7849,7 +10522,7 @@
 </p:sld>
 </file>
 
-<file path=ppt/slides/slide16.xml><?xml version="1.0" encoding="utf-8"?>
+<file path=ppt/slides/slide19.xml><?xml version="1.0" encoding="utf-8"?>
 <p:sld xmlns:a="http://schemas.openxmlformats.org/drawingml/2006/main" xmlns:r="http://schemas.openxmlformats.org/officeDocument/2006/relationships" xmlns:p="http://schemas.openxmlformats.org/presentationml/2006/main">
   <p:cSld name="Slide 16">
     <p:bg>
@@ -8359,13 +11032,13 @@
   <p:clrMapOvr>
     <a:masterClrMapping/>
   </p:clrMapOvr>
-  <mc:AlternateContent xmlns:mc="http://schemas.openxmlformats.org/markup-compatibility/2006" xmlns:p159="http://schemas.microsoft.com/office/powerpoint/2015/09/main">
-    <mc:Choice Requires="p159">
+  <mc:AlternateContent xmlns:mc="http://schemas.openxmlformats.org/markup-compatibility/2006">
+    <mc:Choice xmlns:p159="http://schemas.microsoft.com/office/powerpoint/2015/09/main" xmlns="" Requires="p159">
       <p:transition xmlns:p14="http://schemas.microsoft.com/office/powerpoint/2010/main" spd="slow" p14:dur="1200">
         <p159:morph option="byObject"/>
       </p:transition>
     </mc:Choice>
-    <mc:Fallback xmlns="">
+    <mc:Fallback>
       <p:transition spd="med">
         <p:fade/>
       </p:transition>
@@ -8509,7 +11182,237 @@
 </p:sld>
 </file>
 
-<file path=ppt/slides/slide17.xml><?xml version="1.0" encoding="utf-8"?>
+<file path=ppt/slides/slide2.xml><?xml version="1.0" encoding="utf-8"?>
+<p:sld xmlns:a="http://schemas.openxmlformats.org/drawingml/2006/main" xmlns:r="http://schemas.openxmlformats.org/officeDocument/2006/relationships" xmlns:p="http://schemas.openxmlformats.org/presentationml/2006/main">
+  <p:cSld name="Slide 2">
+    <p:bg>
+      <p:bgPr>
+        <a:blipFill dpi="0" rotWithShape="1">
+          <a:blip r:embed="rId3">
+            <a:lum/>
+          </a:blip>
+          <a:srcRect/>
+          <a:stretch>
+            <a:fillRect/>
+          </a:stretch>
+        </a:blipFill>
+        <a:effectLst/>
+      </p:bgPr>
+    </p:bg>
+    <p:spTree>
+      <p:nvGrpSpPr>
+        <p:cNvPr id="1" name=""/>
+        <p:cNvGrpSpPr/>
+        <p:nvPr/>
+      </p:nvGrpSpPr>
+      <p:grpSpPr>
+        <a:xfrm>
+          <a:off x="0" y="0"/>
+          <a:ext cx="0" cy="0"/>
+          <a:chOff x="0" y="0"/>
+          <a:chExt cx="0" cy="0"/>
+        </a:xfrm>
+      </p:grpSpPr>
+      <p:sp>
+        <p:nvSpPr>
+          <p:cNvPr id="2" name="mrf_marka0"/>
+          <p:cNvSpPr/>
+          <p:nvPr/>
+        </p:nvSpPr>
+        <p:spPr>
+          <a:xfrm>
+            <a:off x="749808" y="457200"/>
+            <a:ext cx="118872" cy="118872"/>
+          </a:xfrm>
+          <a:prstGeom prst="rect">
+            <a:avLst/>
+          </a:prstGeom>
+          <a:solidFill>
+            <a:srgbClr val="2563EB"/>
+          </a:solidFill>
+          <a:ln w="12700">
+            <a:solidFill>
+              <a:srgbClr val="2563EB"/>
+            </a:solidFill>
+            <a:prstDash val="solid"/>
+          </a:ln>
+        </p:spPr>
+      </p:sp>
+      <p:sp>
+        <p:nvSpPr>
+          <p:cNvPr id="3" name="mrf_marka1"/>
+          <p:cNvSpPr/>
+          <p:nvPr/>
+        </p:nvSpPr>
+        <p:spPr>
+          <a:xfrm>
+            <a:off x="905256" y="457200"/>
+            <a:ext cx="118872" cy="118872"/>
+          </a:xfrm>
+          <a:prstGeom prst="rect">
+            <a:avLst/>
+          </a:prstGeom>
+          <a:solidFill>
+            <a:srgbClr val="06B6D4"/>
+          </a:solidFill>
+          <a:ln w="12700">
+            <a:solidFill>
+              <a:srgbClr val="06B6D4"/>
+            </a:solidFill>
+            <a:prstDash val="solid"/>
+          </a:ln>
+        </p:spPr>
+      </p:sp>
+      <p:sp>
+        <p:nvSpPr>
+          <p:cNvPr id="4" name="mrf_marka2"/>
+          <p:cNvSpPr/>
+          <p:nvPr/>
+        </p:nvSpPr>
+        <p:spPr>
+          <a:xfrm>
+            <a:off x="1060704" y="457200"/>
+            <a:ext cx="118872" cy="118872"/>
+          </a:xfrm>
+          <a:prstGeom prst="rect">
+            <a:avLst/>
+          </a:prstGeom>
+          <a:solidFill>
+            <a:srgbClr val="6366F1"/>
+          </a:solidFill>
+          <a:ln w="12700">
+            <a:solidFill>
+              <a:srgbClr val="6366F1"/>
+            </a:solidFill>
+            <a:prstDash val="solid"/>
+          </a:ln>
+        </p:spPr>
+      </p:sp>
+      <p:sp>
+        <p:nvSpPr>
+          <p:cNvPr id="5" name="mrf_bolumNo"/>
+          <p:cNvSpPr txBox="1"/>
+          <p:nvPr/>
+        </p:nvSpPr>
+        <p:spPr>
+          <a:xfrm>
+            <a:off x="8695944" y="384048"/>
+            <a:ext cx="2743200" cy="274320"/>
+          </a:xfrm>
+          <a:prstGeom prst="rect">
+            <a:avLst/>
+          </a:prstGeom>
+          <a:noFill/>
+          <a:ln/>
+        </p:spPr>
+        <p:txBody>
+          <a:bodyPr wrap="square" lIns="0" tIns="0" rIns="0" bIns="0" rtlCol="0" anchor="ctr"/>
+          <a:lstStyle/>
+          <a:p>
+            <a:pPr marL="0" indent="0" algn="r">
+              <a:buNone/>
+            </a:pPr>
+            <a:r>
+              <a:rPr lang="en-US" sz="1150" kern="0" spc="240" dirty="0">
+                <a:solidFill>
+                  <a:srgbClr val="2563EB"/>
+                </a:solidFill>
+                <a:latin typeface="Segoe UI Semibold" pitchFamily="34" charset="0"/>
+                <a:ea typeface="Segoe UI Semibold" pitchFamily="34" charset="-122"/>
+                <a:cs typeface="Segoe UI Semibold" pitchFamily="34" charset="-120"/>
+              </a:rPr>
+              <a:t>01 · PROBLEM</a:t>
+            </a:r>
+            <a:endParaRPr lang="en-US" sz="1150" dirty="0"/>
+          </a:p>
+        </p:txBody>
+      </p:sp>
+      <p:sp>
+        <p:nvSpPr>
+          <p:cNvPr id="6" name="mrf_soru"/>
+          <p:cNvSpPr txBox="1"/>
+          <p:nvPr/>
+        </p:nvSpPr>
+        <p:spPr>
+          <a:xfrm>
+            <a:off x="749808" y="2286000"/>
+            <a:ext cx="10689336" cy="2011680"/>
+          </a:xfrm>
+          <a:prstGeom prst="rect">
+            <a:avLst/>
+          </a:prstGeom>
+          <a:noFill/>
+          <a:ln/>
+        </p:spPr>
+        <p:txBody>
+          <a:bodyPr wrap="square" lIns="0" tIns="0" rIns="0" bIns="0" rtlCol="0" anchor="ctr"/>
+          <a:lstStyle/>
+          <a:p>
+            <a:pPr marL="0" indent="0" algn="l">
+              <a:buNone/>
+            </a:pPr>
+            <a:r>
+              <a:rPr lang="en-US" sz="6000" dirty="0">
+                <a:solidFill>
+                  <a:srgbClr val="0F172A"/>
+                </a:solidFill>
+                <a:latin typeface="Segoe UI Black" pitchFamily="34" charset="0"/>
+                <a:ea typeface="Segoe UI Black" pitchFamily="34" charset="-122"/>
+                <a:cs typeface="Segoe UI Black" pitchFamily="34" charset="-120"/>
+              </a:rPr>
+              <a:t>Neden bu iş hâlâ elle yapılıyor?</a:t>
+            </a:r>
+            <a:endParaRPr lang="en-US" sz="6000" dirty="0"/>
+          </a:p>
+        </p:txBody>
+      </p:sp>
+      <p:pic>
+        <p:nvPicPr>
+          <p:cNvPr id="7" name="mrf_logo" descr="logo.png"/>
+          <p:cNvPicPr>
+            <a:picLocks noChangeAspect="1"/>
+          </p:cNvPicPr>
+          <p:nvPr/>
+        </p:nvPicPr>
+        <p:blipFill>
+          <a:blip r:embed="rId4">
+            <a:alphaModFix amt="88000"/>
+          </a:blip>
+          <a:stretch>
+            <a:fillRect/>
+          </a:stretch>
+        </p:blipFill>
+        <p:spPr>
+          <a:xfrm>
+            <a:off x="9957816" y="6144768"/>
+            <a:ext cx="1481328" cy="457200"/>
+          </a:xfrm>
+          <a:prstGeom prst="rect">
+            <a:avLst/>
+          </a:prstGeom>
+        </p:spPr>
+      </p:pic>
+    </p:spTree>
+  </p:cSld>
+  <p:clrMapOvr>
+    <a:masterClrMapping/>
+  </p:clrMapOvr>
+  <mc:AlternateContent xmlns:mc="http://schemas.openxmlformats.org/markup-compatibility/2006">
+    <mc:Choice xmlns:p159="http://schemas.microsoft.com/office/powerpoint/2015/09/main" xmlns="" Requires="p159">
+      <p:transition xmlns:p14="http://schemas.microsoft.com/office/powerpoint/2010/main" spd="slow" p14:dur="900">
+        <p159:morph option="byObject"/>
+      </p:transition>
+    </mc:Choice>
+    <mc:Fallback>
+      <p:transition spd="med">
+        <p:fade/>
+      </p:transition>
+    </mc:Fallback>
+  </mc:AlternateContent>
+</p:sld>
+</file>
+
+<file path=ppt/slides/slide20.xml><?xml version="1.0" encoding="utf-8"?>
 <p:sld xmlns:a="http://schemas.openxmlformats.org/drawingml/2006/main" xmlns:r="http://schemas.openxmlformats.org/officeDocument/2006/relationships" xmlns:p="http://schemas.openxmlformats.org/presentationml/2006/main">
   <p:cSld name="Slide 17">
     <p:bg>
@@ -9019,13 +11922,13 @@
   <p:clrMapOvr>
     <a:masterClrMapping/>
   </p:clrMapOvr>
-  <mc:AlternateContent xmlns:mc="http://schemas.openxmlformats.org/markup-compatibility/2006" xmlns:p159="http://schemas.microsoft.com/office/powerpoint/2015/09/main">
-    <mc:Choice Requires="p159">
+  <mc:AlternateContent xmlns:mc="http://schemas.openxmlformats.org/markup-compatibility/2006">
+    <mc:Choice xmlns:p159="http://schemas.microsoft.com/office/powerpoint/2015/09/main" xmlns="" Requires="p159">
       <p:transition xmlns:p14="http://schemas.microsoft.com/office/powerpoint/2010/main" spd="slow" p14:dur="1600">
         <p159:morph option="byObject"/>
       </p:transition>
     </mc:Choice>
-    <mc:Fallback xmlns="">
+    <mc:Fallback>
       <p:transition spd="med">
         <p:fade/>
       </p:transition>
@@ -9059,7 +11962,7 @@
                                   <p:childTnLst>
                                     <p:cmd type="call" cmd="playFrom(0.0)">
                                       <p:cBhvr>
-                                        <p:cTn id="6" dur="1" fill="hold"/>
+                                        <p:cTn id="6" dur="4840" fill="hold"/>
                                         <p:tgtEl>
                                           <p:spTgt spid="12"/>
                                         </p:tgtEl>
@@ -9169,7 +12072,7 @@
 </p:sld>
 </file>
 
-<file path=ppt/slides/slide18.xml><?xml version="1.0" encoding="utf-8"?>
+<file path=ppt/slides/slide21.xml><?xml version="1.0" encoding="utf-8"?>
 <p:sld xmlns:a="http://schemas.openxmlformats.org/drawingml/2006/main" xmlns:r="http://schemas.openxmlformats.org/officeDocument/2006/relationships" xmlns:p="http://schemas.openxmlformats.org/presentationml/2006/main">
   <p:cSld name="Slide 18">
     <p:bg>
@@ -9347,7 +12250,62 @@
                 <a:ea typeface="Segoe UI Black" pitchFamily="34" charset="-122"/>
                 <a:cs typeface="Segoe UI Black" pitchFamily="34" charset="-120"/>
               </a:rPr>
-              <a:t>Neden bir banka bunu kurabilir?</a:t>
+              <a:t>Neden bir banka </a:t>
+            </a:r>
+            <a:r>
+              <a:rPr lang="en-US" sz="6000" dirty="0" err="1">
+                <a:solidFill>
+                  <a:srgbClr val="0F172A"/>
+                </a:solidFill>
+                <a:latin typeface="Segoe UI Black" pitchFamily="34" charset="0"/>
+                <a:ea typeface="Segoe UI Black" pitchFamily="34" charset="-122"/>
+                <a:cs typeface="Segoe UI Black" pitchFamily="34" charset="-120"/>
+              </a:rPr>
+              <a:t>bunu</a:t>
+            </a:r>
+            <a:r>
+              <a:rPr lang="en-US" sz="6000" dirty="0">
+                <a:solidFill>
+                  <a:srgbClr val="0F172A"/>
+                </a:solidFill>
+                <a:latin typeface="Segoe UI Black" pitchFamily="34" charset="0"/>
+                <a:ea typeface="Segoe UI Black" pitchFamily="34" charset="-122"/>
+                <a:cs typeface="Segoe UI Black" pitchFamily="34" charset="-120"/>
+              </a:rPr>
+              <a:t> </a:t>
+            </a:r>
+            <a:r>
+              <a:rPr lang="en-US" sz="6000" dirty="0" smtClean="0">
+                <a:solidFill>
+                  <a:srgbClr val="0F172A"/>
+                </a:solidFill>
+                <a:latin typeface="Segoe UI Black" pitchFamily="34" charset="0"/>
+                <a:ea typeface="Segoe UI Black" pitchFamily="34" charset="-122"/>
+                <a:cs typeface="Segoe UI Black" pitchFamily="34" charset="-120"/>
+              </a:rPr>
+              <a:t>ku</a:t>
+            </a:r>
+            <a:r>
+              <a:rPr lang="tr-TR" sz="6000" dirty="0" smtClean="0">
+                <a:solidFill>
+                  <a:srgbClr val="0F172A"/>
+                </a:solidFill>
+                <a:latin typeface="Segoe UI Black" pitchFamily="34" charset="0"/>
+                <a:ea typeface="Segoe UI Black" pitchFamily="34" charset="-122"/>
+                <a:cs typeface="Segoe UI Black" pitchFamily="34" charset="-120"/>
+              </a:rPr>
+              <a:t>llanmalı</a:t>
+            </a:r>
+            <a:r>
+              <a:rPr lang="en-US" sz="6000" dirty="0" smtClean="0">
+                <a:solidFill>
+                  <a:srgbClr val="0F172A"/>
+                </a:solidFill>
+                <a:latin typeface="Segoe UI Black" pitchFamily="34" charset="0"/>
+                <a:ea typeface="Segoe UI Black" pitchFamily="34" charset="-122"/>
+                <a:cs typeface="Segoe UI Black" pitchFamily="34" charset="-120"/>
+              </a:rPr>
+              <a:t>?</a:t>
             </a:r>
             <a:endParaRPr lang="en-US" sz="6000" dirty="0"/>
           </a:p>
@@ -9384,13 +12342,13 @@
   <p:clrMapOvr>
     <a:masterClrMapping/>
   </p:clrMapOvr>
-  <mc:AlternateContent xmlns:mc="http://schemas.openxmlformats.org/markup-compatibility/2006" xmlns:p159="http://schemas.microsoft.com/office/powerpoint/2015/09/main">
-    <mc:Choice Requires="p159">
+  <mc:AlternateContent xmlns:mc="http://schemas.openxmlformats.org/markup-compatibility/2006">
+    <mc:Choice xmlns:p159="http://schemas.microsoft.com/office/powerpoint/2015/09/main" xmlns="" Requires="p159">
       <p:transition xmlns:p14="http://schemas.microsoft.com/office/powerpoint/2010/main" spd="slow" p14:dur="1100">
         <p159:morph option="byObject"/>
       </p:transition>
     </mc:Choice>
-    <mc:Fallback xmlns="">
+    <mc:Fallback>
       <p:transition spd="med">
         <p:fade/>
       </p:transition>
@@ -9399,7 +12357,7 @@
 </p:sld>
 </file>
 
-<file path=ppt/slides/slide19.xml><?xml version="1.0" encoding="utf-8"?>
+<file path=ppt/slides/slide22.xml><?xml version="1.0" encoding="utf-8"?>
 <p:sld xmlns:a="http://schemas.openxmlformats.org/drawingml/2006/main" xmlns:r="http://schemas.openxmlformats.org/officeDocument/2006/relationships" xmlns:p="http://schemas.openxmlformats.org/presentationml/2006/main">
   <p:cSld name="Slide 19">
     <p:bg>
@@ -10607,13 +13565,13 @@
   <p:clrMapOvr>
     <a:masterClrMapping/>
   </p:clrMapOvr>
-  <mc:AlternateContent xmlns:mc="http://schemas.openxmlformats.org/markup-compatibility/2006" xmlns:p159="http://schemas.microsoft.com/office/powerpoint/2015/09/main">
-    <mc:Choice Requires="p159">
+  <mc:AlternateContent xmlns:mc="http://schemas.openxmlformats.org/markup-compatibility/2006">
+    <mc:Choice xmlns:p159="http://schemas.microsoft.com/office/powerpoint/2015/09/main" xmlns="" Requires="p159">
       <p:transition xmlns:p14="http://schemas.microsoft.com/office/powerpoint/2010/main" spd="slow" p14:dur="1400">
         <p159:morph option="byObject"/>
       </p:transition>
     </mc:Choice>
-    <mc:Fallback xmlns="">
+    <mc:Fallback>
       <p:transition spd="med">
         <p:fade/>
       </p:transition>
@@ -10622,237 +13580,7 @@
 </p:sld>
 </file>
 
-<file path=ppt/slides/slide2.xml><?xml version="1.0" encoding="utf-8"?>
-<p:sld xmlns:a="http://schemas.openxmlformats.org/drawingml/2006/main" xmlns:r="http://schemas.openxmlformats.org/officeDocument/2006/relationships" xmlns:p="http://schemas.openxmlformats.org/presentationml/2006/main">
-  <p:cSld name="Slide 2">
-    <p:bg>
-      <p:bgPr>
-        <a:blipFill dpi="0" rotWithShape="1">
-          <a:blip r:embed="rId3">
-            <a:lum/>
-          </a:blip>
-          <a:srcRect/>
-          <a:stretch>
-            <a:fillRect/>
-          </a:stretch>
-        </a:blipFill>
-        <a:effectLst/>
-      </p:bgPr>
-    </p:bg>
-    <p:spTree>
-      <p:nvGrpSpPr>
-        <p:cNvPr id="1" name=""/>
-        <p:cNvGrpSpPr/>
-        <p:nvPr/>
-      </p:nvGrpSpPr>
-      <p:grpSpPr>
-        <a:xfrm>
-          <a:off x="0" y="0"/>
-          <a:ext cx="0" cy="0"/>
-          <a:chOff x="0" y="0"/>
-          <a:chExt cx="0" cy="0"/>
-        </a:xfrm>
-      </p:grpSpPr>
-      <p:sp>
-        <p:nvSpPr>
-          <p:cNvPr id="2" name="mrf_marka0"/>
-          <p:cNvSpPr/>
-          <p:nvPr/>
-        </p:nvSpPr>
-        <p:spPr>
-          <a:xfrm>
-            <a:off x="749808" y="457200"/>
-            <a:ext cx="118872" cy="118872"/>
-          </a:xfrm>
-          <a:prstGeom prst="rect">
-            <a:avLst/>
-          </a:prstGeom>
-          <a:solidFill>
-            <a:srgbClr val="2563EB"/>
-          </a:solidFill>
-          <a:ln w="12700">
-            <a:solidFill>
-              <a:srgbClr val="2563EB"/>
-            </a:solidFill>
-            <a:prstDash val="solid"/>
-          </a:ln>
-        </p:spPr>
-      </p:sp>
-      <p:sp>
-        <p:nvSpPr>
-          <p:cNvPr id="3" name="mrf_marka1"/>
-          <p:cNvSpPr/>
-          <p:nvPr/>
-        </p:nvSpPr>
-        <p:spPr>
-          <a:xfrm>
-            <a:off x="905256" y="457200"/>
-            <a:ext cx="118872" cy="118872"/>
-          </a:xfrm>
-          <a:prstGeom prst="rect">
-            <a:avLst/>
-          </a:prstGeom>
-          <a:solidFill>
-            <a:srgbClr val="06B6D4"/>
-          </a:solidFill>
-          <a:ln w="12700">
-            <a:solidFill>
-              <a:srgbClr val="06B6D4"/>
-            </a:solidFill>
-            <a:prstDash val="solid"/>
-          </a:ln>
-        </p:spPr>
-      </p:sp>
-      <p:sp>
-        <p:nvSpPr>
-          <p:cNvPr id="4" name="mrf_marka2"/>
-          <p:cNvSpPr/>
-          <p:nvPr/>
-        </p:nvSpPr>
-        <p:spPr>
-          <a:xfrm>
-            <a:off x="1060704" y="457200"/>
-            <a:ext cx="118872" cy="118872"/>
-          </a:xfrm>
-          <a:prstGeom prst="rect">
-            <a:avLst/>
-          </a:prstGeom>
-          <a:solidFill>
-            <a:srgbClr val="6366F1"/>
-          </a:solidFill>
-          <a:ln w="12700">
-            <a:solidFill>
-              <a:srgbClr val="6366F1"/>
-            </a:solidFill>
-            <a:prstDash val="solid"/>
-          </a:ln>
-        </p:spPr>
-      </p:sp>
-      <p:sp>
-        <p:nvSpPr>
-          <p:cNvPr id="5" name="mrf_bolumNo"/>
-          <p:cNvSpPr txBox="1"/>
-          <p:nvPr/>
-        </p:nvSpPr>
-        <p:spPr>
-          <a:xfrm>
-            <a:off x="8695944" y="384048"/>
-            <a:ext cx="2743200" cy="274320"/>
-          </a:xfrm>
-          <a:prstGeom prst="rect">
-            <a:avLst/>
-          </a:prstGeom>
-          <a:noFill/>
-          <a:ln/>
-        </p:spPr>
-        <p:txBody>
-          <a:bodyPr wrap="square" lIns="0" tIns="0" rIns="0" bIns="0" rtlCol="0" anchor="ctr"/>
-          <a:lstStyle/>
-          <a:p>
-            <a:pPr marL="0" indent="0" algn="r">
-              <a:buNone/>
-            </a:pPr>
-            <a:r>
-              <a:rPr lang="en-US" sz="1150" kern="0" spc="240" dirty="0">
-                <a:solidFill>
-                  <a:srgbClr val="2563EB"/>
-                </a:solidFill>
-                <a:latin typeface="Segoe UI Semibold" pitchFamily="34" charset="0"/>
-                <a:ea typeface="Segoe UI Semibold" pitchFamily="34" charset="-122"/>
-                <a:cs typeface="Segoe UI Semibold" pitchFamily="34" charset="-120"/>
-              </a:rPr>
-              <a:t>01 · PROBLEM</a:t>
-            </a:r>
-            <a:endParaRPr lang="en-US" sz="1150" dirty="0"/>
-          </a:p>
-        </p:txBody>
-      </p:sp>
-      <p:sp>
-        <p:nvSpPr>
-          <p:cNvPr id="6" name="mrf_soru"/>
-          <p:cNvSpPr txBox="1"/>
-          <p:nvPr/>
-        </p:nvSpPr>
-        <p:spPr>
-          <a:xfrm>
-            <a:off x="749808" y="2286000"/>
-            <a:ext cx="10689336" cy="2011680"/>
-          </a:xfrm>
-          <a:prstGeom prst="rect">
-            <a:avLst/>
-          </a:prstGeom>
-          <a:noFill/>
-          <a:ln/>
-        </p:spPr>
-        <p:txBody>
-          <a:bodyPr wrap="square" lIns="0" tIns="0" rIns="0" bIns="0" rtlCol="0" anchor="ctr"/>
-          <a:lstStyle/>
-          <a:p>
-            <a:pPr marL="0" indent="0" algn="l">
-              <a:buNone/>
-            </a:pPr>
-            <a:r>
-              <a:rPr lang="en-US" sz="6000" dirty="0">
-                <a:solidFill>
-                  <a:srgbClr val="0F172A"/>
-                </a:solidFill>
-                <a:latin typeface="Segoe UI Black" pitchFamily="34" charset="0"/>
-                <a:ea typeface="Segoe UI Black" pitchFamily="34" charset="-122"/>
-                <a:cs typeface="Segoe UI Black" pitchFamily="34" charset="-120"/>
-              </a:rPr>
-              <a:t>Neden bu iş hâlâ elle yapılıyor?</a:t>
-            </a:r>
-            <a:endParaRPr lang="en-US" sz="6000" dirty="0"/>
-          </a:p>
-        </p:txBody>
-      </p:sp>
-      <p:pic>
-        <p:nvPicPr>
-          <p:cNvPr id="7" name="mrf_logo" descr="logo.png"/>
-          <p:cNvPicPr>
-            <a:picLocks noChangeAspect="1"/>
-          </p:cNvPicPr>
-          <p:nvPr/>
-        </p:nvPicPr>
-        <p:blipFill>
-          <a:blip r:embed="rId4">
-            <a:alphaModFix amt="88000"/>
-          </a:blip>
-          <a:stretch>
-            <a:fillRect/>
-          </a:stretch>
-        </p:blipFill>
-        <p:spPr>
-          <a:xfrm>
-            <a:off x="9957816" y="6144768"/>
-            <a:ext cx="1481328" cy="457200"/>
-          </a:xfrm>
-          <a:prstGeom prst="rect">
-            <a:avLst/>
-          </a:prstGeom>
-        </p:spPr>
-      </p:pic>
-    </p:spTree>
-  </p:cSld>
-  <p:clrMapOvr>
-    <a:masterClrMapping/>
-  </p:clrMapOvr>
-  <mc:AlternateContent xmlns:mc="http://schemas.openxmlformats.org/markup-compatibility/2006" xmlns:p159="http://schemas.microsoft.com/office/powerpoint/2015/09/main">
-    <mc:Choice Requires="p159">
-      <p:transition xmlns:p14="http://schemas.microsoft.com/office/powerpoint/2010/main" spd="slow" p14:dur="900">
-        <p159:morph option="byObject"/>
-      </p:transition>
-    </mc:Choice>
-    <mc:Fallback xmlns="">
-      <p:transition spd="med">
-        <p:fade/>
-      </p:transition>
-    </mc:Fallback>
-  </mc:AlternateContent>
-</p:sld>
-</file>
-
-<file path=ppt/slides/slide20.xml><?xml version="1.0" encoding="utf-8"?>
+<file path=ppt/slides/slide23.xml><?xml version="1.0" encoding="utf-8"?>
 <p:sld xmlns:a="http://schemas.openxmlformats.org/drawingml/2006/main" xmlns:r="http://schemas.openxmlformats.org/officeDocument/2006/relationships" xmlns:p="http://schemas.openxmlformats.org/presentationml/2006/main">
   <p:cSld name="Slide 20">
     <p:bg>
@@ -11421,677 +14149,30 @@
           </a:p>
         </p:txBody>
       </p:sp>
-      <p:sp>
-        <p:nvSpPr>
-          <p:cNvPr id="16" name="Text 14"/>
-          <p:cNvSpPr txBox="1"/>
-          <p:nvPr/>
-        </p:nvSpPr>
-        <p:spPr>
-          <a:xfrm>
-            <a:off x="749808" y="5431536"/>
-            <a:ext cx="10689336" cy="347472"/>
-          </a:xfrm>
-          <a:prstGeom prst="rect">
-            <a:avLst/>
-          </a:prstGeom>
-          <a:noFill/>
-          <a:ln/>
-        </p:spPr>
-        <p:txBody>
-          <a:bodyPr wrap="square" lIns="0" tIns="0" rIns="0" bIns="0" rtlCol="0" anchor="ctr"/>
-          <a:lstStyle/>
-          <a:p>
-            <a:pPr marL="0" indent="0" algn="ctr">
-              <a:buNone/>
-            </a:pPr>
-            <a:r>
-              <a:rPr lang="en-US" sz="1150" dirty="0">
-                <a:solidFill>
-                  <a:srgbClr val="64748B"/>
-                </a:solidFill>
-                <a:latin typeface="Segoe UI" pitchFamily="34" charset="0"/>
-                <a:ea typeface="Segoe UI" pitchFamily="34" charset="-122"/>
-                <a:cs typeface="Segoe UI" pitchFamily="34" charset="-120"/>
-              </a:rPr>
-              <a:t>Sıradaki: finansman kapsamını 10 bankaya çıkarmak · sezonsal kampanya açığı analizi</a:t>
-            </a:r>
-            <a:endParaRPr lang="en-US" sz="1150" dirty="0"/>
-          </a:p>
-        </p:txBody>
-      </p:sp>
     </p:spTree>
   </p:cSld>
   <p:clrMapOvr>
     <a:masterClrMapping/>
   </p:clrMapOvr>
-  <mc:AlternateContent xmlns:mc="http://schemas.openxmlformats.org/markup-compatibility/2006" xmlns:p159="http://schemas.microsoft.com/office/powerpoint/2015/09/main">
-    <mc:Choice Requires="p159">
+  <mc:AlternateContent xmlns:mc="http://schemas.openxmlformats.org/markup-compatibility/2006">
+    <mc:Choice xmlns:p159="http://schemas.microsoft.com/office/powerpoint/2015/09/main" xmlns="" Requires="p159">
       <p:transition xmlns:p14="http://schemas.microsoft.com/office/powerpoint/2010/main" spd="slow" p14:dur="1500">
         <p159:morph option="byObject"/>
       </p:transition>
     </mc:Choice>
-    <mc:Fallback xmlns="">
+    <mc:Fallback>
       <p:transition spd="med">
         <p:fade/>
       </p:transition>
     </mc:Fallback>
   </mc:AlternateContent>
-</p:sld>
-</file>
-
-<file path=ppt/slides/slide21.xml><?xml version="1.0" encoding="utf-8"?>
-<p:sld xmlns:a="http://schemas.openxmlformats.org/drawingml/2006/main" xmlns:r="http://schemas.openxmlformats.org/officeDocument/2006/relationships" xmlns:p="http://schemas.openxmlformats.org/presentationml/2006/main">
-  <p:cSld>
-    <p:spTree>
-      <p:nvGrpSpPr>
-        <p:cNvPr id="1" name=""/>
-        <p:cNvGrpSpPr/>
-        <p:nvPr/>
-      </p:nvGrpSpPr>
-      <p:grpSpPr>
-        <a:xfrm>
-          <a:off x="0" y="0"/>
-          <a:ext cx="0" cy="0"/>
-          <a:chOff x="0" y="0"/>
-          <a:chExt cx="0" cy="0"/>
-        </a:xfrm>
-      </p:grpSpPr>
-      <p:sp>
-        <p:nvSpPr>
-          <p:cNvPr id="2" name="mrf_marka0"/>
-          <p:cNvSpPr/>
-          <p:nvPr/>
-        </p:nvSpPr>
-        <p:spPr>
-          <a:xfrm>
-            <a:off x="749808" y="457200"/>
-            <a:ext cx="118872" cy="118872"/>
-          </a:xfrm>
-          <a:prstGeom prst="rect">
-            <a:avLst/>
-          </a:prstGeom>
-          <a:solidFill>
-            <a:srgbClr val="2563EB"/>
-          </a:solidFill>
-          <a:ln w="12700">
-            <a:solidFill>
-              <a:srgbClr val="2563EB"/>
-            </a:solidFill>
-            <a:prstDash val="solid"/>
-          </a:ln>
-        </p:spPr>
-      </p:sp>
-      <p:sp>
-        <p:nvSpPr>
-          <p:cNvPr id="3" name="mrf_marka1"/>
-          <p:cNvSpPr/>
-          <p:nvPr/>
-        </p:nvSpPr>
-        <p:spPr>
-          <a:xfrm>
-            <a:off x="905256" y="457200"/>
-            <a:ext cx="118872" cy="118872"/>
-          </a:xfrm>
-          <a:prstGeom prst="rect">
-            <a:avLst/>
-          </a:prstGeom>
-          <a:solidFill>
-            <a:srgbClr val="06B6D4"/>
-          </a:solidFill>
-          <a:ln w="12700">
-            <a:solidFill>
-              <a:srgbClr val="06B6D4"/>
-            </a:solidFill>
-            <a:prstDash val="solid"/>
-          </a:ln>
-        </p:spPr>
-      </p:sp>
-      <p:sp>
-        <p:nvSpPr>
-          <p:cNvPr id="4" name="mrf_marka2"/>
-          <p:cNvSpPr/>
-          <p:nvPr/>
-        </p:nvSpPr>
-        <p:spPr>
-          <a:xfrm>
-            <a:off x="1060704" y="457200"/>
-            <a:ext cx="118872" cy="118872"/>
-          </a:xfrm>
-          <a:prstGeom prst="rect">
-            <a:avLst/>
-          </a:prstGeom>
-          <a:solidFill>
-            <a:srgbClr val="6366F1"/>
-          </a:solidFill>
-          <a:ln w="12700">
-            <a:solidFill>
-              <a:srgbClr val="6366F1"/>
-            </a:solidFill>
-            <a:prstDash val="solid"/>
-          </a:ln>
-        </p:spPr>
-      </p:sp>
-      <p:sp>
-        <p:nvSpPr>
-          <p:cNvPr id="5" name="mrf_serit"/>
-          <p:cNvSpPr/>
-          <p:nvPr/>
-        </p:nvSpPr>
-        <p:spPr>
-          <a:xfrm>
-            <a:off x="749808" y="1975104"/>
-            <a:ext cx="10689336" cy="1188720"/>
-          </a:xfrm>
-          <a:prstGeom prst="roundRect">
-            <a:avLst>
-              <a:gd name="adj" fmla="val 9231"/>
-            </a:avLst>
-          </a:prstGeom>
-          <a:solidFill>
-            <a:srgbClr val="FFFFFF">
-              <a:alpha val="75000"/>
-            </a:srgbClr>
-          </a:solidFill>
-          <a:ln w="19050">
-            <a:solidFill>
-              <a:srgbClr val="2563EB"/>
-            </a:solidFill>
-            <a:prstDash val="solid"/>
-          </a:ln>
-        </p:spPr>
-      </p:sp>
-      <p:sp>
-        <p:nvSpPr>
-          <p:cNvPr id="6" name="mrf_seritMetin"/>
-          <p:cNvSpPr txBox="1"/>
-          <p:nvPr/>
-        </p:nvSpPr>
-        <p:spPr>
-          <a:xfrm>
-            <a:off x="749808" y="1975104"/>
-            <a:ext cx="10689336" cy="1188720"/>
-          </a:xfrm>
-          <a:prstGeom prst="rect">
-            <a:avLst/>
-          </a:prstGeom>
-          <a:noFill/>
-          <a:ln/>
-        </p:spPr>
-        <p:txBody>
-          <a:bodyPr wrap="square" lIns="0" tIns="0" rIns="0" bIns="0" rtlCol="0" anchor="ctr"/>
-          <a:lstStyle/>
-          <a:p>
-            <a:pPr marL="0" indent="0" algn="ctr">
-              <a:buNone/>
-            </a:pPr>
-            <a:r>
-              <a:rPr lang="en-US" sz="3100" b="1" dirty="0">
-                <a:solidFill>
-                  <a:srgbClr val="0F172A"/>
-                </a:solidFill>
-                <a:latin typeface="Segoe UI" pitchFamily="34" charset="0"/>
-                <a:ea typeface="Segoe UI" pitchFamily="34" charset="-122"/>
-                <a:cs typeface="Segoe UI" pitchFamily="34" charset="-120"/>
-              </a:rPr>
-              <a:t>Kanıtlanabilir</a:t>
-            </a:r>
-            <a:r>
-              <a:rPr lang="en-US" sz="3100" dirty="0">
-                <a:solidFill>
-                  <a:srgbClr val="2563EB"/>
-                </a:solidFill>
-                <a:latin typeface="Segoe UI" pitchFamily="34" charset="0"/>
-                <a:ea typeface="Segoe UI" pitchFamily="34" charset="-122"/>
-                <a:cs typeface="Segoe UI" pitchFamily="34" charset="-120"/>
-              </a:rPr>
-              <a:t>   ·   </a:t>
-            </a:r>
-            <a:r>
-              <a:rPr lang="en-US" sz="3100" b="1" dirty="0">
-                <a:solidFill>
-                  <a:srgbClr val="0F172A"/>
-                </a:solidFill>
-                <a:latin typeface="Segoe UI" pitchFamily="34" charset="0"/>
-                <a:ea typeface="Segoe UI" pitchFamily="34" charset="-122"/>
-                <a:cs typeface="Segoe UI" pitchFamily="34" charset="-120"/>
-              </a:rPr>
-              <a:t>Karşılaştırılabilir</a:t>
-            </a:r>
-            <a:r>
-              <a:rPr lang="en-US" sz="3100" dirty="0">
-                <a:solidFill>
-                  <a:srgbClr val="2563EB"/>
-                </a:solidFill>
-                <a:latin typeface="Segoe UI" pitchFamily="34" charset="0"/>
-                <a:ea typeface="Segoe UI" pitchFamily="34" charset="-122"/>
-                <a:cs typeface="Segoe UI" pitchFamily="34" charset="-120"/>
-              </a:rPr>
-              <a:t>   ·   </a:t>
-            </a:r>
-            <a:r>
-              <a:rPr lang="en-US" sz="3100" b="1" dirty="0">
-                <a:solidFill>
-                  <a:srgbClr val="0F172A"/>
-                </a:solidFill>
-                <a:latin typeface="Segoe UI" pitchFamily="34" charset="0"/>
-                <a:ea typeface="Segoe UI" pitchFamily="34" charset="-122"/>
-                <a:cs typeface="Segoe UI" pitchFamily="34" charset="-120"/>
-              </a:rPr>
-              <a:t>Kurum içi</a:t>
-            </a:r>
-            <a:endParaRPr lang="en-US" sz="3100" dirty="0"/>
-          </a:p>
-        </p:txBody>
-      </p:sp>
-      <p:sp>
-        <p:nvSpPr>
-          <p:cNvPr id="7" name="mrf_sayiBuyuk"/>
-          <p:cNvSpPr txBox="1"/>
-          <p:nvPr/>
-        </p:nvSpPr>
-        <p:spPr>
-          <a:xfrm>
-            <a:off x="749808" y="3602736"/>
-            <a:ext cx="2672334" cy="585216"/>
-          </a:xfrm>
-          <a:prstGeom prst="rect">
-            <a:avLst/>
-          </a:prstGeom>
-          <a:noFill/>
-          <a:ln/>
-        </p:spPr>
-        <p:txBody>
-          <a:bodyPr wrap="square" lIns="0" tIns="0" rIns="0" bIns="0" rtlCol="0" anchor="ctr"/>
-          <a:lstStyle/>
-          <a:p>
-            <a:pPr marL="0" indent="0" algn="ctr">
-              <a:buNone/>
-            </a:pPr>
-            <a:r>
-              <a:rPr lang="en-US" sz="3800" dirty="0">
-                <a:solidFill>
-                  <a:srgbClr val="2563EB"/>
-                </a:solidFill>
-                <a:latin typeface="Segoe UI Black" pitchFamily="34" charset="0"/>
-                <a:ea typeface="Segoe UI Black" pitchFamily="34" charset="-122"/>
-                <a:cs typeface="Segoe UI Black" pitchFamily="34" charset="-120"/>
-              </a:rPr>
-              <a:t>599</a:t>
-            </a:r>
-            <a:endParaRPr lang="en-US" sz="3800" dirty="0"/>
-          </a:p>
-        </p:txBody>
-      </p:sp>
-      <p:sp>
-        <p:nvSpPr>
-          <p:cNvPr id="8" name="mrf_sayiEtiket"/>
-          <p:cNvSpPr txBox="1"/>
-          <p:nvPr/>
-        </p:nvSpPr>
-        <p:spPr>
-          <a:xfrm>
-            <a:off x="749808" y="4169664"/>
-            <a:ext cx="2672334" cy="329184"/>
-          </a:xfrm>
-          <a:prstGeom prst="rect">
-            <a:avLst/>
-          </a:prstGeom>
-          <a:noFill/>
-          <a:ln/>
-        </p:spPr>
-        <p:txBody>
-          <a:bodyPr wrap="square" lIns="0" tIns="0" rIns="0" bIns="0" rtlCol="0" anchor="ctr"/>
-          <a:lstStyle/>
-          <a:p>
-            <a:pPr marL="0" indent="0" algn="ctr">
-              <a:buNone/>
-            </a:pPr>
-            <a:r>
-              <a:rPr lang="en-US" sz="1250" dirty="0">
-                <a:solidFill>
-                  <a:srgbClr val="525252"/>
-                </a:solidFill>
-                <a:latin typeface="Segoe UI" pitchFamily="34" charset="0"/>
-                <a:ea typeface="Segoe UI" pitchFamily="34" charset="-122"/>
-                <a:cs typeface="Segoe UI" pitchFamily="34" charset="-120"/>
-              </a:rPr>
-              <a:t>kampanya</a:t>
-            </a:r>
-            <a:endParaRPr lang="en-US" sz="1250" dirty="0"/>
-          </a:p>
-        </p:txBody>
-      </p:sp>
-      <p:sp>
-        <p:nvSpPr>
-          <p:cNvPr id="9" name="mrf_kunyeSayi1"/>
-          <p:cNvSpPr txBox="1"/>
-          <p:nvPr/>
-        </p:nvSpPr>
-        <p:spPr>
-          <a:xfrm>
-            <a:off x="3422142" y="3602736"/>
-            <a:ext cx="2672334" cy="585216"/>
-          </a:xfrm>
-          <a:prstGeom prst="rect">
-            <a:avLst/>
-          </a:prstGeom>
-          <a:noFill/>
-          <a:ln/>
-        </p:spPr>
-        <p:txBody>
-          <a:bodyPr wrap="square" lIns="0" tIns="0" rIns="0" bIns="0" rtlCol="0" anchor="ctr"/>
-          <a:lstStyle/>
-          <a:p>
-            <a:pPr marL="0" indent="0" algn="ctr">
-              <a:buNone/>
-            </a:pPr>
-            <a:r>
-              <a:rPr lang="en-US" sz="3800" dirty="0">
-                <a:solidFill>
-                  <a:srgbClr val="2563EB"/>
-                </a:solidFill>
-                <a:latin typeface="Segoe UI Black" pitchFamily="34" charset="0"/>
-                <a:ea typeface="Segoe UI Black" pitchFamily="34" charset="-122"/>
-                <a:cs typeface="Segoe UI Black" pitchFamily="34" charset="-120"/>
-              </a:rPr>
-              <a:t>%99,3</a:t>
-            </a:r>
-            <a:endParaRPr lang="en-US" sz="3800" dirty="0"/>
-          </a:p>
-        </p:txBody>
-      </p:sp>
-      <p:sp>
-        <p:nvSpPr>
-          <p:cNvPr id="10" name="Text 8"/>
-          <p:cNvSpPr txBox="1"/>
-          <p:nvPr/>
-        </p:nvSpPr>
-        <p:spPr>
-          <a:xfrm>
-            <a:off x="3422142" y="4169664"/>
-            <a:ext cx="2672334" cy="329184"/>
-          </a:xfrm>
-          <a:prstGeom prst="rect">
-            <a:avLst/>
-          </a:prstGeom>
-          <a:noFill/>
-          <a:ln/>
-        </p:spPr>
-        <p:txBody>
-          <a:bodyPr wrap="square" lIns="0" tIns="0" rIns="0" bIns="0" rtlCol="0" anchor="ctr"/>
-          <a:lstStyle/>
-          <a:p>
-            <a:pPr marL="0" indent="0" algn="ctr">
-              <a:buNone/>
-            </a:pPr>
-            <a:r>
-              <a:rPr lang="en-US" sz="1250" dirty="0">
-                <a:solidFill>
-                  <a:srgbClr val="525252"/>
-                </a:solidFill>
-                <a:latin typeface="Segoe UI" pitchFamily="34" charset="0"/>
-                <a:ea typeface="Segoe UI" pitchFamily="34" charset="-122"/>
-                <a:cs typeface="Segoe UI" pitchFamily="34" charset="-120"/>
-              </a:rPr>
-              <a:t>kesinlik</a:t>
-            </a:r>
-            <a:endParaRPr lang="en-US" sz="1250" dirty="0"/>
-          </a:p>
-        </p:txBody>
-      </p:sp>
-      <p:sp>
-        <p:nvSpPr>
-          <p:cNvPr id="11" name="mrf_kunyeSayi2"/>
-          <p:cNvSpPr txBox="1"/>
-          <p:nvPr/>
-        </p:nvSpPr>
-        <p:spPr>
-          <a:xfrm>
-            <a:off x="6094476" y="3602736"/>
-            <a:ext cx="2672334" cy="585216"/>
-          </a:xfrm>
-          <a:prstGeom prst="rect">
-            <a:avLst/>
-          </a:prstGeom>
-          <a:noFill/>
-          <a:ln/>
-        </p:spPr>
-        <p:txBody>
-          <a:bodyPr wrap="square" lIns="0" tIns="0" rIns="0" bIns="0" rtlCol="0" anchor="ctr"/>
-          <a:lstStyle/>
-          <a:p>
-            <a:pPr marL="0" indent="0" algn="ctr">
-              <a:buNone/>
-            </a:pPr>
-            <a:r>
-              <a:rPr lang="en-US" sz="3800" dirty="0">
-                <a:solidFill>
-                  <a:srgbClr val="2563EB"/>
-                </a:solidFill>
-                <a:latin typeface="Segoe UI Black" pitchFamily="34" charset="0"/>
-                <a:ea typeface="Segoe UI Black" pitchFamily="34" charset="-122"/>
-                <a:cs typeface="Segoe UI Black" pitchFamily="34" charset="-120"/>
-              </a:rPr>
-              <a:t>0,2 sn</a:t>
-            </a:r>
-            <a:endParaRPr lang="en-US" sz="3800" dirty="0"/>
-          </a:p>
-        </p:txBody>
-      </p:sp>
-      <p:sp>
-        <p:nvSpPr>
-          <p:cNvPr id="12" name="Text 10"/>
-          <p:cNvSpPr txBox="1"/>
-          <p:nvPr/>
-        </p:nvSpPr>
-        <p:spPr>
-          <a:xfrm>
-            <a:off x="6094476" y="4169664"/>
-            <a:ext cx="2672334" cy="329184"/>
-          </a:xfrm>
-          <a:prstGeom prst="rect">
-            <a:avLst/>
-          </a:prstGeom>
-          <a:noFill/>
-          <a:ln/>
-        </p:spPr>
-        <p:txBody>
-          <a:bodyPr wrap="square" lIns="0" tIns="0" rIns="0" bIns="0" rtlCol="0" anchor="ctr"/>
-          <a:lstStyle/>
-          <a:p>
-            <a:pPr marL="0" indent="0" algn="ctr">
-              <a:buNone/>
-            </a:pPr>
-            <a:r>
-              <a:rPr lang="en-US" sz="1250" dirty="0">
-                <a:solidFill>
-                  <a:srgbClr val="525252"/>
-                </a:solidFill>
-                <a:latin typeface="Segoe UI" pitchFamily="34" charset="0"/>
-                <a:ea typeface="Segoe UI" pitchFamily="34" charset="-122"/>
-                <a:cs typeface="Segoe UI" pitchFamily="34" charset="-120"/>
-              </a:rPr>
-              <a:t>ilk yanıt</a:t>
-            </a:r>
-            <a:endParaRPr lang="en-US" sz="1250" dirty="0"/>
-          </a:p>
-        </p:txBody>
-      </p:sp>
-      <p:sp>
-        <p:nvSpPr>
-          <p:cNvPr id="13" name="mrf_kunyeSayi3"/>
-          <p:cNvSpPr txBox="1"/>
-          <p:nvPr/>
-        </p:nvSpPr>
-        <p:spPr>
-          <a:xfrm>
-            <a:off x="8766810" y="3602736"/>
-            <a:ext cx="2672334" cy="585216"/>
-          </a:xfrm>
-          <a:prstGeom prst="rect">
-            <a:avLst/>
-          </a:prstGeom>
-          <a:noFill/>
-          <a:ln/>
-        </p:spPr>
-        <p:txBody>
-          <a:bodyPr wrap="square" lIns="0" tIns="0" rIns="0" bIns="0" rtlCol="0" anchor="ctr"/>
-          <a:lstStyle/>
-          <a:p>
-            <a:pPr marL="0" indent="0" algn="ctr">
-              <a:buNone/>
-            </a:pPr>
-            <a:r>
-              <a:rPr lang="en-US" sz="3800" dirty="0">
-                <a:solidFill>
-                  <a:srgbClr val="2563EB"/>
-                </a:solidFill>
-                <a:latin typeface="Segoe UI Black" pitchFamily="34" charset="0"/>
-                <a:ea typeface="Segoe UI Black" pitchFamily="34" charset="-122"/>
-                <a:cs typeface="Segoe UI Black" pitchFamily="34" charset="-120"/>
-              </a:rPr>
-              <a:t>0</a:t>
-            </a:r>
-            <a:endParaRPr lang="en-US" sz="3800" dirty="0"/>
-          </a:p>
-        </p:txBody>
-      </p:sp>
-      <p:sp>
-        <p:nvSpPr>
-          <p:cNvPr id="14" name="Text 12"/>
-          <p:cNvSpPr txBox="1"/>
-          <p:nvPr/>
-        </p:nvSpPr>
-        <p:spPr>
-          <a:xfrm>
-            <a:off x="8766810" y="4169664"/>
-            <a:ext cx="2672334" cy="329184"/>
-          </a:xfrm>
-          <a:prstGeom prst="rect">
-            <a:avLst/>
-          </a:prstGeom>
-          <a:noFill/>
-          <a:ln/>
-        </p:spPr>
-        <p:txBody>
-          <a:bodyPr wrap="square" lIns="0" tIns="0" rIns="0" bIns="0" rtlCol="0" anchor="ctr"/>
-          <a:lstStyle/>
-          <a:p>
-            <a:pPr marL="0" indent="0" algn="ctr">
-              <a:buNone/>
-            </a:pPr>
-            <a:r>
-              <a:rPr lang="en-US" sz="1250" dirty="0">
-                <a:solidFill>
-                  <a:srgbClr val="525252"/>
-                </a:solidFill>
-                <a:latin typeface="Segoe UI" pitchFamily="34" charset="0"/>
-                <a:ea typeface="Segoe UI" pitchFamily="34" charset="-122"/>
-                <a:cs typeface="Segoe UI" pitchFamily="34" charset="-120"/>
-              </a:rPr>
-              <a:t>dış çağrı</a:t>
-            </a:r>
-            <a:endParaRPr lang="en-US" sz="1250" dirty="0"/>
-          </a:p>
-        </p:txBody>
-      </p:sp>
-      <p:sp>
-        <p:nvSpPr>
-          <p:cNvPr id="15" name="mrf_urunadi"/>
-          <p:cNvSpPr txBox="1"/>
-          <p:nvPr/>
-        </p:nvSpPr>
-        <p:spPr>
-          <a:xfrm>
-            <a:off x="749808" y="5010912"/>
-            <a:ext cx="10689336" cy="420624"/>
-          </a:xfrm>
-          <a:prstGeom prst="rect">
-            <a:avLst/>
-          </a:prstGeom>
-          <a:noFill/>
-          <a:ln/>
-        </p:spPr>
-        <p:txBody>
-          <a:bodyPr wrap="square" lIns="0" tIns="0" rIns="0" bIns="0" rtlCol="0" anchor="ctr"/>
-          <a:lstStyle/>
-          <a:p>
-            <a:pPr marL="0" indent="0" algn="ctr">
-              <a:buNone/>
-            </a:pPr>
-            <a:r>
-              <a:rPr lang="en-US" sz="2000" dirty="0">
-                <a:solidFill>
-                  <a:srgbClr val="0F172A"/>
-                </a:solidFill>
-                <a:latin typeface="Segoe UI Semibold" pitchFamily="34" charset="0"/>
-                <a:ea typeface="Segoe UI Semibold" pitchFamily="34" charset="-122"/>
-                <a:cs typeface="Segoe UI Semibold" pitchFamily="34" charset="-120"/>
-              </a:rPr>
-              <a:t>SmartData BiQuery</a:t>
-            </a:r>
-            <a:endParaRPr lang="en-US" sz="2000" dirty="0"/>
-          </a:p>
-        </p:txBody>
-      </p:sp>
-      <p:sp>
-        <p:nvSpPr>
-          <p:cNvPr id="16" name="Text 14"/>
-          <p:cNvSpPr txBox="1"/>
-          <p:nvPr/>
-        </p:nvSpPr>
-        <p:spPr>
-          <a:xfrm>
-            <a:off x="749808" y="5431536"/>
-            <a:ext cx="10689336" cy="347472"/>
-          </a:xfrm>
-          <a:prstGeom prst="rect">
-            <a:avLst/>
-          </a:prstGeom>
-          <a:noFill/>
-          <a:ln/>
-        </p:spPr>
-        <p:txBody>
-          <a:bodyPr wrap="square" lIns="0" tIns="0" rIns="0" bIns="0" rtlCol="0" anchor="ctr"/>
-          <a:lstStyle/>
-          <a:p>
-            <a:pPr marL="0" indent="0" algn="ctr">
-              <a:buNone/>
-            </a:pPr>
-            <a:r>
-              <a:rPr lang="en-US" sz="1150" dirty="0">
-                <a:solidFill>
-                  <a:srgbClr val="64748B"/>
-                </a:solidFill>
-                <a:latin typeface="Segoe UI" pitchFamily="34" charset="0"/>
-                <a:ea typeface="Segoe UI" pitchFamily="34" charset="-122"/>
-                <a:cs typeface="Segoe UI" pitchFamily="34" charset="-120"/>
-              </a:rPr>
-              <a:t>Sıradaki: finansman kapsamını 10 bankaya çıkarmak · sezonsal kampanya açığı analizi</a:t>
-            </a:r>
-            <a:endParaRPr lang="en-US" sz="1150" dirty="0"/>
-          </a:p>
-        </p:txBody>
-      </p:sp>
-    </p:spTree>
-    <p:extLst>
-      <p:ext uri="{BB962C8B-B14F-4D97-AF65-F5344CB8AC3E}">
-        <p14:creationId xmlns:p14="http://schemas.microsoft.com/office/powerpoint/2010/main" val="1666296241"/>
-      </p:ext>
-    </p:extLst>
-  </p:cSld>
-  <p:clrMapOvr>
-    <a:masterClrMapping/>
-  </p:clrMapOvr>
-  <mc:AlternateContent xmlns:mc="http://schemas.openxmlformats.org/markup-compatibility/2006">
-    <mc:Choice xmlns:p14="http://schemas.microsoft.com/office/powerpoint/2010/main" Requires="p14">
-      <p:transition spd="slow" p14:dur="1500"/>
-    </mc:Choice>
-    <mc:Fallback>
-      <p:transition spd="slow"/>
-    </mc:Fallback>
-  </mc:AlternateContent>
+  <p:timing>
+    <p:tnLst>
+      <p:par>
+        <p:cTn id="1" dur="indefinite" restart="never" nodeType="tmRoot"/>
+      </p:par>
+    </p:tnLst>
+  </p:timing>
 </p:sld>
 </file>
 
@@ -13062,13 +15143,13 @@
   <p:clrMapOvr>
     <a:masterClrMapping/>
   </p:clrMapOvr>
-  <mc:AlternateContent xmlns:mc="http://schemas.openxmlformats.org/markup-compatibility/2006" xmlns:p159="http://schemas.microsoft.com/office/powerpoint/2015/09/main">
-    <mc:Choice Requires="p159">
+  <mc:AlternateContent xmlns:mc="http://schemas.openxmlformats.org/markup-compatibility/2006">
+    <mc:Choice xmlns:p159="http://schemas.microsoft.com/office/powerpoint/2015/09/main" xmlns="" Requires="p159">
       <p:transition xmlns:p14="http://schemas.microsoft.com/office/powerpoint/2010/main" spd="slow" p14:dur="1300">
         <p159:morph option="byObject"/>
       </p:transition>
     </mc:Choice>
-    <mc:Fallback xmlns="">
+    <mc:Fallback>
       <p:transition spd="med">
         <p:fade/>
       </p:transition>
@@ -13370,13 +15451,13 @@
   <p:clrMapOvr>
     <a:masterClrMapping/>
   </p:clrMapOvr>
-  <mc:AlternateContent xmlns:mc="http://schemas.openxmlformats.org/markup-compatibility/2006" xmlns:p159="http://schemas.microsoft.com/office/powerpoint/2015/09/main">
-    <mc:Choice Requires="p159">
+  <mc:AlternateContent xmlns:mc="http://schemas.openxmlformats.org/markup-compatibility/2006">
+    <mc:Choice xmlns:p159="http://schemas.microsoft.com/office/powerpoint/2015/09/main" xmlns="" Requires="p159">
       <p:transition xmlns:p14="http://schemas.microsoft.com/office/powerpoint/2010/main" spd="slow" p14:dur="1100">
         <p159:morph option="byObject"/>
       </p:transition>
     </mc:Choice>
-    <mc:Fallback xmlns="">
+    <mc:Fallback>
       <p:transition spd="med">
         <p:fade/>
       </p:transition>
@@ -13854,13 +15935,13 @@
   <p:clrMapOvr>
     <a:masterClrMapping/>
   </p:clrMapOvr>
-  <mc:AlternateContent xmlns:mc="http://schemas.openxmlformats.org/markup-compatibility/2006" xmlns:p159="http://schemas.microsoft.com/office/powerpoint/2015/09/main">
-    <mc:Choice Requires="p159">
+  <mc:AlternateContent xmlns:mc="http://schemas.openxmlformats.org/markup-compatibility/2006">
+    <mc:Choice xmlns:p159="http://schemas.microsoft.com/office/powerpoint/2015/09/main" xmlns="" Requires="p159">
       <p:transition xmlns:p14="http://schemas.microsoft.com/office/powerpoint/2010/main" spd="slow" p14:dur="1300">
         <p159:morph option="byObject"/>
       </p:transition>
     </mc:Choice>
-    <mc:Fallback xmlns="">
+    <mc:Fallback>
       <p:transition spd="med">
         <p:fade/>
       </p:transition>
@@ -14084,18 +16165,25 @@
   <p:clrMapOvr>
     <a:masterClrMapping/>
   </p:clrMapOvr>
-  <mc:AlternateContent xmlns:mc="http://schemas.openxmlformats.org/markup-compatibility/2006" xmlns:p159="http://schemas.microsoft.com/office/powerpoint/2015/09/main">
-    <mc:Choice Requires="p159">
+  <mc:AlternateContent xmlns:mc="http://schemas.openxmlformats.org/markup-compatibility/2006">
+    <mc:Choice xmlns:p159="http://schemas.microsoft.com/office/powerpoint/2015/09/main" xmlns="" Requires="p159">
       <p:transition xmlns:p14="http://schemas.microsoft.com/office/powerpoint/2010/main" spd="slow" p14:dur="1100">
         <p159:morph option="byObject"/>
       </p:transition>
     </mc:Choice>
-    <mc:Fallback xmlns="">
+    <mc:Fallback>
       <p:transition spd="med">
         <p:fade/>
       </p:transition>
     </mc:Fallback>
   </mc:AlternateContent>
+  <p:timing>
+    <p:tnLst>
+      <p:par>
+        <p:cTn id="1" dur="indefinite" restart="never" nodeType="tmRoot"/>
+      </p:par>
+    </p:tnLst>
+  </p:timing>
 </p:sld>
 </file>
 
@@ -14132,6 +16220,33 @@
       </p:grpSpPr>
       <p:sp>
         <p:nvSpPr>
+          <p:cNvPr id="13" name="mrf_dugum1"/>
+          <p:cNvSpPr/>
+          <p:nvPr/>
+        </p:nvSpPr>
+        <p:spPr>
+          <a:xfrm>
+            <a:off x="759387" y="1883664"/>
+            <a:ext cx="2542032" cy="1426464"/>
+          </a:xfrm>
+          <a:prstGeom prst="roundRect">
+            <a:avLst>
+              <a:gd name="adj" fmla="val 5128"/>
+            </a:avLst>
+          </a:prstGeom>
+          <a:solidFill>
+            <a:srgbClr val="EFF6FF"/>
+          </a:solidFill>
+          <a:ln w="12700">
+            <a:solidFill>
+              <a:srgbClr val="2563EB"/>
+            </a:solidFill>
+            <a:prstDash val="solid"/>
+          </a:ln>
+        </p:spPr>
+      </p:sp>
+      <p:sp>
+        <p:nvSpPr>
           <p:cNvPr id="2" name="mrf_bolumNo"/>
           <p:cNvSpPr txBox="1"/>
           <p:nvPr/>
@@ -14356,7 +16471,7 @@
         </p:nvSpPr>
         <p:spPr>
           <a:xfrm>
-            <a:off x="749808" y="1883664"/>
+            <a:off x="3674146" y="1911096"/>
             <a:ext cx="2542032" cy="1426464"/>
           </a:xfrm>
           <a:prstGeom prst="roundRect">
@@ -14494,33 +16609,6 @@
       </p:sp>
       <p:sp>
         <p:nvSpPr>
-          <p:cNvPr id="13" name="mrf_dugum1"/>
-          <p:cNvSpPr/>
-          <p:nvPr/>
-        </p:nvSpPr>
-        <p:spPr>
-          <a:xfrm>
-            <a:off x="3675888" y="1883664"/>
-            <a:ext cx="2542032" cy="1426464"/>
-          </a:xfrm>
-          <a:prstGeom prst="roundRect">
-            <a:avLst>
-              <a:gd name="adj" fmla="val 5128"/>
-            </a:avLst>
-          </a:prstGeom>
-          <a:solidFill>
-            <a:srgbClr val="EFF6FF"/>
-          </a:solidFill>
-          <a:ln w="12700">
-            <a:solidFill>
-              <a:srgbClr val="2563EB"/>
-            </a:solidFill>
-            <a:prstDash val="solid"/>
-          </a:ln>
-        </p:spPr>
-      </p:sp>
-      <p:sp>
-        <p:nvSpPr>
           <p:cNvPr id="14" name="mrf_dugumAd1"/>
           <p:cNvSpPr txBox="1"/>
           <p:nvPr/>
@@ -14894,7 +16982,7 @@
         <p:spPr>
           <a:xfrm>
             <a:off x="749808" y="3657600"/>
-            <a:ext cx="5504688" cy="1097280"/>
+            <a:ext cx="5504688" cy="2414016"/>
           </a:xfrm>
           <a:prstGeom prst="roundRect">
             <a:avLst>
@@ -14914,79 +17002,78 @@
       </p:sp>
       <p:sp>
         <p:nvSpPr>
-          <p:cNvPr id="25" name="Text 22"/>
-          <p:cNvSpPr txBox="1"/>
-          <p:nvPr/>
-        </p:nvSpPr>
-        <p:spPr>
-          <a:xfrm>
-            <a:off x="969264" y="3803904"/>
-            <a:ext cx="2377440" cy="402336"/>
-          </a:xfrm>
-          <a:prstGeom prst="rect">
-            <a:avLst/>
-          </a:prstGeom>
-          <a:noFill/>
-          <a:ln/>
-        </p:spPr>
-        <p:txBody>
-          <a:bodyPr wrap="square" lIns="0" tIns="0" rIns="0" bIns="0" rtlCol="0" anchor="ctr"/>
-          <a:lstStyle/>
-          <a:p>
-            <a:pPr marL="0" indent="0" algn="l">
-              <a:buNone/>
-            </a:pPr>
-            <a:r>
-              <a:rPr lang="en-US" sz="1500" b="1" dirty="0">
-                <a:solidFill>
-                  <a:srgbClr val="2563EB"/>
-                </a:solidFill>
-                <a:latin typeface="Consolas" pitchFamily="34" charset="0"/>
-                <a:ea typeface="Consolas" pitchFamily="34" charset="-122"/>
-                <a:cs typeface="Consolas" pitchFamily="34" charset="-120"/>
-              </a:rPr>
-              <a:t>FINAGENT_LLM=0</a:t>
-            </a:r>
-            <a:endParaRPr lang="en-US" sz="1500" dirty="0"/>
-          </a:p>
-        </p:txBody>
-      </p:sp>
-      <p:sp>
-        <p:nvSpPr>
           <p:cNvPr id="26" name="Text 23"/>
           <p:cNvSpPr txBox="1"/>
           <p:nvPr/>
         </p:nvSpPr>
         <p:spPr>
           <a:xfrm>
-            <a:off x="969264" y="4187952"/>
-            <a:ext cx="5029200" cy="402336"/>
-          </a:xfrm>
-          <a:prstGeom prst="rect">
-            <a:avLst/>
-          </a:prstGeom>
-          <a:noFill/>
-          <a:ln/>
-        </p:spPr>
-        <p:txBody>
-          <a:bodyPr wrap="square" lIns="0" tIns="0" rIns="0" bIns="0" rtlCol="0" anchor="ctr"/>
-          <a:lstStyle/>
-          <a:p>
-            <a:pPr marL="0" indent="0" algn="l">
-              <a:buNone/>
-            </a:pPr>
-            <a:r>
-              <a:rPr lang="en-US" sz="1250" dirty="0">
-                <a:solidFill>
-                  <a:srgbClr val="171717"/>
-                </a:solidFill>
-                <a:latin typeface="Segoe UI" pitchFamily="34" charset="0"/>
-                <a:ea typeface="Segoe UI" pitchFamily="34" charset="-122"/>
-                <a:cs typeface="Segoe UI" pitchFamily="34" charset="-120"/>
-              </a:rPr>
-              <a:t>LLM tamamen kapalı — sistem çalışmaya devam ediyor</a:t>
-            </a:r>
-            <a:endParaRPr lang="en-US" sz="1250" dirty="0"/>
+            <a:off x="987552" y="3465576"/>
+            <a:ext cx="5029200" cy="2855541"/>
+          </a:xfrm>
+          <a:prstGeom prst="rect">
+            <a:avLst/>
+          </a:prstGeom>
+          <a:noFill/>
+          <a:ln/>
+        </p:spPr>
+        <p:txBody>
+          <a:bodyPr wrap="square" lIns="0" tIns="0" rIns="0" bIns="0" rtlCol="0" anchor="ctr"/>
+          <a:lstStyle/>
+          <a:p>
+            <a:r>
+              <a:rPr lang="tr-TR" sz="1200" b="1" dirty="0"/>
+              <a:t>Kampanya dönemi içerisinde Avantajlı Hesap açan bireysel müşteriler, Hayat FX üzerinden gerçekleştirecekleri işlemlerde 5.000 USD veya karşılığı işlem hacmine kadar %0,1 dar makastan yararlanabilir.</a:t>
+            </a:r>
+          </a:p>
+          <a:p>
+            <a:r>
+              <a:rPr lang="tr-TR" sz="1200" dirty="0"/>
+              <a:t/>
+            </a:r>
+            <a:br>
+              <a:rPr lang="tr-TR" sz="1200" dirty="0"/>
+            </a:br>
+            <a:r>
+              <a:rPr lang="tr-TR" sz="1200" b="1" dirty="0"/>
+              <a:t>📢 Kampanya Dönemi:</a:t>
+            </a:r>
+            <a:r>
+              <a:rPr lang="tr-TR" sz="1200" dirty="0"/>
+              <a:t> 17 Temmuz - 17 Eylül 2026</a:t>
+            </a:r>
+            <a:br>
+              <a:rPr lang="tr-TR" sz="1200" dirty="0"/>
+            </a:br>
+            <a:r>
+              <a:rPr lang="tr-TR" sz="1200" dirty="0"/>
+              <a:t/>
+            </a:r>
+            <a:br>
+              <a:rPr lang="tr-TR" sz="1200" dirty="0"/>
+            </a:br>
+            <a:r>
+              <a:rPr lang="tr-TR" sz="1200" b="1" dirty="0"/>
+              <a:t>✅ Kampanya Koşulları</a:t>
+            </a:r>
+            <a:r>
+              <a:rPr lang="tr-TR" sz="1200" dirty="0"/>
+              <a:t>Kampanyadan sadece 17 Temmuz 2026 sonrası yeni açılacak/açılan Avantajlı Hesap sahipleri faydalanabilir.</a:t>
+            </a:r>
+          </a:p>
+          <a:p>
+            <a:r>
+              <a:rPr lang="tr-TR" sz="1200" dirty="0"/>
+              <a:t>Kampanyaya sadece </a:t>
+            </a:r>
+            <a:r>
+              <a:rPr lang="tr-TR" sz="1200" b="1" dirty="0"/>
+              <a:t>Hayat Avantajlı Katılma Hesabı</a:t>
+            </a:r>
+            <a:r>
+              <a:rPr lang="tr-TR" sz="1200" dirty="0"/>
+              <a:t> dahil olup, TL Katılma Hesabı ve TL Günlük Hesap açılışları kampanyaya dahil değildir.</a:t>
+            </a:r>
           </a:p>
         </p:txBody>
       </p:sp>
@@ -15139,24 +17226,31 @@
   <p:clrMapOvr>
     <a:masterClrMapping/>
   </p:clrMapOvr>
-  <mc:AlternateContent xmlns:mc="http://schemas.openxmlformats.org/markup-compatibility/2006" xmlns:p159="http://schemas.microsoft.com/office/powerpoint/2015/09/main">
-    <mc:Choice Requires="p159">
+  <mc:AlternateContent xmlns:mc="http://schemas.openxmlformats.org/markup-compatibility/2006">
+    <mc:Choice xmlns:p159="http://schemas.microsoft.com/office/powerpoint/2015/09/main" xmlns="" Requires="p159">
       <p:transition xmlns:p14="http://schemas.microsoft.com/office/powerpoint/2010/main" spd="slow" p14:dur="1300">
         <p159:morph option="byObject"/>
       </p:transition>
     </mc:Choice>
-    <mc:Fallback xmlns="">
+    <mc:Fallback>
       <p:transition spd="med">
         <p:fade/>
       </p:transition>
     </mc:Fallback>
   </mc:AlternateContent>
+  <p:timing>
+    <p:tnLst>
+      <p:par>
+        <p:cTn id="1" dur="indefinite" restart="never" nodeType="tmRoot"/>
+      </p:par>
+    </p:tnLst>
+  </p:timing>
 </p:sld>
 </file>
 
 <file path=ppt/slides/slide8.xml><?xml version="1.0" encoding="utf-8"?>
 <p:sld xmlns:a="http://schemas.openxmlformats.org/drawingml/2006/main" xmlns:r="http://schemas.openxmlformats.org/officeDocument/2006/relationships" xmlns:p="http://schemas.openxmlformats.org/presentationml/2006/main">
-  <p:cSld name="Slide 8">
+  <p:cSld>
     <p:bg>
       <p:bgPr>
         <a:blipFill dpi="0" rotWithShape="1">
@@ -15187,7 +17281,72 @@
       </p:grpSpPr>
       <p:sp>
         <p:nvSpPr>
-          <p:cNvPr id="2" name="mrf_marka0"/>
+          <p:cNvPr id="2" name="mrf_bolumNo"/>
+          <p:cNvSpPr txBox="1"/>
+          <p:nvPr/>
+        </p:nvSpPr>
+        <p:spPr>
+          <a:xfrm>
+            <a:off x="8695944" y="384048"/>
+            <a:ext cx="2743200" cy="274320"/>
+          </a:xfrm>
+          <a:prstGeom prst="rect">
+            <a:avLst/>
+          </a:prstGeom>
+          <a:noFill/>
+          <a:ln/>
+        </p:spPr>
+        <p:txBody>
+          <a:bodyPr wrap="square" lIns="0" tIns="0" rIns="0" bIns="0" rtlCol="0" anchor="ctr"/>
+          <a:lstStyle/>
+          <a:p>
+            <a:pPr marL="0" indent="0" algn="r">
+              <a:buNone/>
+            </a:pPr>
+            <a:r>
+              <a:rPr lang="en-US" sz="1050" kern="0" spc="240" dirty="0">
+                <a:solidFill>
+                  <a:srgbClr val="A3A3A3"/>
+                </a:solidFill>
+                <a:latin typeface="Segoe UI Semibold" pitchFamily="34" charset="0"/>
+                <a:ea typeface="Segoe UI Semibold" pitchFamily="34" charset="-122"/>
+                <a:cs typeface="Segoe UI Semibold" pitchFamily="34" charset="-120"/>
+              </a:rPr>
+              <a:t>03 · MİMARİ</a:t>
+            </a:r>
+            <a:endParaRPr lang="en-US" sz="1050" dirty="0"/>
+          </a:p>
+        </p:txBody>
+      </p:sp>
+      <p:pic>
+        <p:nvPicPr>
+          <p:cNvPr id="3" name="mrf_logo" descr="logo.png"/>
+          <p:cNvPicPr>
+            <a:picLocks noChangeAspect="1"/>
+          </p:cNvPicPr>
+          <p:nvPr/>
+        </p:nvPicPr>
+        <p:blipFill>
+          <a:blip r:embed="rId4">
+            <a:alphaModFix amt="88000"/>
+          </a:blip>
+          <a:stretch>
+            <a:fillRect/>
+          </a:stretch>
+        </p:blipFill>
+        <p:spPr>
+          <a:xfrm>
+            <a:off x="9957816" y="6144768"/>
+            <a:ext cx="1481328" cy="457200"/>
+          </a:xfrm>
+          <a:prstGeom prst="rect">
+            <a:avLst/>
+          </a:prstGeom>
+        </p:spPr>
+      </p:pic>
+      <p:sp>
+        <p:nvSpPr>
+          <p:cNvPr id="4" name="mrf_marka0"/>
           <p:cNvSpPr/>
           <p:nvPr/>
         </p:nvSpPr>
@@ -15212,7 +17371,7 @@
       </p:sp>
       <p:sp>
         <p:nvSpPr>
-          <p:cNvPr id="3" name="mrf_marka1"/>
+          <p:cNvPr id="5" name="mrf_marka1"/>
           <p:cNvSpPr/>
           <p:nvPr/>
         </p:nvSpPr>
@@ -15237,7 +17396,7 @@
       </p:sp>
       <p:sp>
         <p:nvSpPr>
-          <p:cNvPr id="4" name="mrf_marka2"/>
+          <p:cNvPr id="6" name="mrf_marka2"/>
           <p:cNvSpPr/>
           <p:nvPr/>
         </p:nvSpPr>
@@ -15262,30 +17421,30 @@
       </p:sp>
       <p:sp>
         <p:nvSpPr>
-          <p:cNvPr id="5" name="mrf_bolumNo"/>
-          <p:cNvSpPr txBox="1"/>
-          <p:nvPr/>
-        </p:nvSpPr>
-        <p:spPr>
-          <a:xfrm>
-            <a:off x="8695944" y="384048"/>
-            <a:ext cx="2743200" cy="274320"/>
-          </a:xfrm>
-          <a:prstGeom prst="rect">
-            <a:avLst/>
-          </a:prstGeom>
-          <a:noFill/>
-          <a:ln/>
-        </p:spPr>
-        <p:txBody>
-          <a:bodyPr wrap="square" lIns="0" tIns="0" rIns="0" bIns="0" rtlCol="0" anchor="ctr"/>
-          <a:lstStyle/>
-          <a:p>
-            <a:pPr marL="0" indent="0" algn="r">
-              <a:buNone/>
-            </a:pPr>
-            <a:r>
-              <a:rPr lang="en-US" sz="1150" kern="0" spc="240" dirty="0">
+          <p:cNvPr id="7" name="mrf_soruKucuk"/>
+          <p:cNvSpPr txBox="1"/>
+          <p:nvPr/>
+        </p:nvSpPr>
+        <p:spPr>
+          <a:xfrm>
+            <a:off x="1408176" y="384048"/>
+            <a:ext cx="10030968" cy="274320"/>
+          </a:xfrm>
+          <a:prstGeom prst="rect">
+            <a:avLst/>
+          </a:prstGeom>
+          <a:noFill/>
+          <a:ln/>
+        </p:spPr>
+        <p:txBody>
+          <a:bodyPr wrap="square" lIns="0" tIns="0" rIns="0" bIns="0" rtlCol="0" anchor="ctr"/>
+          <a:lstStyle/>
+          <a:p>
+            <a:pPr marL="0" indent="0" algn="l">
+              <a:buNone/>
+            </a:pPr>
+            <a:r>
+              <a:rPr lang="en-US" sz="1350" dirty="0">
                 <a:solidFill>
                   <a:srgbClr val="2563EB"/>
                 </a:solidFill>
@@ -15293,22 +17452,22 @@
                 <a:ea typeface="Segoe UI Semibold" pitchFamily="34" charset="-122"/>
                 <a:cs typeface="Segoe UI Semibold" pitchFamily="34" charset="-120"/>
               </a:rPr>
-              <a:t>04 · KANIT</a:t>
-            </a:r>
-            <a:endParaRPr lang="en-US" sz="1150" dirty="0"/>
-          </a:p>
-        </p:txBody>
-      </p:sp>
-      <p:sp>
-        <p:nvSpPr>
-          <p:cNvPr id="6" name="mrf_soru"/>
-          <p:cNvSpPr txBox="1"/>
-          <p:nvPr/>
-        </p:nvSpPr>
-        <p:spPr>
-          <a:xfrm>
-            <a:off x="749808" y="2286000"/>
-            <a:ext cx="10689336" cy="2011680"/>
+              <a:t>Neden LLM'e tek başına güvenmiyoruz?</a:t>
+            </a:r>
+            <a:endParaRPr lang="en-US" sz="1350" dirty="0"/>
+          </a:p>
+        </p:txBody>
+      </p:sp>
+      <p:sp>
+        <p:nvSpPr>
+          <p:cNvPr id="8" name="mrf_baslik"/>
+          <p:cNvSpPr txBox="1"/>
+          <p:nvPr/>
+        </p:nvSpPr>
+        <p:spPr>
+          <a:xfrm>
+            <a:off x="749808" y="932688"/>
+            <a:ext cx="10689336" cy="658368"/>
           </a:xfrm>
           <a:prstGeom prst="rect">
             <a:avLst/>
@@ -15324,69 +17483,841 @@
               <a:buNone/>
             </a:pPr>
             <a:r>
-              <a:rPr lang="en-US" sz="6000" dirty="0">
-                <a:solidFill>
-                  <a:srgbClr val="0F172A"/>
-                </a:solidFill>
-                <a:latin typeface="Segoe UI Black" pitchFamily="34" charset="0"/>
-                <a:ea typeface="Segoe UI Black" pitchFamily="34" charset="-122"/>
-                <a:cs typeface="Segoe UI Black" pitchFamily="34" charset="-120"/>
-              </a:rPr>
-              <a:t>Neden bu sayıya güvenelim?</a:t>
-            </a:r>
-            <a:endParaRPr lang="en-US" sz="6000" dirty="0"/>
-          </a:p>
-        </p:txBody>
-      </p:sp>
-      <p:pic>
-        <p:nvPicPr>
-          <p:cNvPr id="7" name="mrf_logo" descr="logo.png"/>
-          <p:cNvPicPr>
-            <a:picLocks noChangeAspect="1"/>
-          </p:cNvPicPr>
-          <p:nvPr/>
-        </p:nvPicPr>
-        <p:blipFill>
-          <a:blip r:embed="rId4">
-            <a:alphaModFix amt="88000"/>
-          </a:blip>
-          <a:stretch>
-            <a:fillRect/>
-          </a:stretch>
-        </p:blipFill>
-        <p:spPr>
-          <a:xfrm>
-            <a:off x="9957816" y="6144768"/>
-            <a:ext cx="1481328" cy="457200"/>
-          </a:xfrm>
-          <a:prstGeom prst="rect">
-            <a:avLst/>
-          </a:prstGeom>
-        </p:spPr>
-      </p:pic>
+              <a:rPr lang="en-US" sz="3700" dirty="0">
+                <a:solidFill>
+                  <a:srgbClr val="171717"/>
+                </a:solidFill>
+                <a:latin typeface="Segoe UI Semibold" pitchFamily="34" charset="0"/>
+                <a:ea typeface="Segoe UI Semibold" pitchFamily="34" charset="-122"/>
+                <a:cs typeface="Segoe UI Semibold" pitchFamily="34" charset="-120"/>
+              </a:rPr>
+              <a:t>Önce kural, sonra LLM</a:t>
+            </a:r>
+            <a:endParaRPr lang="en-US" sz="3700" dirty="0"/>
+          </a:p>
+        </p:txBody>
+      </p:sp>
+      <p:sp>
+        <p:nvSpPr>
+          <p:cNvPr id="9" name="mrf_dugum0"/>
+          <p:cNvSpPr/>
+          <p:nvPr/>
+        </p:nvSpPr>
+        <p:spPr>
+          <a:xfrm>
+            <a:off x="749808" y="1883664"/>
+            <a:ext cx="2542032" cy="1426464"/>
+          </a:xfrm>
+          <a:prstGeom prst="roundRect">
+            <a:avLst>
+              <a:gd name="adj" fmla="val 5128"/>
+            </a:avLst>
+          </a:prstGeom>
+          <a:solidFill>
+            <a:srgbClr val="FAFAFA"/>
+          </a:solidFill>
+          <a:ln w="12700">
+            <a:solidFill>
+              <a:srgbClr val="E5E5E5"/>
+            </a:solidFill>
+            <a:prstDash val="solid"/>
+          </a:ln>
+        </p:spPr>
+      </p:sp>
+      <p:sp>
+        <p:nvSpPr>
+          <p:cNvPr id="10" name="mrf_dugumAd0"/>
+          <p:cNvSpPr txBox="1"/>
+          <p:nvPr/>
+        </p:nvSpPr>
+        <p:spPr>
+          <a:xfrm>
+            <a:off x="877824" y="2066544"/>
+            <a:ext cx="2286000" cy="457200"/>
+          </a:xfrm>
+          <a:prstGeom prst="rect">
+            <a:avLst/>
+          </a:prstGeom>
+          <a:noFill/>
+          <a:ln/>
+        </p:spPr>
+        <p:txBody>
+          <a:bodyPr wrap="square" lIns="0" tIns="0" rIns="0" bIns="0" rtlCol="0" anchor="ctr"/>
+          <a:lstStyle/>
+          <a:p>
+            <a:pPr marL="0" indent="0" algn="ctr">
+              <a:buNone/>
+            </a:pPr>
+            <a:r>
+              <a:rPr lang="en-US" sz="1500" b="1" dirty="0">
+                <a:solidFill>
+                  <a:srgbClr val="525252"/>
+                </a:solidFill>
+                <a:latin typeface="Segoe UI" pitchFamily="34" charset="0"/>
+                <a:ea typeface="Segoe UI" pitchFamily="34" charset="-122"/>
+                <a:cs typeface="Segoe UI" pitchFamily="34" charset="-120"/>
+              </a:rPr>
+              <a:t>Ham metin</a:t>
+            </a:r>
+            <a:endParaRPr lang="en-US" sz="1500" dirty="0"/>
+          </a:p>
+        </p:txBody>
+      </p:sp>
+      <p:sp>
+        <p:nvSpPr>
+          <p:cNvPr id="11" name="Text 8"/>
+          <p:cNvSpPr txBox="1"/>
+          <p:nvPr/>
+        </p:nvSpPr>
+        <p:spPr>
+          <a:xfrm>
+            <a:off x="877824" y="2523744"/>
+            <a:ext cx="2286000" cy="566928"/>
+          </a:xfrm>
+          <a:prstGeom prst="rect">
+            <a:avLst/>
+          </a:prstGeom>
+          <a:noFill/>
+          <a:ln/>
+        </p:spPr>
+        <p:txBody>
+          <a:bodyPr wrap="square" lIns="0" tIns="0" rIns="0" bIns="0" rtlCol="0" anchor="t"/>
+          <a:lstStyle/>
+          <a:p>
+            <a:pPr marL="0" indent="0" algn="ctr">
+              <a:buNone/>
+            </a:pPr>
+            <a:r>
+              <a:rPr lang="en-US" sz="1050" dirty="0">
+                <a:solidFill>
+                  <a:srgbClr val="A3A3A3"/>
+                </a:solidFill>
+                <a:latin typeface="Segoe UI" pitchFamily="34" charset="0"/>
+                <a:ea typeface="Segoe UI" pitchFamily="34" charset="-122"/>
+                <a:cs typeface="Segoe UI" pitchFamily="34" charset="-120"/>
+              </a:rPr>
+              <a:t>banka sayfası</a:t>
+            </a:r>
+            <a:endParaRPr lang="en-US" sz="1050" dirty="0"/>
+          </a:p>
+        </p:txBody>
+      </p:sp>
+      <p:sp>
+        <p:nvSpPr>
+          <p:cNvPr id="12" name="Text 9"/>
+          <p:cNvSpPr txBox="1"/>
+          <p:nvPr/>
+        </p:nvSpPr>
+        <p:spPr>
+          <a:xfrm>
+            <a:off x="3291840" y="1883664"/>
+            <a:ext cx="384048" cy="1426464"/>
+          </a:xfrm>
+          <a:prstGeom prst="rect">
+            <a:avLst/>
+          </a:prstGeom>
+          <a:noFill/>
+          <a:ln/>
+        </p:spPr>
+        <p:txBody>
+          <a:bodyPr wrap="square" lIns="0" tIns="0" rIns="0" bIns="0" rtlCol="0" anchor="ctr"/>
+          <a:lstStyle/>
+          <a:p>
+            <a:pPr marL="0" indent="0" algn="ctr">
+              <a:buNone/>
+            </a:pPr>
+            <a:r>
+              <a:rPr lang="en-US" sz="2600" b="1" dirty="0">
+                <a:solidFill>
+                  <a:srgbClr val="E5E5E5"/>
+                </a:solidFill>
+                <a:latin typeface="Segoe UI" pitchFamily="34" charset="0"/>
+                <a:ea typeface="Segoe UI" pitchFamily="34" charset="-122"/>
+                <a:cs typeface="Segoe UI" pitchFamily="34" charset="-120"/>
+              </a:rPr>
+              <a:t>›</a:t>
+            </a:r>
+            <a:endParaRPr lang="en-US" sz="2600" dirty="0"/>
+          </a:p>
+        </p:txBody>
+      </p:sp>
+      <p:sp>
+        <p:nvSpPr>
+          <p:cNvPr id="13" name="mrf_dugum1"/>
+          <p:cNvSpPr/>
+          <p:nvPr/>
+        </p:nvSpPr>
+        <p:spPr>
+          <a:xfrm>
+            <a:off x="3675888" y="1883664"/>
+            <a:ext cx="2542032" cy="1426464"/>
+          </a:xfrm>
+          <a:prstGeom prst="roundRect">
+            <a:avLst>
+              <a:gd name="adj" fmla="val 5128"/>
+            </a:avLst>
+          </a:prstGeom>
+          <a:solidFill>
+            <a:srgbClr val="EFF6FF"/>
+          </a:solidFill>
+          <a:ln w="12700">
+            <a:solidFill>
+              <a:srgbClr val="2563EB"/>
+            </a:solidFill>
+            <a:prstDash val="solid"/>
+          </a:ln>
+        </p:spPr>
+      </p:sp>
+      <p:sp>
+        <p:nvSpPr>
+          <p:cNvPr id="14" name="mrf_dugumAd1"/>
+          <p:cNvSpPr txBox="1"/>
+          <p:nvPr/>
+        </p:nvSpPr>
+        <p:spPr>
+          <a:xfrm>
+            <a:off x="3803904" y="2066544"/>
+            <a:ext cx="2286000" cy="457200"/>
+          </a:xfrm>
+          <a:prstGeom prst="rect">
+            <a:avLst/>
+          </a:prstGeom>
+          <a:noFill/>
+          <a:ln/>
+        </p:spPr>
+        <p:txBody>
+          <a:bodyPr wrap="square" lIns="0" tIns="0" rIns="0" bIns="0" rtlCol="0" anchor="ctr"/>
+          <a:lstStyle/>
+          <a:p>
+            <a:pPr marL="0" indent="0" algn="ctr">
+              <a:buNone/>
+            </a:pPr>
+            <a:r>
+              <a:rPr lang="en-US" sz="1500" b="1" dirty="0">
+                <a:solidFill>
+                  <a:srgbClr val="2563EB"/>
+                </a:solidFill>
+                <a:latin typeface="Segoe UI" pitchFamily="34" charset="0"/>
+                <a:ea typeface="Segoe UI" pitchFamily="34" charset="-122"/>
+                <a:cs typeface="Segoe UI" pitchFamily="34" charset="-120"/>
+              </a:rPr>
+              <a:t>Kural tabanlı</a:t>
+            </a:r>
+            <a:endParaRPr lang="en-US" sz="1500" dirty="0"/>
+          </a:p>
+        </p:txBody>
+      </p:sp>
+      <p:sp>
+        <p:nvSpPr>
+          <p:cNvPr id="15" name="Text 12"/>
+          <p:cNvSpPr txBox="1"/>
+          <p:nvPr/>
+        </p:nvSpPr>
+        <p:spPr>
+          <a:xfrm>
+            <a:off x="3803904" y="2523744"/>
+            <a:ext cx="2286000" cy="566928"/>
+          </a:xfrm>
+          <a:prstGeom prst="rect">
+            <a:avLst/>
+          </a:prstGeom>
+          <a:noFill/>
+          <a:ln/>
+        </p:spPr>
+        <p:txBody>
+          <a:bodyPr wrap="square" lIns="0" tIns="0" rIns="0" bIns="0" rtlCol="0" anchor="t"/>
+          <a:lstStyle/>
+          <a:p>
+            <a:pPr marL="0" indent="0" algn="ctr">
+              <a:buNone/>
+            </a:pPr>
+            <a:r>
+              <a:rPr lang="en-US" sz="1050" dirty="0">
+                <a:solidFill>
+                  <a:srgbClr val="A3A3A3"/>
+                </a:solidFill>
+                <a:latin typeface="Segoe UI" pitchFamily="34" charset="0"/>
+                <a:ea typeface="Segoe UI" pitchFamily="34" charset="-122"/>
+                <a:cs typeface="Segoe UI" pitchFamily="34" charset="-120"/>
+              </a:rPr>
+              <a:t>~2.000 satır · deterministik</a:t>
+            </a:r>
+            <a:endParaRPr lang="en-US" sz="1050" dirty="0"/>
+          </a:p>
+        </p:txBody>
+      </p:sp>
+      <p:sp>
+        <p:nvSpPr>
+          <p:cNvPr id="16" name="Text 13"/>
+          <p:cNvSpPr txBox="1"/>
+          <p:nvPr/>
+        </p:nvSpPr>
+        <p:spPr>
+          <a:xfrm>
+            <a:off x="6217920" y="1883664"/>
+            <a:ext cx="384048" cy="1426464"/>
+          </a:xfrm>
+          <a:prstGeom prst="rect">
+            <a:avLst/>
+          </a:prstGeom>
+          <a:noFill/>
+          <a:ln/>
+        </p:spPr>
+        <p:txBody>
+          <a:bodyPr wrap="square" lIns="0" tIns="0" rIns="0" bIns="0" rtlCol="0" anchor="ctr"/>
+          <a:lstStyle/>
+          <a:p>
+            <a:pPr marL="0" indent="0" algn="ctr">
+              <a:buNone/>
+            </a:pPr>
+            <a:r>
+              <a:rPr lang="en-US" sz="2600" b="1" dirty="0">
+                <a:solidFill>
+                  <a:srgbClr val="E5E5E5"/>
+                </a:solidFill>
+                <a:latin typeface="Segoe UI" pitchFamily="34" charset="0"/>
+                <a:ea typeface="Segoe UI" pitchFamily="34" charset="-122"/>
+                <a:cs typeface="Segoe UI" pitchFamily="34" charset="-120"/>
+              </a:rPr>
+              <a:t>›</a:t>
+            </a:r>
+            <a:endParaRPr lang="en-US" sz="2600" dirty="0"/>
+          </a:p>
+        </p:txBody>
+      </p:sp>
+      <p:sp>
+        <p:nvSpPr>
+          <p:cNvPr id="17" name="mrf_dugum2"/>
+          <p:cNvSpPr/>
+          <p:nvPr/>
+        </p:nvSpPr>
+        <p:spPr>
+          <a:xfrm>
+            <a:off x="6601968" y="1883664"/>
+            <a:ext cx="2542032" cy="1426464"/>
+          </a:xfrm>
+          <a:prstGeom prst="roundRect">
+            <a:avLst>
+              <a:gd name="adj" fmla="val 5128"/>
+            </a:avLst>
+          </a:prstGeom>
+          <a:solidFill>
+            <a:srgbClr val="FAFAFA"/>
+          </a:solidFill>
+          <a:ln w="12700">
+            <a:solidFill>
+              <a:srgbClr val="E5E5E5"/>
+            </a:solidFill>
+            <a:prstDash val="solid"/>
+          </a:ln>
+        </p:spPr>
+      </p:sp>
+      <p:sp>
+        <p:nvSpPr>
+          <p:cNvPr id="18" name="mrf_dugumAd2"/>
+          <p:cNvSpPr txBox="1"/>
+          <p:nvPr/>
+        </p:nvSpPr>
+        <p:spPr>
+          <a:xfrm>
+            <a:off x="6729984" y="2066544"/>
+            <a:ext cx="2286000" cy="457200"/>
+          </a:xfrm>
+          <a:prstGeom prst="rect">
+            <a:avLst/>
+          </a:prstGeom>
+          <a:noFill/>
+          <a:ln/>
+        </p:spPr>
+        <p:txBody>
+          <a:bodyPr wrap="square" lIns="0" tIns="0" rIns="0" bIns="0" rtlCol="0" anchor="ctr"/>
+          <a:lstStyle/>
+          <a:p>
+            <a:pPr marL="0" indent="0" algn="ctr">
+              <a:buNone/>
+            </a:pPr>
+            <a:r>
+              <a:rPr lang="en-US" sz="1500" b="1" dirty="0">
+                <a:solidFill>
+                  <a:srgbClr val="525252"/>
+                </a:solidFill>
+                <a:latin typeface="Segoe UI" pitchFamily="34" charset="0"/>
+                <a:ea typeface="Segoe UI" pitchFamily="34" charset="-122"/>
+                <a:cs typeface="Segoe UI" pitchFamily="34" charset="-120"/>
+              </a:rPr>
+              <a:t>LLM tamamlayıcı</a:t>
+            </a:r>
+            <a:endParaRPr lang="en-US" sz="1500" dirty="0"/>
+          </a:p>
+        </p:txBody>
+      </p:sp>
+      <p:sp>
+        <p:nvSpPr>
+          <p:cNvPr id="19" name="Text 16"/>
+          <p:cNvSpPr txBox="1"/>
+          <p:nvPr/>
+        </p:nvSpPr>
+        <p:spPr>
+          <a:xfrm>
+            <a:off x="6729984" y="2523744"/>
+            <a:ext cx="2286000" cy="566928"/>
+          </a:xfrm>
+          <a:prstGeom prst="rect">
+            <a:avLst/>
+          </a:prstGeom>
+          <a:noFill/>
+          <a:ln/>
+        </p:spPr>
+        <p:txBody>
+          <a:bodyPr wrap="square" lIns="0" tIns="0" rIns="0" bIns="0" rtlCol="0" anchor="t"/>
+          <a:lstStyle/>
+          <a:p>
+            <a:pPr marL="0" indent="0" algn="ctr">
+              <a:buNone/>
+            </a:pPr>
+            <a:r>
+              <a:rPr lang="en-US" sz="1050" dirty="0">
+                <a:solidFill>
+                  <a:srgbClr val="A3A3A3"/>
+                </a:solidFill>
+                <a:latin typeface="Segoe UI" pitchFamily="34" charset="0"/>
+                <a:ea typeface="Segoe UI" pitchFamily="34" charset="-122"/>
+                <a:cs typeface="Segoe UI" pitchFamily="34" charset="-120"/>
+              </a:rPr>
+              <a:t>yalnızca boş alanlar</a:t>
+            </a:r>
+            <a:endParaRPr lang="en-US" sz="1050" dirty="0"/>
+          </a:p>
+        </p:txBody>
+      </p:sp>
+      <p:sp>
+        <p:nvSpPr>
+          <p:cNvPr id="20" name="Text 17"/>
+          <p:cNvSpPr txBox="1"/>
+          <p:nvPr/>
+        </p:nvSpPr>
+        <p:spPr>
+          <a:xfrm>
+            <a:off x="9144000" y="1883664"/>
+            <a:ext cx="384048" cy="1426464"/>
+          </a:xfrm>
+          <a:prstGeom prst="rect">
+            <a:avLst/>
+          </a:prstGeom>
+          <a:noFill/>
+          <a:ln/>
+        </p:spPr>
+        <p:txBody>
+          <a:bodyPr wrap="square" lIns="0" tIns="0" rIns="0" bIns="0" rtlCol="0" anchor="ctr"/>
+          <a:lstStyle/>
+          <a:p>
+            <a:pPr marL="0" indent="0" algn="ctr">
+              <a:buNone/>
+            </a:pPr>
+            <a:r>
+              <a:rPr lang="en-US" sz="2600" b="1" dirty="0">
+                <a:solidFill>
+                  <a:srgbClr val="E5E5E5"/>
+                </a:solidFill>
+                <a:latin typeface="Segoe UI" pitchFamily="34" charset="0"/>
+                <a:ea typeface="Segoe UI" pitchFamily="34" charset="-122"/>
+                <a:cs typeface="Segoe UI" pitchFamily="34" charset="-120"/>
+              </a:rPr>
+              <a:t>›</a:t>
+            </a:r>
+            <a:endParaRPr lang="en-US" sz="2600" dirty="0"/>
+          </a:p>
+        </p:txBody>
+      </p:sp>
+      <p:sp>
+        <p:nvSpPr>
+          <p:cNvPr id="21" name="mrf_dugum3"/>
+          <p:cNvSpPr/>
+          <p:nvPr/>
+        </p:nvSpPr>
+        <p:spPr>
+          <a:xfrm>
+            <a:off x="9528048" y="1883664"/>
+            <a:ext cx="2542032" cy="1426464"/>
+          </a:xfrm>
+          <a:prstGeom prst="roundRect">
+            <a:avLst>
+              <a:gd name="adj" fmla="val 5128"/>
+            </a:avLst>
+          </a:prstGeom>
+          <a:solidFill>
+            <a:srgbClr val="ECFDF5"/>
+          </a:solidFill>
+          <a:ln w="12700">
+            <a:solidFill>
+              <a:srgbClr val="A7F3D0"/>
+            </a:solidFill>
+            <a:prstDash val="solid"/>
+          </a:ln>
+        </p:spPr>
+      </p:sp>
+      <p:sp>
+        <p:nvSpPr>
+          <p:cNvPr id="22" name="mrf_dugumAd3"/>
+          <p:cNvSpPr txBox="1"/>
+          <p:nvPr/>
+        </p:nvSpPr>
+        <p:spPr>
+          <a:xfrm>
+            <a:off x="9656064" y="2066544"/>
+            <a:ext cx="2286000" cy="457200"/>
+          </a:xfrm>
+          <a:prstGeom prst="rect">
+            <a:avLst/>
+          </a:prstGeom>
+          <a:noFill/>
+          <a:ln/>
+        </p:spPr>
+        <p:txBody>
+          <a:bodyPr wrap="square" lIns="0" tIns="0" rIns="0" bIns="0" rtlCol="0" anchor="ctr"/>
+          <a:lstStyle/>
+          <a:p>
+            <a:pPr marL="0" indent="0" algn="ctr">
+              <a:buNone/>
+            </a:pPr>
+            <a:r>
+              <a:rPr lang="en-US" sz="1500" b="1" dirty="0">
+                <a:solidFill>
+                  <a:srgbClr val="047857"/>
+                </a:solidFill>
+                <a:latin typeface="Segoe UI" pitchFamily="34" charset="0"/>
+                <a:ea typeface="Segoe UI" pitchFamily="34" charset="-122"/>
+                <a:cs typeface="Segoe UI" pitchFamily="34" charset="-120"/>
+              </a:rPr>
+              <a:t>Yapılandırılmış JSON</a:t>
+            </a:r>
+            <a:endParaRPr lang="en-US" sz="1500" dirty="0"/>
+          </a:p>
+        </p:txBody>
+      </p:sp>
+      <p:sp>
+        <p:nvSpPr>
+          <p:cNvPr id="23" name="Text 20"/>
+          <p:cNvSpPr txBox="1"/>
+          <p:nvPr/>
+        </p:nvSpPr>
+        <p:spPr>
+          <a:xfrm>
+            <a:off x="9656064" y="2523744"/>
+            <a:ext cx="2286000" cy="566928"/>
+          </a:xfrm>
+          <a:prstGeom prst="rect">
+            <a:avLst/>
+          </a:prstGeom>
+          <a:noFill/>
+          <a:ln/>
+        </p:spPr>
+        <p:txBody>
+          <a:bodyPr wrap="square" lIns="0" tIns="0" rIns="0" bIns="0" rtlCol="0" anchor="t"/>
+          <a:lstStyle/>
+          <a:p>
+            <a:pPr marL="0" indent="0" algn="ctr">
+              <a:buNone/>
+            </a:pPr>
+            <a:r>
+              <a:rPr lang="en-US" sz="1050" dirty="0">
+                <a:solidFill>
+                  <a:srgbClr val="A3A3A3"/>
+                </a:solidFill>
+                <a:latin typeface="Segoe UI" pitchFamily="34" charset="0"/>
+                <a:ea typeface="Segoe UI" pitchFamily="34" charset="-122"/>
+                <a:cs typeface="Segoe UI" pitchFamily="34" charset="-120"/>
+              </a:rPr>
+              <a:t>kanıtıyla birlikte</a:t>
+            </a:r>
+            <a:endParaRPr lang="en-US" sz="1050" dirty="0"/>
+          </a:p>
+        </p:txBody>
+      </p:sp>
+      <p:sp>
+        <p:nvSpPr>
+          <p:cNvPr id="24" name="mrf_switch"/>
+          <p:cNvSpPr/>
+          <p:nvPr/>
+        </p:nvSpPr>
+        <p:spPr>
+          <a:xfrm>
+            <a:off x="749808" y="3657600"/>
+            <a:ext cx="5504688" cy="1097280"/>
+          </a:xfrm>
+          <a:prstGeom prst="roundRect">
+            <a:avLst>
+              <a:gd name="adj" fmla="val 6667"/>
+            </a:avLst>
+          </a:prstGeom>
+          <a:solidFill>
+            <a:srgbClr val="FFFFFF"/>
+          </a:solidFill>
+          <a:ln w="12700">
+            <a:solidFill>
+              <a:srgbClr val="2563EB"/>
+            </a:solidFill>
+            <a:prstDash val="solid"/>
+          </a:ln>
+        </p:spPr>
+      </p:sp>
+      <p:sp>
+        <p:nvSpPr>
+          <p:cNvPr id="25" name="Text 22"/>
+          <p:cNvSpPr txBox="1"/>
+          <p:nvPr/>
+        </p:nvSpPr>
+        <p:spPr>
+          <a:xfrm>
+            <a:off x="969264" y="3803904"/>
+            <a:ext cx="2377440" cy="402336"/>
+          </a:xfrm>
+          <a:prstGeom prst="rect">
+            <a:avLst/>
+          </a:prstGeom>
+          <a:noFill/>
+          <a:ln/>
+        </p:spPr>
+        <p:txBody>
+          <a:bodyPr wrap="square" lIns="0" tIns="0" rIns="0" bIns="0" rtlCol="0" anchor="ctr"/>
+          <a:lstStyle/>
+          <a:p>
+            <a:pPr marL="0" indent="0" algn="l">
+              <a:buNone/>
+            </a:pPr>
+            <a:r>
+              <a:rPr lang="en-US" sz="1500" b="1" dirty="0">
+                <a:solidFill>
+                  <a:srgbClr val="2563EB"/>
+                </a:solidFill>
+                <a:latin typeface="Consolas" pitchFamily="34" charset="0"/>
+                <a:ea typeface="Consolas" pitchFamily="34" charset="-122"/>
+                <a:cs typeface="Consolas" pitchFamily="34" charset="-120"/>
+              </a:rPr>
+              <a:t>FINAGENT_LLM=0</a:t>
+            </a:r>
+            <a:endParaRPr lang="en-US" sz="1500" dirty="0"/>
+          </a:p>
+        </p:txBody>
+      </p:sp>
+      <p:sp>
+        <p:nvSpPr>
+          <p:cNvPr id="26" name="Text 23"/>
+          <p:cNvSpPr txBox="1"/>
+          <p:nvPr/>
+        </p:nvSpPr>
+        <p:spPr>
+          <a:xfrm>
+            <a:off x="969264" y="4187952"/>
+            <a:ext cx="5029200" cy="402336"/>
+          </a:xfrm>
+          <a:prstGeom prst="rect">
+            <a:avLst/>
+          </a:prstGeom>
+          <a:noFill/>
+          <a:ln/>
+        </p:spPr>
+        <p:txBody>
+          <a:bodyPr wrap="square" lIns="0" tIns="0" rIns="0" bIns="0" rtlCol="0" anchor="ctr"/>
+          <a:lstStyle/>
+          <a:p>
+            <a:pPr marL="0" indent="0" algn="l">
+              <a:buNone/>
+            </a:pPr>
+            <a:r>
+              <a:rPr lang="en-US" sz="1250" dirty="0">
+                <a:solidFill>
+                  <a:srgbClr val="171717"/>
+                </a:solidFill>
+                <a:latin typeface="Segoe UI" pitchFamily="34" charset="0"/>
+                <a:ea typeface="Segoe UI" pitchFamily="34" charset="-122"/>
+                <a:cs typeface="Segoe UI" pitchFamily="34" charset="-120"/>
+              </a:rPr>
+              <a:t>LLM tamamen kapalı — sistem çalışmaya devam ediyor</a:t>
+            </a:r>
+            <a:endParaRPr lang="en-US" sz="1250" dirty="0"/>
+          </a:p>
+        </p:txBody>
+      </p:sp>
+      <p:sp>
+        <p:nvSpPr>
+          <p:cNvPr id="27" name="mrf_norm"/>
+          <p:cNvSpPr/>
+          <p:nvPr/>
+        </p:nvSpPr>
+        <p:spPr>
+          <a:xfrm>
+            <a:off x="6620256" y="3657600"/>
+            <a:ext cx="4818888" cy="1097280"/>
+          </a:xfrm>
+          <a:prstGeom prst="roundRect">
+            <a:avLst>
+              <a:gd name="adj" fmla="val 6667"/>
+            </a:avLst>
+          </a:prstGeom>
+          <a:solidFill>
+            <a:srgbClr val="FAFAFA"/>
+          </a:solidFill>
+          <a:ln w="12700">
+            <a:solidFill>
+              <a:srgbClr val="E5E5E5"/>
+            </a:solidFill>
+            <a:prstDash val="solid"/>
+          </a:ln>
+        </p:spPr>
+      </p:sp>
+      <p:sp>
+        <p:nvSpPr>
+          <p:cNvPr id="28" name="Text 25"/>
+          <p:cNvSpPr txBox="1"/>
+          <p:nvPr/>
+        </p:nvSpPr>
+        <p:spPr>
+          <a:xfrm>
+            <a:off x="6784848" y="3767328"/>
+            <a:ext cx="4489704" cy="384048"/>
+          </a:xfrm>
+          <a:prstGeom prst="rect">
+            <a:avLst/>
+          </a:prstGeom>
+          <a:noFill/>
+          <a:ln/>
+        </p:spPr>
+        <p:txBody>
+          <a:bodyPr wrap="square" lIns="0" tIns="0" rIns="0" bIns="0" rtlCol="0" anchor="ctr"/>
+          <a:lstStyle/>
+          <a:p>
+            <a:pPr marL="0" indent="0" algn="ctr">
+              <a:buNone/>
+            </a:pPr>
+            <a:r>
+              <a:rPr lang="en-US" sz="1300" dirty="0">
+                <a:solidFill>
+                  <a:srgbClr val="A3A3A3"/>
+                </a:solidFill>
+                <a:latin typeface="Segoe UI" pitchFamily="34" charset="0"/>
+                <a:ea typeface="Segoe UI" pitchFamily="34" charset="-122"/>
+                <a:cs typeface="Segoe UI" pitchFamily="34" charset="-120"/>
+              </a:rPr>
+              <a:t>%2,05   ·   % 2.05   ·   yüzde 2,05</a:t>
+            </a:r>
+            <a:endParaRPr lang="en-US" sz="1300" dirty="0"/>
+          </a:p>
+        </p:txBody>
+      </p:sp>
+      <p:sp>
+        <p:nvSpPr>
+          <p:cNvPr id="29" name="Text 26"/>
+          <p:cNvSpPr txBox="1"/>
+          <p:nvPr/>
+        </p:nvSpPr>
+        <p:spPr>
+          <a:xfrm>
+            <a:off x="6784848" y="4151376"/>
+            <a:ext cx="4489704" cy="457200"/>
+          </a:xfrm>
+          <a:prstGeom prst="rect">
+            <a:avLst/>
+          </a:prstGeom>
+          <a:noFill/>
+          <a:ln/>
+        </p:spPr>
+        <p:txBody>
+          <a:bodyPr wrap="square" lIns="0" tIns="0" rIns="0" bIns="0" rtlCol="0" anchor="ctr"/>
+          <a:lstStyle/>
+          <a:p>
+            <a:pPr marL="0" indent="0" algn="ctr">
+              <a:buNone/>
+            </a:pPr>
+            <a:r>
+              <a:rPr lang="en-US" sz="2100" b="1" dirty="0">
+                <a:solidFill>
+                  <a:srgbClr val="171717"/>
+                </a:solidFill>
+                <a:latin typeface="Segoe UI" pitchFamily="34" charset="0"/>
+                <a:ea typeface="Segoe UI" pitchFamily="34" charset="-122"/>
+                <a:cs typeface="Segoe UI" pitchFamily="34" charset="-120"/>
+              </a:rPr>
+              <a:t>→   2.05</a:t>
+            </a:r>
+            <a:endParaRPr lang="en-US" sz="2100" dirty="0"/>
+          </a:p>
+        </p:txBody>
+      </p:sp>
+      <p:sp>
+        <p:nvSpPr>
+          <p:cNvPr id="30" name="Text 27"/>
+          <p:cNvSpPr txBox="1"/>
+          <p:nvPr/>
+        </p:nvSpPr>
+        <p:spPr>
+          <a:xfrm>
+            <a:off x="749808" y="6236208"/>
+            <a:ext cx="10689336" cy="274320"/>
+          </a:xfrm>
+          <a:prstGeom prst="rect">
+            <a:avLst/>
+          </a:prstGeom>
+          <a:noFill/>
+          <a:ln/>
+        </p:spPr>
+        <p:txBody>
+          <a:bodyPr wrap="square" lIns="0" tIns="0" rIns="0" bIns="0" rtlCol="0" anchor="ctr"/>
+          <a:lstStyle/>
+          <a:p>
+            <a:pPr marL="0" indent="0" algn="l">
+              <a:buNone/>
+            </a:pPr>
+            <a:r>
+              <a:rPr lang="en-US" sz="1000" dirty="0">
+                <a:solidFill>
+                  <a:srgbClr val="A3A3A3"/>
+                </a:solidFill>
+                <a:latin typeface="Segoe UI" pitchFamily="34" charset="0"/>
+                <a:ea typeface="Segoe UI" pitchFamily="34" charset="-122"/>
+                <a:cs typeface="Segoe UI" pitchFamily="34" charset="-120"/>
+              </a:rPr>
+              <a:t>Normalizasyon: para · oran · vade · tarih  |  Şartname 5.6 ve 5.8</a:t>
+            </a:r>
+            <a:endParaRPr lang="en-US" sz="1000" dirty="0"/>
+          </a:p>
+        </p:txBody>
+      </p:sp>
     </p:spTree>
+    <p:extLst>
+      <p:ext uri="{BB962C8B-B14F-4D97-AF65-F5344CB8AC3E}">
+        <p14:creationId xmlns:p14="http://schemas.microsoft.com/office/powerpoint/2010/main" val="3993944757"/>
+      </p:ext>
+    </p:extLst>
   </p:cSld>
   <p:clrMapOvr>
     <a:masterClrMapping/>
   </p:clrMapOvr>
-  <mc:AlternateContent xmlns:mc="http://schemas.openxmlformats.org/markup-compatibility/2006" xmlns:p159="http://schemas.microsoft.com/office/powerpoint/2015/09/main">
-    <mc:Choice Requires="p159">
-      <p:transition xmlns:p14="http://schemas.microsoft.com/office/powerpoint/2010/main" spd="slow" p14:dur="1100">
+  <mc:AlternateContent xmlns:mc="http://schemas.openxmlformats.org/markup-compatibility/2006">
+    <mc:Choice xmlns:p159="http://schemas.microsoft.com/office/powerpoint/2015/09/main" xmlns="" Requires="p159">
+      <p:transition xmlns:p14="http://schemas.microsoft.com/office/powerpoint/2010/main" spd="slow" p14:dur="1300">
         <p159:morph option="byObject"/>
       </p:transition>
     </mc:Choice>
-    <mc:Fallback xmlns="">
+    <mc:Fallback>
       <p:transition spd="med">
         <p:fade/>
       </p:transition>
     </mc:Fallback>
   </mc:AlternateContent>
+  <p:timing>
+    <p:tnLst>
+      <p:par>
+        <p:cTn id="1" dur="indefinite" restart="never" nodeType="tmRoot"/>
+      </p:par>
+    </p:tnLst>
+  </p:timing>
 </p:sld>
 </file>
 
 <file path=ppt/slides/slide9.xml><?xml version="1.0" encoding="utf-8"?>
 <p:sld xmlns:a="http://schemas.openxmlformats.org/drawingml/2006/main" xmlns:r="http://schemas.openxmlformats.org/officeDocument/2006/relationships" xmlns:p="http://schemas.openxmlformats.org/presentationml/2006/main">
-  <p:cSld name="Slide 9">
+  <p:cSld>
     <p:bg>
       <p:bgPr>
         <a:blipFill dpi="0" rotWithShape="1">
@@ -15417,6 +18348,33 @@
       </p:grpSpPr>
       <p:sp>
         <p:nvSpPr>
+          <p:cNvPr id="17" name="mrf_dugum2"/>
+          <p:cNvSpPr/>
+          <p:nvPr/>
+        </p:nvSpPr>
+        <p:spPr>
+          <a:xfrm>
+            <a:off x="3654988" y="1889760"/>
+            <a:ext cx="2542032" cy="1426464"/>
+          </a:xfrm>
+          <a:prstGeom prst="roundRect">
+            <a:avLst>
+              <a:gd name="adj" fmla="val 5128"/>
+            </a:avLst>
+          </a:prstGeom>
+          <a:solidFill>
+            <a:srgbClr val="FAFAFA"/>
+          </a:solidFill>
+          <a:ln w="12700">
+            <a:solidFill>
+              <a:srgbClr val="E5E5E5"/>
+            </a:solidFill>
+            <a:prstDash val="solid"/>
+          </a:ln>
+        </p:spPr>
+      </p:sp>
+      <p:sp>
+        <p:nvSpPr>
           <p:cNvPr id="2" name="mrf_bolumNo"/>
           <p:cNvSpPr txBox="1"/>
           <p:nvPr/>
@@ -15448,7 +18406,7 @@
                 <a:ea typeface="Segoe UI Semibold" pitchFamily="34" charset="-122"/>
                 <a:cs typeface="Segoe UI Semibold" pitchFamily="34" charset="-120"/>
               </a:rPr>
-              <a:t>04 · KANIT</a:t>
+              <a:t>03 · MİMARİ</a:t>
             </a:r>
             <a:endParaRPr lang="en-US" sz="1050" dirty="0"/>
           </a:p>
@@ -15588,7 +18546,7 @@
                 <a:ea typeface="Segoe UI Semibold" pitchFamily="34" charset="-122"/>
                 <a:cs typeface="Segoe UI Semibold" pitchFamily="34" charset="-120"/>
               </a:rPr>
-              <a:t>Neden bu sayıya güvenelim?</a:t>
+              <a:t>Neden LLM'e tek başına güvenmiyoruz?</a:t>
             </a:r>
             <a:endParaRPr lang="en-US" sz="1350" dirty="0"/>
           </a:p>
@@ -15627,7 +18585,7 @@
                 <a:ea typeface="Segoe UI Semibold" pitchFamily="34" charset="-122"/>
                 <a:cs typeface="Segoe UI Semibold" pitchFamily="34" charset="-120"/>
               </a:rPr>
-              <a:t>Her değerin kaynağı görünür</a:t>
+              <a:t>Önce kural, sonra LLM</a:t>
             </a:r>
             <a:endParaRPr lang="en-US" sz="3700" dirty="0"/>
           </a:p>
@@ -15635,30 +18593,57 @@
       </p:sp>
       <p:sp>
         <p:nvSpPr>
-          <p:cNvPr id="9" name="Text 6"/>
-          <p:cNvSpPr txBox="1"/>
-          <p:nvPr/>
-        </p:nvSpPr>
-        <p:spPr>
-          <a:xfrm>
-            <a:off x="749808" y="1645920"/>
-            <a:ext cx="10689336" cy="420624"/>
-          </a:xfrm>
-          <a:prstGeom prst="rect">
-            <a:avLst/>
-          </a:prstGeom>
-          <a:noFill/>
-          <a:ln/>
-        </p:spPr>
-        <p:txBody>
-          <a:bodyPr wrap="square" lIns="0" tIns="0" rIns="0" bIns="0" rtlCol="0" anchor="ctr"/>
-          <a:lstStyle/>
-          <a:p>
-            <a:pPr marL="0" indent="0" algn="l">
-              <a:buNone/>
-            </a:pPr>
-            <a:r>
-              <a:rPr lang="en-US" sz="1450" dirty="0">
+          <p:cNvPr id="9" name="mrf_dugum0"/>
+          <p:cNvSpPr/>
+          <p:nvPr/>
+        </p:nvSpPr>
+        <p:spPr>
+          <a:xfrm>
+            <a:off x="749808" y="1883664"/>
+            <a:ext cx="2542032" cy="1426464"/>
+          </a:xfrm>
+          <a:prstGeom prst="roundRect">
+            <a:avLst>
+              <a:gd name="adj" fmla="val 5128"/>
+            </a:avLst>
+          </a:prstGeom>
+          <a:solidFill>
+            <a:srgbClr val="FAFAFA"/>
+          </a:solidFill>
+          <a:ln w="12700">
+            <a:solidFill>
+              <a:srgbClr val="E5E5E5"/>
+            </a:solidFill>
+            <a:prstDash val="solid"/>
+          </a:ln>
+        </p:spPr>
+      </p:sp>
+      <p:sp>
+        <p:nvSpPr>
+          <p:cNvPr id="10" name="mrf_dugumAd0"/>
+          <p:cNvSpPr txBox="1"/>
+          <p:nvPr/>
+        </p:nvSpPr>
+        <p:spPr>
+          <a:xfrm>
+            <a:off x="877824" y="2066544"/>
+            <a:ext cx="2286000" cy="457200"/>
+          </a:xfrm>
+          <a:prstGeom prst="rect">
+            <a:avLst/>
+          </a:prstGeom>
+          <a:noFill/>
+          <a:ln/>
+        </p:spPr>
+        <p:txBody>
+          <a:bodyPr wrap="square" lIns="0" tIns="0" rIns="0" bIns="0" rtlCol="0" anchor="ctr"/>
+          <a:lstStyle/>
+          <a:p>
+            <a:pPr marL="0" indent="0" algn="ctr">
+              <a:buNone/>
+            </a:pPr>
+            <a:r>
+              <a:rPr lang="en-US" sz="1500" b="1" dirty="0">
                 <a:solidFill>
                   <a:srgbClr val="525252"/>
                 </a:solidFill>
@@ -15666,38 +18651,38 @@
                 <a:ea typeface="Segoe UI" pitchFamily="34" charset="-122"/>
                 <a:cs typeface="Segoe UI" pitchFamily="34" charset="-120"/>
               </a:rPr>
-              <a:t>Çoğu NLP çözümü sonucu verir ve “güven bana” der. Biz metnin hangi ifadesinden, hangi yöntemle, ne güvenle çıkardığımızı da gösteriyoruz.</a:t>
-            </a:r>
-            <a:endParaRPr lang="en-US" sz="1450" dirty="0"/>
-          </a:p>
-        </p:txBody>
-      </p:sp>
-      <p:sp>
-        <p:nvSpPr>
-          <p:cNvPr id="10" name="Text 7"/>
-          <p:cNvSpPr txBox="1"/>
-          <p:nvPr/>
-        </p:nvSpPr>
-        <p:spPr>
-          <a:xfrm>
-            <a:off x="749808" y="2286000"/>
-            <a:ext cx="2286000" cy="310896"/>
-          </a:xfrm>
-          <a:prstGeom prst="rect">
-            <a:avLst/>
-          </a:prstGeom>
-          <a:noFill/>
-          <a:ln/>
-        </p:spPr>
-        <p:txBody>
-          <a:bodyPr wrap="square" lIns="0" tIns="0" rIns="0" bIns="0" rtlCol="0" anchor="ctr"/>
-          <a:lstStyle/>
-          <a:p>
-            <a:pPr marL="0" indent="0" algn="l">
-              <a:buNone/>
-            </a:pPr>
-            <a:r>
-              <a:rPr lang="en-US" sz="950" b="1" kern="0" spc="120" dirty="0">
+              <a:t>Ham metin</a:t>
+            </a:r>
+            <a:endParaRPr lang="en-US" sz="1500" dirty="0"/>
+          </a:p>
+        </p:txBody>
+      </p:sp>
+      <p:sp>
+        <p:nvSpPr>
+          <p:cNvPr id="11" name="Text 8"/>
+          <p:cNvSpPr txBox="1"/>
+          <p:nvPr/>
+        </p:nvSpPr>
+        <p:spPr>
+          <a:xfrm>
+            <a:off x="877824" y="2523744"/>
+            <a:ext cx="2286000" cy="566928"/>
+          </a:xfrm>
+          <a:prstGeom prst="rect">
+            <a:avLst/>
+          </a:prstGeom>
+          <a:noFill/>
+          <a:ln/>
+        </p:spPr>
+        <p:txBody>
+          <a:bodyPr wrap="square" lIns="0" tIns="0" rIns="0" bIns="0" rtlCol="0" anchor="t"/>
+          <a:lstStyle/>
+          <a:p>
+            <a:pPr marL="0" indent="0" algn="ctr">
+              <a:buNone/>
+            </a:pPr>
+            <a:r>
+              <a:rPr lang="en-US" sz="1050" dirty="0">
                 <a:solidFill>
                   <a:srgbClr val="A3A3A3"/>
                 </a:solidFill>
@@ -15705,182 +18690,65 @@
                 <a:ea typeface="Segoe UI" pitchFamily="34" charset="-122"/>
                 <a:cs typeface="Segoe UI" pitchFamily="34" charset="-120"/>
               </a:rPr>
-              <a:t>ALAN</a:t>
-            </a:r>
-            <a:endParaRPr lang="en-US" sz="950" dirty="0"/>
-          </a:p>
-        </p:txBody>
-      </p:sp>
-      <p:sp>
-        <p:nvSpPr>
-          <p:cNvPr id="11" name="Text 8"/>
-          <p:cNvSpPr txBox="1"/>
-          <p:nvPr/>
-        </p:nvSpPr>
-        <p:spPr>
-          <a:xfrm>
-            <a:off x="3035808" y="2286000"/>
-            <a:ext cx="4572000" cy="310896"/>
-          </a:xfrm>
-          <a:prstGeom prst="rect">
-            <a:avLst/>
-          </a:prstGeom>
-          <a:noFill/>
-          <a:ln/>
-        </p:spPr>
-        <p:txBody>
-          <a:bodyPr wrap="square" lIns="0" tIns="0" rIns="0" bIns="0" rtlCol="0" anchor="ctr"/>
-          <a:lstStyle/>
-          <a:p>
-            <a:pPr marL="0" indent="0" algn="l">
-              <a:buNone/>
-            </a:pPr>
-            <a:r>
-              <a:rPr lang="en-US" sz="950" b="1" kern="0" spc="120" dirty="0">
-                <a:solidFill>
-                  <a:srgbClr val="A3A3A3"/>
+              <a:t>banka sayfası</a:t>
+            </a:r>
+            <a:endParaRPr lang="en-US" sz="1050" dirty="0"/>
+          </a:p>
+        </p:txBody>
+      </p:sp>
+      <p:sp>
+        <p:nvSpPr>
+          <p:cNvPr id="12" name="Text 9"/>
+          <p:cNvSpPr txBox="1"/>
+          <p:nvPr/>
+        </p:nvSpPr>
+        <p:spPr>
+          <a:xfrm>
+            <a:off x="3291840" y="1883664"/>
+            <a:ext cx="384048" cy="1426464"/>
+          </a:xfrm>
+          <a:prstGeom prst="rect">
+            <a:avLst/>
+          </a:prstGeom>
+          <a:noFill/>
+          <a:ln/>
+        </p:spPr>
+        <p:txBody>
+          <a:bodyPr wrap="square" lIns="0" tIns="0" rIns="0" bIns="0" rtlCol="0" anchor="ctr"/>
+          <a:lstStyle/>
+          <a:p>
+            <a:pPr marL="0" indent="0" algn="ctr">
+              <a:buNone/>
+            </a:pPr>
+            <a:r>
+              <a:rPr lang="en-US" sz="2600" b="1" dirty="0">
+                <a:solidFill>
+                  <a:srgbClr val="E5E5E5"/>
                 </a:solidFill>
                 <a:latin typeface="Segoe UI" pitchFamily="34" charset="0"/>
                 <a:ea typeface="Segoe UI" pitchFamily="34" charset="-122"/>
                 <a:cs typeface="Segoe UI" pitchFamily="34" charset="-120"/>
               </a:rPr>
-              <a:t>METINDEKI IFADE</a:t>
-            </a:r>
-            <a:endParaRPr lang="en-US" sz="950" dirty="0"/>
-          </a:p>
-        </p:txBody>
-      </p:sp>
-      <p:sp>
-        <p:nvSpPr>
-          <p:cNvPr id="12" name="Text 9"/>
-          <p:cNvSpPr txBox="1"/>
-          <p:nvPr/>
-        </p:nvSpPr>
-        <p:spPr>
-          <a:xfrm>
-            <a:off x="7607808" y="2286000"/>
-            <a:ext cx="1600200" cy="310896"/>
-          </a:xfrm>
-          <a:prstGeom prst="rect">
-            <a:avLst/>
-          </a:prstGeom>
-          <a:noFill/>
-          <a:ln/>
-        </p:spPr>
-        <p:txBody>
-          <a:bodyPr wrap="square" lIns="0" tIns="0" rIns="0" bIns="0" rtlCol="0" anchor="ctr"/>
-          <a:lstStyle/>
-          <a:p>
-            <a:pPr marL="0" indent="0" algn="ctr">
-              <a:buNone/>
-            </a:pPr>
-            <a:r>
-              <a:rPr lang="en-US" sz="950" b="1" kern="0" spc="120" dirty="0">
-                <a:solidFill>
-                  <a:srgbClr val="A3A3A3"/>
-                </a:solidFill>
-                <a:latin typeface="Segoe UI" pitchFamily="34" charset="0"/>
-                <a:ea typeface="Segoe UI" pitchFamily="34" charset="-122"/>
-                <a:cs typeface="Segoe UI" pitchFamily="34" charset="-120"/>
-              </a:rPr>
-              <a:t>DEĞER</a:t>
-            </a:r>
-            <a:endParaRPr lang="en-US" sz="950" dirty="0"/>
-          </a:p>
-        </p:txBody>
-      </p:sp>
-      <p:sp>
-        <p:nvSpPr>
-          <p:cNvPr id="13" name="Text 10"/>
-          <p:cNvSpPr txBox="1"/>
-          <p:nvPr/>
-        </p:nvSpPr>
-        <p:spPr>
-          <a:xfrm>
-            <a:off x="9208008" y="2286000"/>
-            <a:ext cx="1234440" cy="310896"/>
-          </a:xfrm>
-          <a:prstGeom prst="rect">
-            <a:avLst/>
-          </a:prstGeom>
-          <a:noFill/>
-          <a:ln/>
-        </p:spPr>
-        <p:txBody>
-          <a:bodyPr wrap="square" lIns="0" tIns="0" rIns="0" bIns="0" rtlCol="0" anchor="ctr"/>
-          <a:lstStyle/>
-          <a:p>
-            <a:pPr marL="0" indent="0" algn="ctr">
-              <a:buNone/>
-            </a:pPr>
-            <a:r>
-              <a:rPr lang="en-US" sz="950" b="1" kern="0" spc="120" dirty="0">
-                <a:solidFill>
-                  <a:srgbClr val="A3A3A3"/>
-                </a:solidFill>
-                <a:latin typeface="Segoe UI" pitchFamily="34" charset="0"/>
-                <a:ea typeface="Segoe UI" pitchFamily="34" charset="-122"/>
-                <a:cs typeface="Segoe UI" pitchFamily="34" charset="-120"/>
-              </a:rPr>
-              <a:t>YÖNTEM</a:t>
-            </a:r>
-            <a:endParaRPr lang="en-US" sz="950" dirty="0"/>
-          </a:p>
-        </p:txBody>
-      </p:sp>
-      <p:sp>
-        <p:nvSpPr>
-          <p:cNvPr id="14" name="Text 11"/>
-          <p:cNvSpPr txBox="1"/>
-          <p:nvPr/>
-        </p:nvSpPr>
-        <p:spPr>
-          <a:xfrm>
-            <a:off x="10442448" y="2286000"/>
-            <a:ext cx="996696" cy="310896"/>
-          </a:xfrm>
-          <a:prstGeom prst="rect">
-            <a:avLst/>
-          </a:prstGeom>
-          <a:noFill/>
-          <a:ln/>
-        </p:spPr>
-        <p:txBody>
-          <a:bodyPr wrap="square" lIns="0" tIns="0" rIns="0" bIns="0" rtlCol="0" anchor="ctr"/>
-          <a:lstStyle/>
-          <a:p>
-            <a:pPr marL="0" indent="0" algn="ctr">
-              <a:buNone/>
-            </a:pPr>
-            <a:r>
-              <a:rPr lang="en-US" sz="950" b="1" kern="0" spc="120" dirty="0">
-                <a:solidFill>
-                  <a:srgbClr val="A3A3A3"/>
-                </a:solidFill>
-                <a:latin typeface="Segoe UI" pitchFamily="34" charset="0"/>
-                <a:ea typeface="Segoe UI" pitchFamily="34" charset="-122"/>
-                <a:cs typeface="Segoe UI" pitchFamily="34" charset="-120"/>
-              </a:rPr>
-              <a:t>GÜVEN</a:t>
-            </a:r>
-            <a:endParaRPr lang="en-US" sz="950" dirty="0"/>
-          </a:p>
-        </p:txBody>
-      </p:sp>
-      <p:sp>
-        <p:nvSpPr>
-          <p:cNvPr id="15" name="mrf_kanitSatir0"/>
+              <a:t>›</a:t>
+            </a:r>
+            <a:endParaRPr lang="en-US" sz="2600" dirty="0"/>
+          </a:p>
+        </p:txBody>
+      </p:sp>
+      <p:sp>
+        <p:nvSpPr>
+          <p:cNvPr id="13" name="mrf_dugum1"/>
           <p:cNvSpPr/>
           <p:nvPr/>
         </p:nvSpPr>
         <p:spPr>
           <a:xfrm>
-            <a:off x="749808" y="2651760"/>
-            <a:ext cx="10689336" cy="694944"/>
+            <a:off x="6643769" y="1889760"/>
+            <a:ext cx="2542032" cy="1426464"/>
           </a:xfrm>
           <a:prstGeom prst="roundRect">
             <a:avLst>
-              <a:gd name="adj" fmla="val 10526"/>
+              <a:gd name="adj" fmla="val 5128"/>
             </a:avLst>
           </a:prstGeom>
           <a:solidFill>
@@ -15896,131 +18764,209 @@
       </p:sp>
       <p:sp>
         <p:nvSpPr>
-          <p:cNvPr id="16" name="mrf_kanitHucre0"/>
-          <p:cNvSpPr txBox="1"/>
-          <p:nvPr/>
-        </p:nvSpPr>
-        <p:spPr>
-          <a:xfrm>
-            <a:off x="896112" y="2651760"/>
-            <a:ext cx="2139696" cy="694944"/>
-          </a:xfrm>
-          <a:prstGeom prst="rect">
-            <a:avLst/>
-          </a:prstGeom>
-          <a:noFill/>
-          <a:ln/>
-        </p:spPr>
-        <p:txBody>
-          <a:bodyPr wrap="square" lIns="0" tIns="0" rIns="0" bIns="0" rtlCol="0" anchor="ctr"/>
-          <a:lstStyle/>
-          <a:p>
-            <a:pPr marL="0" indent="0" algn="l">
-              <a:buNone/>
-            </a:pPr>
-            <a:r>
-              <a:rPr lang="en-US" sz="1150" dirty="0">
+          <p:cNvPr id="14" name="mrf_dugumAd1"/>
+          <p:cNvSpPr txBox="1"/>
+          <p:nvPr/>
+        </p:nvSpPr>
+        <p:spPr>
+          <a:xfrm>
+            <a:off x="3803904" y="2066544"/>
+            <a:ext cx="2286000" cy="457200"/>
+          </a:xfrm>
+          <a:prstGeom prst="rect">
+            <a:avLst/>
+          </a:prstGeom>
+          <a:noFill/>
+          <a:ln/>
+        </p:spPr>
+        <p:txBody>
+          <a:bodyPr wrap="square" lIns="0" tIns="0" rIns="0" bIns="0" rtlCol="0" anchor="ctr"/>
+          <a:lstStyle/>
+          <a:p>
+            <a:pPr marL="0" indent="0" algn="ctr">
+              <a:buNone/>
+            </a:pPr>
+            <a:r>
+              <a:rPr lang="en-US" sz="1500" b="1" dirty="0">
+                <a:solidFill>
+                  <a:srgbClr val="2563EB"/>
+                </a:solidFill>
+                <a:latin typeface="Segoe UI" pitchFamily="34" charset="0"/>
+                <a:ea typeface="Segoe UI" pitchFamily="34" charset="-122"/>
+                <a:cs typeface="Segoe UI" pitchFamily="34" charset="-120"/>
+              </a:rPr>
+              <a:t>Kural tabanlı</a:t>
+            </a:r>
+            <a:endParaRPr lang="en-US" sz="1500" dirty="0"/>
+          </a:p>
+        </p:txBody>
+      </p:sp>
+      <p:sp>
+        <p:nvSpPr>
+          <p:cNvPr id="15" name="Text 12"/>
+          <p:cNvSpPr txBox="1"/>
+          <p:nvPr/>
+        </p:nvSpPr>
+        <p:spPr>
+          <a:xfrm>
+            <a:off x="3803904" y="2523744"/>
+            <a:ext cx="2286000" cy="566928"/>
+          </a:xfrm>
+          <a:prstGeom prst="rect">
+            <a:avLst/>
+          </a:prstGeom>
+          <a:noFill/>
+          <a:ln/>
+        </p:spPr>
+        <p:txBody>
+          <a:bodyPr wrap="square" lIns="0" tIns="0" rIns="0" bIns="0" rtlCol="0" anchor="t"/>
+          <a:lstStyle/>
+          <a:p>
+            <a:pPr marL="0" indent="0" algn="ctr">
+              <a:buNone/>
+            </a:pPr>
+            <a:r>
+              <a:rPr lang="en-US" sz="1050" dirty="0">
+                <a:solidFill>
+                  <a:srgbClr val="A3A3A3"/>
+                </a:solidFill>
+                <a:latin typeface="Segoe UI" pitchFamily="34" charset="0"/>
+                <a:ea typeface="Segoe UI" pitchFamily="34" charset="-122"/>
+                <a:cs typeface="Segoe UI" pitchFamily="34" charset="-120"/>
+              </a:rPr>
+              <a:t>~2.000 satır · deterministik</a:t>
+            </a:r>
+            <a:endParaRPr lang="en-US" sz="1050" dirty="0"/>
+          </a:p>
+        </p:txBody>
+      </p:sp>
+      <p:sp>
+        <p:nvSpPr>
+          <p:cNvPr id="16" name="Text 13"/>
+          <p:cNvSpPr txBox="1"/>
+          <p:nvPr/>
+        </p:nvSpPr>
+        <p:spPr>
+          <a:xfrm>
+            <a:off x="6217920" y="1883664"/>
+            <a:ext cx="384048" cy="1426464"/>
+          </a:xfrm>
+          <a:prstGeom prst="rect">
+            <a:avLst/>
+          </a:prstGeom>
+          <a:noFill/>
+          <a:ln/>
+        </p:spPr>
+        <p:txBody>
+          <a:bodyPr wrap="square" lIns="0" tIns="0" rIns="0" bIns="0" rtlCol="0" anchor="ctr"/>
+          <a:lstStyle/>
+          <a:p>
+            <a:pPr marL="0" indent="0" algn="ctr">
+              <a:buNone/>
+            </a:pPr>
+            <a:r>
+              <a:rPr lang="en-US" sz="2600" b="1" dirty="0">
+                <a:solidFill>
+                  <a:srgbClr val="E5E5E5"/>
+                </a:solidFill>
+                <a:latin typeface="Segoe UI" pitchFamily="34" charset="0"/>
+                <a:ea typeface="Segoe UI" pitchFamily="34" charset="-122"/>
+                <a:cs typeface="Segoe UI" pitchFamily="34" charset="-120"/>
+              </a:rPr>
+              <a:t>›</a:t>
+            </a:r>
+            <a:endParaRPr lang="en-US" sz="2600" dirty="0"/>
+          </a:p>
+        </p:txBody>
+      </p:sp>
+      <p:sp>
+        <p:nvSpPr>
+          <p:cNvPr id="18" name="mrf_dugumAd2"/>
+          <p:cNvSpPr txBox="1"/>
+          <p:nvPr/>
+        </p:nvSpPr>
+        <p:spPr>
+          <a:xfrm>
+            <a:off x="6729984" y="2066544"/>
+            <a:ext cx="2286000" cy="457200"/>
+          </a:xfrm>
+          <a:prstGeom prst="rect">
+            <a:avLst/>
+          </a:prstGeom>
+          <a:noFill/>
+          <a:ln/>
+        </p:spPr>
+        <p:txBody>
+          <a:bodyPr wrap="square" lIns="0" tIns="0" rIns="0" bIns="0" rtlCol="0" anchor="ctr"/>
+          <a:lstStyle/>
+          <a:p>
+            <a:pPr marL="0" indent="0" algn="ctr">
+              <a:buNone/>
+            </a:pPr>
+            <a:r>
+              <a:rPr lang="en-US" sz="1500" b="1" dirty="0">
                 <a:solidFill>
                   <a:srgbClr val="525252"/>
                 </a:solidFill>
-                <a:latin typeface="Consolas" pitchFamily="34" charset="0"/>
-                <a:ea typeface="Consolas" pitchFamily="34" charset="-122"/>
-                <a:cs typeface="Consolas" pitchFamily="34" charset="-120"/>
-              </a:rPr>
-              <a:t>kar_payi_orani</a:t>
-            </a:r>
-            <a:endParaRPr lang="en-US" sz="1150" dirty="0"/>
-          </a:p>
-        </p:txBody>
-      </p:sp>
-      <p:sp>
-        <p:nvSpPr>
-          <p:cNvPr id="17" name="mrf_kanitHucre1"/>
-          <p:cNvSpPr txBox="1"/>
-          <p:nvPr/>
-        </p:nvSpPr>
-        <p:spPr>
-          <a:xfrm>
-            <a:off x="3182112" y="2651760"/>
-            <a:ext cx="4572000" cy="694944"/>
-          </a:xfrm>
-          <a:prstGeom prst="rect">
-            <a:avLst/>
-          </a:prstGeom>
-          <a:noFill/>
-          <a:ln/>
-        </p:spPr>
-        <p:txBody>
-          <a:bodyPr wrap="square" lIns="0" tIns="0" rIns="0" bIns="0" rtlCol="0" anchor="ctr"/>
-          <a:lstStyle/>
-          <a:p>
-            <a:pPr marL="0" indent="0" algn="l">
-              <a:buNone/>
-            </a:pPr>
-            <a:r>
-              <a:rPr lang="en-US" sz="1250" i="1" dirty="0">
-                <a:solidFill>
-                  <a:srgbClr val="171717"/>
-                </a:solidFill>
-                <a:latin typeface="Calibri" pitchFamily="34" charset="0"/>
-                <a:ea typeface="Calibri" pitchFamily="34" charset="-122"/>
-                <a:cs typeface="Calibri" pitchFamily="34" charset="-120"/>
-              </a:rPr>
-              <a:t>“%2,87 'den başlayan kâr oranları”</a:t>
-            </a:r>
-            <a:endParaRPr lang="en-US" sz="1250" dirty="0"/>
-          </a:p>
-        </p:txBody>
-      </p:sp>
-      <p:sp>
-        <p:nvSpPr>
-          <p:cNvPr id="18" name="mrf_kanitHucre2"/>
-          <p:cNvSpPr txBox="1"/>
-          <p:nvPr/>
-        </p:nvSpPr>
-        <p:spPr>
-          <a:xfrm>
-            <a:off x="7754112" y="2651760"/>
-            <a:ext cx="1600200" cy="694944"/>
-          </a:xfrm>
-          <a:prstGeom prst="rect">
-            <a:avLst/>
-          </a:prstGeom>
-          <a:noFill/>
-          <a:ln/>
-        </p:spPr>
-        <p:txBody>
-          <a:bodyPr wrap="square" lIns="0" tIns="0" rIns="0" bIns="0" rtlCol="0" anchor="ctr"/>
+                <a:latin typeface="Segoe UI" pitchFamily="34" charset="0"/>
+                <a:ea typeface="Segoe UI" pitchFamily="34" charset="-122"/>
+                <a:cs typeface="Segoe UI" pitchFamily="34" charset="-120"/>
+              </a:rPr>
+              <a:t>LLM tamamlayıcı</a:t>
+            </a:r>
+            <a:endParaRPr lang="en-US" sz="1500" dirty="0"/>
+          </a:p>
+        </p:txBody>
+      </p:sp>
+      <p:sp>
+        <p:nvSpPr>
+          <p:cNvPr id="19" name="Text 16"/>
+          <p:cNvSpPr txBox="1"/>
+          <p:nvPr/>
+        </p:nvSpPr>
+        <p:spPr>
+          <a:xfrm>
+            <a:off x="6729984" y="2523744"/>
+            <a:ext cx="2286000" cy="566928"/>
+          </a:xfrm>
+          <a:prstGeom prst="rect">
+            <a:avLst/>
+          </a:prstGeom>
+          <a:noFill/>
+          <a:ln/>
+        </p:spPr>
+        <p:txBody>
+          <a:bodyPr wrap="square" lIns="0" tIns="0" rIns="0" bIns="0" rtlCol="0" anchor="t"/>
           <a:lstStyle/>
           <a:p>
             <a:pPr marL="0" indent="0" algn="ctr">
               <a:buNone/>
             </a:pPr>
             <a:r>
-              <a:rPr lang="en-US" sz="1150" b="1" dirty="0">
-                <a:solidFill>
-                  <a:srgbClr val="2563EB"/>
-                </a:solidFill>
-                <a:latin typeface="Calibri" pitchFamily="34" charset="0"/>
-                <a:ea typeface="Calibri" pitchFamily="34" charset="-122"/>
-                <a:cs typeface="Calibri" pitchFamily="34" charset="-120"/>
-              </a:rPr>
-              <a:t>2.87</a:t>
-            </a:r>
-            <a:endParaRPr lang="en-US" sz="1150" dirty="0"/>
-          </a:p>
-        </p:txBody>
-      </p:sp>
-      <p:sp>
-        <p:nvSpPr>
-          <p:cNvPr id="19" name="mrf_kanitHucre3"/>
-          <p:cNvSpPr txBox="1"/>
-          <p:nvPr/>
-        </p:nvSpPr>
-        <p:spPr>
-          <a:xfrm>
-            <a:off x="9354312" y="2651760"/>
-            <a:ext cx="1234440" cy="694944"/>
+              <a:rPr lang="en-US" sz="1050" dirty="0">
+                <a:solidFill>
+                  <a:srgbClr val="A3A3A3"/>
+                </a:solidFill>
+                <a:latin typeface="Segoe UI" pitchFamily="34" charset="0"/>
+                <a:ea typeface="Segoe UI" pitchFamily="34" charset="-122"/>
+                <a:cs typeface="Segoe UI" pitchFamily="34" charset="-120"/>
+              </a:rPr>
+              <a:t>yalnızca boş alanlar</a:t>
+            </a:r>
+            <a:endParaRPr lang="en-US" sz="1050" dirty="0"/>
+          </a:p>
+        </p:txBody>
+      </p:sp>
+      <p:sp>
+        <p:nvSpPr>
+          <p:cNvPr id="20" name="Text 17"/>
+          <p:cNvSpPr txBox="1"/>
+          <p:nvPr/>
+        </p:nvSpPr>
+        <p:spPr>
+          <a:xfrm>
+            <a:off x="9144000" y="1883664"/>
+            <a:ext cx="384048" cy="1426464"/>
           </a:xfrm>
           <a:prstGeom prst="rect">
             <a:avLst/>
@@ -16036,77 +18982,270 @@
               <a:buNone/>
             </a:pPr>
             <a:r>
-              <a:rPr lang="en-US" sz="1150" dirty="0">
-                <a:solidFill>
-                  <a:srgbClr val="A3A3A3"/>
-                </a:solidFill>
-                <a:latin typeface="Consolas" pitchFamily="34" charset="0"/>
-                <a:ea typeface="Consolas" pitchFamily="34" charset="-122"/>
-                <a:cs typeface="Consolas" pitchFamily="34" charset="-120"/>
-              </a:rPr>
-              <a:t>REGEX</a:t>
-            </a:r>
-            <a:endParaRPr lang="en-US" sz="1150" dirty="0"/>
-          </a:p>
-        </p:txBody>
-      </p:sp>
-      <p:sp>
-        <p:nvSpPr>
-          <p:cNvPr id="20" name="mrf_kanitHucre4"/>
-          <p:cNvSpPr txBox="1"/>
-          <p:nvPr/>
-        </p:nvSpPr>
-        <p:spPr>
-          <a:xfrm>
-            <a:off x="10588752" y="2651760"/>
-            <a:ext cx="996696" cy="694944"/>
-          </a:xfrm>
-          <a:prstGeom prst="rect">
-            <a:avLst/>
-          </a:prstGeom>
-          <a:noFill/>
-          <a:ln/>
-        </p:spPr>
-        <p:txBody>
-          <a:bodyPr wrap="square" lIns="0" tIns="0" rIns="0" bIns="0" rtlCol="0" anchor="ctr"/>
-          <a:lstStyle/>
-          <a:p>
-            <a:pPr marL="0" indent="0" algn="ctr">
-              <a:buNone/>
-            </a:pPr>
-            <a:r>
-              <a:rPr lang="en-US" sz="1150" dirty="0">
-                <a:solidFill>
-                  <a:srgbClr val="047857"/>
-                </a:solidFill>
-                <a:latin typeface="Calibri" pitchFamily="34" charset="0"/>
-                <a:ea typeface="Calibri" pitchFamily="34" charset="-122"/>
-                <a:cs typeface="Calibri" pitchFamily="34" charset="-120"/>
-              </a:rPr>
-              <a:t>0.94</a:t>
-            </a:r>
-            <a:endParaRPr lang="en-US" sz="1150" dirty="0"/>
-          </a:p>
-        </p:txBody>
-      </p:sp>
-      <p:sp>
-        <p:nvSpPr>
-          <p:cNvPr id="21" name="mrf_kanitSatir1"/>
+              <a:rPr lang="en-US" sz="2600" b="1" dirty="0">
+                <a:solidFill>
+                  <a:srgbClr val="E5E5E5"/>
+                </a:solidFill>
+                <a:latin typeface="Segoe UI" pitchFamily="34" charset="0"/>
+                <a:ea typeface="Segoe UI" pitchFamily="34" charset="-122"/>
+                <a:cs typeface="Segoe UI" pitchFamily="34" charset="-120"/>
+              </a:rPr>
+              <a:t>›</a:t>
+            </a:r>
+            <a:endParaRPr lang="en-US" sz="2600" dirty="0"/>
+          </a:p>
+        </p:txBody>
+      </p:sp>
+      <p:sp>
+        <p:nvSpPr>
+          <p:cNvPr id="21" name="mrf_dugum3"/>
           <p:cNvSpPr/>
           <p:nvPr/>
         </p:nvSpPr>
         <p:spPr>
           <a:xfrm>
-            <a:off x="749808" y="3401568"/>
-            <a:ext cx="10689336" cy="694944"/>
+            <a:off x="9528048" y="1883664"/>
+            <a:ext cx="2542032" cy="1426464"/>
           </a:xfrm>
           <a:prstGeom prst="roundRect">
             <a:avLst>
-              <a:gd name="adj" fmla="val 10526"/>
+              <a:gd name="adj" fmla="val 5128"/>
+            </a:avLst>
+          </a:prstGeom>
+          <a:solidFill>
+            <a:srgbClr val="ECFDF5"/>
+          </a:solidFill>
+          <a:ln w="12700">
+            <a:solidFill>
+              <a:srgbClr val="A7F3D0"/>
+            </a:solidFill>
+            <a:prstDash val="solid"/>
+          </a:ln>
+        </p:spPr>
+      </p:sp>
+      <p:sp>
+        <p:nvSpPr>
+          <p:cNvPr id="22" name="mrf_dugumAd3"/>
+          <p:cNvSpPr txBox="1"/>
+          <p:nvPr/>
+        </p:nvSpPr>
+        <p:spPr>
+          <a:xfrm>
+            <a:off x="9656064" y="2066544"/>
+            <a:ext cx="2286000" cy="457200"/>
+          </a:xfrm>
+          <a:prstGeom prst="rect">
+            <a:avLst/>
+          </a:prstGeom>
+          <a:noFill/>
+          <a:ln/>
+        </p:spPr>
+        <p:txBody>
+          <a:bodyPr wrap="square" lIns="0" tIns="0" rIns="0" bIns="0" rtlCol="0" anchor="ctr"/>
+          <a:lstStyle/>
+          <a:p>
+            <a:pPr marL="0" indent="0" algn="ctr">
+              <a:buNone/>
+            </a:pPr>
+            <a:r>
+              <a:rPr lang="en-US" sz="1500" b="1" dirty="0">
+                <a:solidFill>
+                  <a:srgbClr val="047857"/>
+                </a:solidFill>
+                <a:latin typeface="Segoe UI" pitchFamily="34" charset="0"/>
+                <a:ea typeface="Segoe UI" pitchFamily="34" charset="-122"/>
+                <a:cs typeface="Segoe UI" pitchFamily="34" charset="-120"/>
+              </a:rPr>
+              <a:t>Yapılandırılmış JSON</a:t>
+            </a:r>
+            <a:endParaRPr lang="en-US" sz="1500" dirty="0"/>
+          </a:p>
+        </p:txBody>
+      </p:sp>
+      <p:sp>
+        <p:nvSpPr>
+          <p:cNvPr id="23" name="Text 20"/>
+          <p:cNvSpPr txBox="1"/>
+          <p:nvPr/>
+        </p:nvSpPr>
+        <p:spPr>
+          <a:xfrm>
+            <a:off x="9656064" y="2523744"/>
+            <a:ext cx="2286000" cy="566928"/>
+          </a:xfrm>
+          <a:prstGeom prst="rect">
+            <a:avLst/>
+          </a:prstGeom>
+          <a:noFill/>
+          <a:ln/>
+        </p:spPr>
+        <p:txBody>
+          <a:bodyPr wrap="square" lIns="0" tIns="0" rIns="0" bIns="0" rtlCol="0" anchor="t"/>
+          <a:lstStyle/>
+          <a:p>
+            <a:pPr marL="0" indent="0" algn="ctr">
+              <a:buNone/>
+            </a:pPr>
+            <a:r>
+              <a:rPr lang="en-US" sz="1050" dirty="0">
+                <a:solidFill>
+                  <a:srgbClr val="A3A3A3"/>
+                </a:solidFill>
+                <a:latin typeface="Segoe UI" pitchFamily="34" charset="0"/>
+                <a:ea typeface="Segoe UI" pitchFamily="34" charset="-122"/>
+                <a:cs typeface="Segoe UI" pitchFamily="34" charset="-120"/>
+              </a:rPr>
+              <a:t>kanıtıyla birlikte</a:t>
+            </a:r>
+            <a:endParaRPr lang="en-US" sz="1050" dirty="0"/>
+          </a:p>
+        </p:txBody>
+      </p:sp>
+      <p:sp>
+        <p:nvSpPr>
+          <p:cNvPr id="24" name="mrf_switch"/>
+          <p:cNvSpPr/>
+          <p:nvPr/>
+        </p:nvSpPr>
+        <p:spPr>
+          <a:xfrm>
+            <a:off x="749808" y="3657600"/>
+            <a:ext cx="5504688" cy="1097280"/>
+          </a:xfrm>
+          <a:prstGeom prst="roundRect">
+            <a:avLst>
+              <a:gd name="adj" fmla="val 6667"/>
             </a:avLst>
           </a:prstGeom>
           <a:solidFill>
             <a:srgbClr val="FFFFFF"/>
+          </a:solidFill>
+          <a:ln w="12700">
+            <a:solidFill>
+              <a:srgbClr val="2563EB"/>
+            </a:solidFill>
+            <a:prstDash val="solid"/>
+          </a:ln>
+        </p:spPr>
+      </p:sp>
+      <p:sp>
+        <p:nvSpPr>
+          <p:cNvPr id="25" name="Text 22"/>
+          <p:cNvSpPr txBox="1"/>
+          <p:nvPr/>
+        </p:nvSpPr>
+        <p:spPr>
+          <a:xfrm>
+            <a:off x="969264" y="3803904"/>
+            <a:ext cx="2377440" cy="402336"/>
+          </a:xfrm>
+          <a:prstGeom prst="rect">
+            <a:avLst/>
+          </a:prstGeom>
+          <a:noFill/>
+          <a:ln/>
+        </p:spPr>
+        <p:txBody>
+          <a:bodyPr wrap="square" lIns="0" tIns="0" rIns="0" bIns="0" rtlCol="0" anchor="ctr"/>
+          <a:lstStyle/>
+          <a:p>
+            <a:r>
+              <a:rPr lang="tr-TR" b="1" dirty="0">
+                <a:solidFill>
+                  <a:srgbClr val="0A67FF"/>
+                </a:solidFill>
+              </a:rPr>
+              <a:t>"</a:t>
+            </a:r>
+            <a:r>
+              <a:rPr lang="tr-TR" b="1" dirty="0">
+                <a:solidFill>
+                  <a:srgbClr val="0A67FF"/>
+                </a:solidFill>
+                <a:latin typeface="Segoe UI" panose="020B0502040204020203" pitchFamily="34" charset="0"/>
+                <a:cs typeface="Segoe UI" panose="020B0502040204020203" pitchFamily="34" charset="0"/>
+              </a:rPr>
+              <a:t>temperature</a:t>
+            </a:r>
+            <a:r>
+              <a:rPr lang="tr-TR" b="1" dirty="0">
+                <a:solidFill>
+                  <a:srgbClr val="0A67FF"/>
+                </a:solidFill>
+              </a:rPr>
+              <a:t>": 0.0</a:t>
+            </a:r>
+          </a:p>
+        </p:txBody>
+      </p:sp>
+      <p:sp>
+        <p:nvSpPr>
+          <p:cNvPr id="26" name="Text 23"/>
+          <p:cNvSpPr txBox="1"/>
+          <p:nvPr/>
+        </p:nvSpPr>
+        <p:spPr>
+          <a:xfrm>
+            <a:off x="969264" y="4187952"/>
+            <a:ext cx="5029200" cy="402336"/>
+          </a:xfrm>
+          <a:prstGeom prst="rect">
+            <a:avLst/>
+          </a:prstGeom>
+          <a:noFill/>
+          <a:ln/>
+        </p:spPr>
+        <p:txBody>
+          <a:bodyPr wrap="square" lIns="0" tIns="0" rIns="0" bIns="0" rtlCol="0" anchor="ctr"/>
+          <a:lstStyle/>
+          <a:p>
+            <a:pPr marL="0" indent="0" algn="l">
+              <a:buNone/>
+            </a:pPr>
+            <a:r>
+              <a:rPr lang="en-US" sz="1250" dirty="0">
+                <a:solidFill>
+                  <a:srgbClr val="171717"/>
+                </a:solidFill>
+                <a:latin typeface="Segoe UI" pitchFamily="34" charset="0"/>
+                <a:ea typeface="Segoe UI" pitchFamily="34" charset="-122"/>
+                <a:cs typeface="Segoe UI" pitchFamily="34" charset="-120"/>
+              </a:rPr>
+              <a:t>LLM </a:t>
+            </a:r>
+            <a:r>
+              <a:rPr lang="tr-TR" sz="1250" dirty="0" smtClean="0">
+                <a:solidFill>
+                  <a:srgbClr val="171717"/>
+                </a:solidFill>
+                <a:latin typeface="Segoe UI" pitchFamily="34" charset="0"/>
+                <a:ea typeface="Segoe UI" pitchFamily="34" charset="-122"/>
+                <a:cs typeface="Segoe UI" pitchFamily="34" charset="-120"/>
+              </a:rPr>
+              <a:t>yaratıcılık kapalı – Halüsinasyon görmüyor</a:t>
+            </a:r>
+            <a:endParaRPr lang="en-US" sz="1250" dirty="0"/>
+          </a:p>
+        </p:txBody>
+      </p:sp>
+      <p:sp>
+        <p:nvSpPr>
+          <p:cNvPr id="27" name="mrf_norm"/>
+          <p:cNvSpPr/>
+          <p:nvPr/>
+        </p:nvSpPr>
+        <p:spPr>
+          <a:xfrm>
+            <a:off x="6620256" y="3657600"/>
+            <a:ext cx="4818888" cy="1097280"/>
+          </a:xfrm>
+          <a:prstGeom prst="roundRect">
+            <a:avLst>
+              <a:gd name="adj" fmla="val 6667"/>
+            </a:avLst>
+          </a:prstGeom>
+          <a:solidFill>
+            <a:srgbClr val="FAFAFA"/>
           </a:solidFill>
           <a:ln w="12700">
             <a:solidFill>
@@ -16118,92 +19257,14 @@
       </p:sp>
       <p:sp>
         <p:nvSpPr>
-          <p:cNvPr id="22" name="Text 19"/>
-          <p:cNvSpPr txBox="1"/>
-          <p:nvPr/>
-        </p:nvSpPr>
-        <p:spPr>
-          <a:xfrm>
-            <a:off x="896112" y="3401568"/>
-            <a:ext cx="2139696" cy="694944"/>
-          </a:xfrm>
-          <a:prstGeom prst="rect">
-            <a:avLst/>
-          </a:prstGeom>
-          <a:noFill/>
-          <a:ln/>
-        </p:spPr>
-        <p:txBody>
-          <a:bodyPr wrap="square" lIns="0" tIns="0" rIns="0" bIns="0" rtlCol="0" anchor="ctr"/>
-          <a:lstStyle/>
-          <a:p>
-            <a:pPr marL="0" indent="0" algn="l">
-              <a:buNone/>
-            </a:pPr>
-            <a:r>
-              <a:rPr lang="en-US" sz="1150" dirty="0">
-                <a:solidFill>
-                  <a:srgbClr val="525252"/>
-                </a:solidFill>
-                <a:latin typeface="Consolas" pitchFamily="34" charset="0"/>
-                <a:ea typeface="Consolas" pitchFamily="34" charset="-122"/>
-                <a:cs typeface="Consolas" pitchFamily="34" charset="-120"/>
-              </a:rPr>
-              <a:t>bitis_tarihi</a:t>
-            </a:r>
-            <a:endParaRPr lang="en-US" sz="1150" dirty="0"/>
-          </a:p>
-        </p:txBody>
-      </p:sp>
-      <p:sp>
-        <p:nvSpPr>
-          <p:cNvPr id="23" name="Text 20"/>
-          <p:cNvSpPr txBox="1"/>
-          <p:nvPr/>
-        </p:nvSpPr>
-        <p:spPr>
-          <a:xfrm>
-            <a:off x="3182112" y="3401568"/>
-            <a:ext cx="4572000" cy="694944"/>
-          </a:xfrm>
-          <a:prstGeom prst="rect">
-            <a:avLst/>
-          </a:prstGeom>
-          <a:noFill/>
-          <a:ln/>
-        </p:spPr>
-        <p:txBody>
-          <a:bodyPr wrap="square" lIns="0" tIns="0" rIns="0" bIns="0" rtlCol="0" anchor="ctr"/>
-          <a:lstStyle/>
-          <a:p>
-            <a:pPr marL="0" indent="0" algn="l">
-              <a:buNone/>
-            </a:pPr>
-            <a:r>
-              <a:rPr lang="en-US" sz="1250" i="1" dirty="0">
-                <a:solidFill>
-                  <a:srgbClr val="171717"/>
-                </a:solidFill>
-                <a:latin typeface="Calibri" pitchFamily="34" charset="0"/>
-                <a:ea typeface="Calibri" pitchFamily="34" charset="-122"/>
-                <a:cs typeface="Calibri" pitchFamily="34" charset="-120"/>
-              </a:rPr>
-              <a:t>“31 Aralık 2026 tarihine kadar”</a:t>
-            </a:r>
-            <a:endParaRPr lang="en-US" sz="1250" dirty="0"/>
-          </a:p>
-        </p:txBody>
-      </p:sp>
-      <p:sp>
-        <p:nvSpPr>
-          <p:cNvPr id="24" name="Text 21"/>
-          <p:cNvSpPr txBox="1"/>
-          <p:nvPr/>
-        </p:nvSpPr>
-        <p:spPr>
-          <a:xfrm>
-            <a:off x="7754112" y="3401568"/>
-            <a:ext cx="1600200" cy="694944"/>
+          <p:cNvPr id="28" name="Text 25"/>
+          <p:cNvSpPr txBox="1"/>
+          <p:nvPr/>
+        </p:nvSpPr>
+        <p:spPr>
+          <a:xfrm>
+            <a:off x="6784848" y="3767328"/>
+            <a:ext cx="4489704" cy="384048"/>
           </a:xfrm>
           <a:prstGeom prst="rect">
             <a:avLst/>
@@ -16219,415 +19280,127 @@
               <a:buNone/>
             </a:pPr>
             <a:r>
-              <a:rPr lang="en-US" sz="1150" b="1" dirty="0">
-                <a:solidFill>
-                  <a:srgbClr val="2563EB"/>
-                </a:solidFill>
-                <a:latin typeface="Calibri" pitchFamily="34" charset="0"/>
-                <a:ea typeface="Calibri" pitchFamily="34" charset="-122"/>
-                <a:cs typeface="Calibri" pitchFamily="34" charset="-120"/>
-              </a:rPr>
-              <a:t>2026-12-31</a:t>
-            </a:r>
-            <a:endParaRPr lang="en-US" sz="1150" dirty="0"/>
-          </a:p>
-        </p:txBody>
-      </p:sp>
-      <p:sp>
-        <p:nvSpPr>
-          <p:cNvPr id="25" name="Text 22"/>
-          <p:cNvSpPr txBox="1"/>
-          <p:nvPr/>
-        </p:nvSpPr>
-        <p:spPr>
-          <a:xfrm>
-            <a:off x="9354312" y="3401568"/>
-            <a:ext cx="1234440" cy="694944"/>
-          </a:xfrm>
-          <a:prstGeom prst="rect">
-            <a:avLst/>
-          </a:prstGeom>
-          <a:noFill/>
-          <a:ln/>
-        </p:spPr>
-        <p:txBody>
-          <a:bodyPr wrap="square" lIns="0" tIns="0" rIns="0" bIns="0" rtlCol="0" anchor="ctr"/>
-          <a:lstStyle/>
-          <a:p>
-            <a:pPr marL="0" indent="0" algn="ctr">
-              <a:buNone/>
-            </a:pPr>
-            <a:r>
-              <a:rPr lang="en-US" sz="1150" dirty="0">
+              <a:rPr lang="en-US" sz="1300" dirty="0">
                 <a:solidFill>
                   <a:srgbClr val="A3A3A3"/>
-                </a:solidFill>
-                <a:latin typeface="Consolas" pitchFamily="34" charset="0"/>
-                <a:ea typeface="Consolas" pitchFamily="34" charset="-122"/>
-                <a:cs typeface="Consolas" pitchFamily="34" charset="-120"/>
-              </a:rPr>
-              <a:t>REGEX</a:t>
-            </a:r>
-            <a:endParaRPr lang="en-US" sz="1150" dirty="0"/>
-          </a:p>
-        </p:txBody>
-      </p:sp>
-      <p:sp>
-        <p:nvSpPr>
-          <p:cNvPr id="26" name="Text 23"/>
-          <p:cNvSpPr txBox="1"/>
-          <p:nvPr/>
-        </p:nvSpPr>
-        <p:spPr>
-          <a:xfrm>
-            <a:off x="10588752" y="3401568"/>
-            <a:ext cx="996696" cy="694944"/>
-          </a:xfrm>
-          <a:prstGeom prst="rect">
-            <a:avLst/>
-          </a:prstGeom>
-          <a:noFill/>
-          <a:ln/>
-        </p:spPr>
-        <p:txBody>
-          <a:bodyPr wrap="square" lIns="0" tIns="0" rIns="0" bIns="0" rtlCol="0" anchor="ctr"/>
-          <a:lstStyle/>
-          <a:p>
-            <a:pPr marL="0" indent="0" algn="ctr">
-              <a:buNone/>
-            </a:pPr>
-            <a:r>
-              <a:rPr lang="en-US" sz="1150" dirty="0">
-                <a:solidFill>
-                  <a:srgbClr val="047857"/>
-                </a:solidFill>
-                <a:latin typeface="Calibri" pitchFamily="34" charset="0"/>
-                <a:ea typeface="Calibri" pitchFamily="34" charset="-122"/>
-                <a:cs typeface="Calibri" pitchFamily="34" charset="-120"/>
-              </a:rPr>
-              <a:t>0.98</a:t>
-            </a:r>
-            <a:endParaRPr lang="en-US" sz="1150" dirty="0"/>
-          </a:p>
-        </p:txBody>
-      </p:sp>
-      <p:sp>
-        <p:nvSpPr>
-          <p:cNvPr id="27" name="mrf_kanitSatir2"/>
-          <p:cNvSpPr/>
-          <p:nvPr/>
-        </p:nvSpPr>
-        <p:spPr>
-          <a:xfrm>
-            <a:off x="749808" y="4151376"/>
-            <a:ext cx="10689336" cy="694944"/>
-          </a:xfrm>
-          <a:prstGeom prst="roundRect">
-            <a:avLst>
-              <a:gd name="adj" fmla="val 10526"/>
-            </a:avLst>
-          </a:prstGeom>
-          <a:solidFill>
-            <a:srgbClr val="FFFFFF"/>
-          </a:solidFill>
-          <a:ln w="12700">
-            <a:solidFill>
-              <a:srgbClr val="E5E5E5"/>
-            </a:solidFill>
-            <a:prstDash val="solid"/>
-          </a:ln>
-        </p:spPr>
-      </p:sp>
-      <p:sp>
-        <p:nvSpPr>
-          <p:cNvPr id="28" name="Text 25"/>
-          <p:cNvSpPr txBox="1"/>
-          <p:nvPr/>
-        </p:nvSpPr>
-        <p:spPr>
-          <a:xfrm>
-            <a:off x="896112" y="4151376"/>
-            <a:ext cx="2139696" cy="694944"/>
-          </a:xfrm>
-          <a:prstGeom prst="rect">
-            <a:avLst/>
-          </a:prstGeom>
-          <a:noFill/>
-          <a:ln/>
-        </p:spPr>
-        <p:txBody>
-          <a:bodyPr wrap="square" lIns="0" tIns="0" rIns="0" bIns="0" rtlCol="0" anchor="ctr"/>
-          <a:lstStyle/>
-          <a:p>
-            <a:pPr marL="0" indent="0" algn="l">
-              <a:buNone/>
-            </a:pPr>
-            <a:r>
-              <a:rPr lang="en-US" sz="1150" dirty="0">
-                <a:solidFill>
-                  <a:srgbClr val="525252"/>
-                </a:solidFill>
-                <a:latin typeface="Consolas" pitchFamily="34" charset="0"/>
-                <a:ea typeface="Consolas" pitchFamily="34" charset="-122"/>
-                <a:cs typeface="Consolas" pitchFamily="34" charset="-120"/>
-              </a:rPr>
-              <a:t>kampanya_turu</a:t>
-            </a:r>
-            <a:endParaRPr lang="en-US" sz="1150" dirty="0"/>
-          </a:p>
-        </p:txBody>
-      </p:sp>
-      <p:sp>
-        <p:nvSpPr>
-          <p:cNvPr id="29" name="Text 26"/>
-          <p:cNvSpPr txBox="1"/>
-          <p:nvPr/>
-        </p:nvSpPr>
-        <p:spPr>
-          <a:xfrm>
-            <a:off x="3182112" y="4151376"/>
-            <a:ext cx="4572000" cy="694944"/>
-          </a:xfrm>
-          <a:prstGeom prst="rect">
-            <a:avLst/>
-          </a:prstGeom>
-          <a:noFill/>
-          <a:ln/>
-        </p:spPr>
-        <p:txBody>
-          <a:bodyPr wrap="square" lIns="0" tIns="0" rIns="0" bIns="0" rtlCol="0" anchor="ctr"/>
-          <a:lstStyle/>
-          <a:p>
-            <a:pPr marL="0" indent="0" algn="l">
-              <a:buNone/>
-            </a:pPr>
-            <a:r>
-              <a:rPr lang="en-US" sz="1250" i="1" dirty="0">
-                <a:solidFill>
-                  <a:srgbClr val="171717"/>
-                </a:solidFill>
-                <a:latin typeface="Calibri" pitchFamily="34" charset="0"/>
-                <a:ea typeface="Calibri" pitchFamily="34" charset="-122"/>
-                <a:cs typeface="Calibri" pitchFamily="34" charset="-120"/>
-              </a:rPr>
-              <a:t>“konut finansmanı fırsatı”</a:t>
-            </a:r>
-            <a:endParaRPr lang="en-US" sz="1250" dirty="0"/>
-          </a:p>
-        </p:txBody>
-      </p:sp>
-      <p:sp>
-        <p:nvSpPr>
-          <p:cNvPr id="30" name="Text 27"/>
-          <p:cNvSpPr txBox="1"/>
-          <p:nvPr/>
-        </p:nvSpPr>
-        <p:spPr>
-          <a:xfrm>
-            <a:off x="7754112" y="4151376"/>
-            <a:ext cx="1600200" cy="694944"/>
-          </a:xfrm>
-          <a:prstGeom prst="rect">
-            <a:avLst/>
-          </a:prstGeom>
-          <a:noFill/>
-          <a:ln/>
-        </p:spPr>
-        <p:txBody>
-          <a:bodyPr wrap="square" lIns="0" tIns="0" rIns="0" bIns="0" rtlCol="0" anchor="ctr"/>
-          <a:lstStyle/>
-          <a:p>
-            <a:pPr marL="0" indent="0" algn="ctr">
-              <a:buNone/>
-            </a:pPr>
-            <a:r>
-              <a:rPr lang="en-US" sz="1150" b="1" dirty="0">
-                <a:solidFill>
-                  <a:srgbClr val="2563EB"/>
-                </a:solidFill>
-                <a:latin typeface="Calibri" pitchFamily="34" charset="0"/>
-                <a:ea typeface="Calibri" pitchFamily="34" charset="-122"/>
-                <a:cs typeface="Calibri" pitchFamily="34" charset="-120"/>
-              </a:rPr>
-              <a:t>konut_finansmani</a:t>
-            </a:r>
-            <a:endParaRPr lang="en-US" sz="1150" dirty="0"/>
-          </a:p>
-        </p:txBody>
-      </p:sp>
-      <p:sp>
-        <p:nvSpPr>
-          <p:cNvPr id="31" name="Text 28"/>
-          <p:cNvSpPr txBox="1"/>
-          <p:nvPr/>
-        </p:nvSpPr>
-        <p:spPr>
-          <a:xfrm>
-            <a:off x="9354312" y="4151376"/>
-            <a:ext cx="1234440" cy="694944"/>
-          </a:xfrm>
-          <a:prstGeom prst="rect">
-            <a:avLst/>
-          </a:prstGeom>
-          <a:noFill/>
-          <a:ln/>
-        </p:spPr>
-        <p:txBody>
-          <a:bodyPr wrap="square" lIns="0" tIns="0" rIns="0" bIns="0" rtlCol="0" anchor="ctr"/>
-          <a:lstStyle/>
-          <a:p>
-            <a:pPr marL="0" indent="0" algn="ctr">
-              <a:buNone/>
-            </a:pPr>
-            <a:r>
-              <a:rPr lang="en-US" sz="1150" dirty="0">
-                <a:solidFill>
-                  <a:srgbClr val="A3A3A3"/>
-                </a:solidFill>
-                <a:latin typeface="Consolas" pitchFamily="34" charset="0"/>
-                <a:ea typeface="Consolas" pitchFamily="34" charset="-122"/>
-                <a:cs typeface="Consolas" pitchFamily="34" charset="-120"/>
-              </a:rPr>
-              <a:t>REGEX</a:t>
-            </a:r>
-            <a:endParaRPr lang="en-US" sz="1150" dirty="0"/>
-          </a:p>
-        </p:txBody>
-      </p:sp>
-      <p:sp>
-        <p:nvSpPr>
-          <p:cNvPr id="32" name="Text 29"/>
-          <p:cNvSpPr txBox="1"/>
-          <p:nvPr/>
-        </p:nvSpPr>
-        <p:spPr>
-          <a:xfrm>
-            <a:off x="10588752" y="4151376"/>
-            <a:ext cx="996696" cy="694944"/>
-          </a:xfrm>
-          <a:prstGeom prst="rect">
-            <a:avLst/>
-          </a:prstGeom>
-          <a:noFill/>
-          <a:ln/>
-        </p:spPr>
-        <p:txBody>
-          <a:bodyPr wrap="square" lIns="0" tIns="0" rIns="0" bIns="0" rtlCol="0" anchor="ctr"/>
-          <a:lstStyle/>
-          <a:p>
-            <a:pPr marL="0" indent="0" algn="ctr">
-              <a:buNone/>
-            </a:pPr>
-            <a:r>
-              <a:rPr lang="en-US" sz="1150" dirty="0">
-                <a:solidFill>
-                  <a:srgbClr val="047857"/>
-                </a:solidFill>
-                <a:latin typeface="Calibri" pitchFamily="34" charset="0"/>
-                <a:ea typeface="Calibri" pitchFamily="34" charset="-122"/>
-                <a:cs typeface="Calibri" pitchFamily="34" charset="-120"/>
-              </a:rPr>
-              <a:t>0.91</a:t>
-            </a:r>
-            <a:endParaRPr lang="en-US" sz="1150" dirty="0"/>
-          </a:p>
-        </p:txBody>
-      </p:sp>
-      <p:sp>
-        <p:nvSpPr>
-          <p:cNvPr id="33" name="Text 30"/>
-          <p:cNvSpPr txBox="1"/>
-          <p:nvPr/>
-        </p:nvSpPr>
-        <p:spPr>
-          <a:xfrm>
-            <a:off x="749808" y="5029200"/>
-            <a:ext cx="10689336" cy="402336"/>
-          </a:xfrm>
-          <a:prstGeom prst="rect">
-            <a:avLst/>
-          </a:prstGeom>
-          <a:noFill/>
-          <a:ln/>
-        </p:spPr>
-        <p:txBody>
-          <a:bodyPr wrap="square" lIns="0" tIns="0" rIns="0" bIns="0" rtlCol="0" anchor="ctr"/>
-          <a:lstStyle/>
-          <a:p>
-            <a:pPr marL="0" indent="0" algn="l">
-              <a:buNone/>
-            </a:pPr>
-            <a:r>
-              <a:rPr lang="en-US" sz="1350" i="1" dirty="0">
-                <a:solidFill>
-                  <a:srgbClr val="171717"/>
                 </a:solidFill>
                 <a:latin typeface="Segoe UI" pitchFamily="34" charset="0"/>
                 <a:ea typeface="Segoe UI" pitchFamily="34" charset="-122"/>
                 <a:cs typeface="Segoe UI" pitchFamily="34" charset="-120"/>
               </a:rPr>
-              <a:t>Yanlış bir oran müşteriye yansırsa denetim ekibi “bu sayı nereden geldi” diye sorar. Cevap bir tık uzakta.</a:t>
-            </a:r>
-            <a:endParaRPr lang="en-US" sz="1350" dirty="0"/>
-          </a:p>
-        </p:txBody>
-      </p:sp>
-      <p:sp>
-        <p:nvSpPr>
-          <p:cNvPr id="34" name="Text 31"/>
-          <p:cNvSpPr txBox="1"/>
-          <p:nvPr/>
-        </p:nvSpPr>
-        <p:spPr>
-          <a:xfrm>
-            <a:off x="749808" y="6236208"/>
-            <a:ext cx="10689336" cy="274320"/>
-          </a:xfrm>
-          <a:prstGeom prst="rect">
-            <a:avLst/>
-          </a:prstGeom>
-          <a:noFill/>
-          <a:ln/>
-        </p:spPr>
-        <p:txBody>
-          <a:bodyPr wrap="square" lIns="0" tIns="0" rIns="0" bIns="0" rtlCol="0" anchor="ctr"/>
-          <a:lstStyle/>
-          <a:p>
-            <a:pPr marL="0" indent="0" algn="l">
-              <a:buNone/>
-            </a:pPr>
-            <a:r>
-              <a:rPr lang="en-US" sz="1000" dirty="0">
-                <a:solidFill>
-                  <a:srgbClr val="A3A3A3"/>
+              <a:t>%2,05   ·   % 2.05   ·   yüzde 2,05</a:t>
+            </a:r>
+            <a:endParaRPr lang="en-US" sz="1300" dirty="0"/>
+          </a:p>
+        </p:txBody>
+      </p:sp>
+      <p:sp>
+        <p:nvSpPr>
+          <p:cNvPr id="29" name="Text 26"/>
+          <p:cNvSpPr txBox="1"/>
+          <p:nvPr/>
+        </p:nvSpPr>
+        <p:spPr>
+          <a:xfrm>
+            <a:off x="6784848" y="4151376"/>
+            <a:ext cx="4489704" cy="457200"/>
+          </a:xfrm>
+          <a:prstGeom prst="rect">
+            <a:avLst/>
+          </a:prstGeom>
+          <a:noFill/>
+          <a:ln/>
+        </p:spPr>
+        <p:txBody>
+          <a:bodyPr wrap="square" lIns="0" tIns="0" rIns="0" bIns="0" rtlCol="0" anchor="ctr"/>
+          <a:lstStyle/>
+          <a:p>
+            <a:pPr marL="0" indent="0" algn="ctr">
+              <a:buNone/>
+            </a:pPr>
+            <a:r>
+              <a:rPr lang="en-US" sz="2100" b="1" dirty="0">
+                <a:solidFill>
+                  <a:srgbClr val="171717"/>
                 </a:solidFill>
                 <a:latin typeface="Segoe UI" pitchFamily="34" charset="0"/>
                 <a:ea typeface="Segoe UI" pitchFamily="34" charset="-122"/>
                 <a:cs typeface="Segoe UI" pitchFamily="34" charset="-120"/>
               </a:rPr>
-              <a:t>Arayüzde canlı: Tüm Kampanyalar → kampanya seç → Çıkarım Kanıtları paneli</a:t>
+              <a:t>→   2.05</a:t>
+            </a:r>
+            <a:endParaRPr lang="en-US" sz="2100" dirty="0"/>
+          </a:p>
+        </p:txBody>
+      </p:sp>
+      <p:sp>
+        <p:nvSpPr>
+          <p:cNvPr id="30" name="Text 27"/>
+          <p:cNvSpPr txBox="1"/>
+          <p:nvPr/>
+        </p:nvSpPr>
+        <p:spPr>
+          <a:xfrm>
+            <a:off x="749808" y="6236208"/>
+            <a:ext cx="10689336" cy="274320"/>
+          </a:xfrm>
+          <a:prstGeom prst="rect">
+            <a:avLst/>
+          </a:prstGeom>
+          <a:noFill/>
+          <a:ln/>
+        </p:spPr>
+        <p:txBody>
+          <a:bodyPr wrap="square" lIns="0" tIns="0" rIns="0" bIns="0" rtlCol="0" anchor="ctr"/>
+          <a:lstStyle/>
+          <a:p>
+            <a:pPr marL="0" indent="0" algn="l">
+              <a:buNone/>
+            </a:pPr>
+            <a:r>
+              <a:rPr lang="en-US" sz="1000" dirty="0">
+                <a:solidFill>
+                  <a:srgbClr val="A3A3A3"/>
+                </a:solidFill>
+                <a:latin typeface="Segoe UI" pitchFamily="34" charset="0"/>
+                <a:ea typeface="Segoe UI" pitchFamily="34" charset="-122"/>
+                <a:cs typeface="Segoe UI" pitchFamily="34" charset="-120"/>
+              </a:rPr>
+              <a:t>Normalizasyon: para · oran · vade · tarih  |  Şartname 5.6 ve 5.8</a:t>
             </a:r>
             <a:endParaRPr lang="en-US" sz="1000" dirty="0"/>
           </a:p>
         </p:txBody>
       </p:sp>
     </p:spTree>
+    <p:extLst>
+      <p:ext uri="{BB962C8B-B14F-4D97-AF65-F5344CB8AC3E}">
+        <p14:creationId xmlns:p14="http://schemas.microsoft.com/office/powerpoint/2010/main" val="2571176659"/>
+      </p:ext>
+    </p:extLst>
   </p:cSld>
   <p:clrMapOvr>
     <a:masterClrMapping/>
   </p:clrMapOvr>
-  <mc:AlternateContent xmlns:mc="http://schemas.openxmlformats.org/markup-compatibility/2006" xmlns:p159="http://schemas.microsoft.com/office/powerpoint/2015/09/main">
-    <mc:Choice Requires="p159">
-      <p:transition xmlns:p14="http://schemas.microsoft.com/office/powerpoint/2010/main" spd="slow" p14:dur="1400">
+  <mc:AlternateContent xmlns:mc="http://schemas.openxmlformats.org/markup-compatibility/2006">
+    <mc:Choice xmlns:p159="http://schemas.microsoft.com/office/powerpoint/2015/09/main" xmlns="" Requires="p159">
+      <p:transition xmlns:p14="http://schemas.microsoft.com/office/powerpoint/2010/main" spd="slow" p14:dur="1300">
         <p159:morph option="byObject"/>
       </p:transition>
     </mc:Choice>
-    <mc:Fallback xmlns="">
+    <mc:Fallback>
       <p:transition spd="med">
         <p:fade/>
       </p:transition>
     </mc:Fallback>
   </mc:AlternateContent>
+  <p:timing>
+    <p:tnLst>
+      <p:par>
+        <p:cTn id="1" dur="indefinite" restart="never" nodeType="tmRoot"/>
+      </p:par>
+    </p:tnLst>
+  </p:timing>
 </p:sld>
 </file>
 

--- a/SmartData-BiQuery-Sunum.pptx
+++ b/SmartData-BiQuery-Sunum.pptx
@@ -5,7 +5,7 @@
     <p:sldMasterId id="2147483648" r:id="rId1"/>
   </p:sldMasterIdLst>
   <p:notesMasterIdLst>
-    <p:notesMasterId r:id="rId25"/>
+    <p:notesMasterId r:id="rId28"/>
   </p:notesMasterIdLst>
   <p:sldIdLst>
     <p:sldId id="256" r:id="rId2"/>
@@ -30,7 +30,10 @@
     <p:sldId id="272" r:id="rId21"/>
     <p:sldId id="273" r:id="rId22"/>
     <p:sldId id="274" r:id="rId23"/>
-    <p:sldId id="275" r:id="rId24"/>
+    <p:sldId id="281" r:id="rId24"/>
+    <p:sldId id="282" r:id="rId25"/>
+    <p:sldId id="275" r:id="rId26"/>
+    <p:sldId id="280" r:id="rId27"/>
   </p:sldIdLst>
   <p:sldSz cx="12192000" cy="6858000"/>
   <p:notesSz cx="6858000" cy="12192000"/>
@@ -202,6 +205,7 @@
             <c:showLeaderLines val="0"/>
             <c:extLst>
               <c:ext xmlns:c15="http://schemas.microsoft.com/office/drawing/2012/chart" uri="{CE6537A1-D6FC-4f65-9D91-7224C49458BB}">
+                <c15:layout/>
                 <c15:showLeaderLines val="0"/>
               </c:ext>
             </c:extLst>
@@ -496,6 +500,7 @@
           <c:dLbls>
             <c:dLbl>
               <c:idx val="0"/>
+              <c:layout/>
               <c:numFmt formatCode="0%" sourceLinked="0"/>
               <c:spPr/>
               <c:txPr>
@@ -520,7 +525,9 @@
               <c:showPercent val="1"/>
               <c:showBubbleSize val="0"/>
               <c:extLst>
-                <c:ext xmlns:c15="http://schemas.microsoft.com/office/drawing/2012/chart" uri="{CE6537A1-D6FC-4f65-9D91-7224C49458BB}"/>
+                <c:ext xmlns:c15="http://schemas.microsoft.com/office/drawing/2012/chart" uri="{CE6537A1-D6FC-4f65-9D91-7224C49458BB}">
+                  <c15:layout/>
+                </c:ext>
                 <c:ext xmlns:c16="http://schemas.microsoft.com/office/drawing/2014/chart" uri="{C3380CC4-5D6E-409C-BE32-E72D297353CC}">
                   <c16:uniqueId val="{00000001-85B0-4F50-8D93-C0D0A16C4D50}"/>
                 </c:ext>
@@ -528,6 +535,7 @@
             </c:dLbl>
             <c:dLbl>
               <c:idx val="1"/>
+              <c:layout/>
               <c:numFmt formatCode="0%" sourceLinked="0"/>
               <c:spPr/>
               <c:txPr>
@@ -552,7 +560,9 @@
               <c:showPercent val="1"/>
               <c:showBubbleSize val="0"/>
               <c:extLst>
-                <c:ext xmlns:c15="http://schemas.microsoft.com/office/drawing/2012/chart" uri="{CE6537A1-D6FC-4f65-9D91-7224C49458BB}"/>
+                <c:ext xmlns:c15="http://schemas.microsoft.com/office/drawing/2012/chart" uri="{CE6537A1-D6FC-4f65-9D91-7224C49458BB}">
+                  <c15:layout/>
+                </c:ext>
                 <c:ext xmlns:c16="http://schemas.microsoft.com/office/drawing/2014/chart" uri="{C3380CC4-5D6E-409C-BE32-E72D297353CC}">
                   <c16:uniqueId val="{00000003-85B0-4F50-8D93-C0D0A16C4D50}"/>
                 </c:ext>
@@ -560,6 +570,7 @@
             </c:dLbl>
             <c:dLbl>
               <c:idx val="2"/>
+              <c:layout/>
               <c:numFmt formatCode="0%" sourceLinked="0"/>
               <c:spPr/>
               <c:txPr>
@@ -584,7 +595,9 @@
               <c:showPercent val="1"/>
               <c:showBubbleSize val="0"/>
               <c:extLst>
-                <c:ext xmlns:c15="http://schemas.microsoft.com/office/drawing/2012/chart" uri="{CE6537A1-D6FC-4f65-9D91-7224C49458BB}"/>
+                <c:ext xmlns:c15="http://schemas.microsoft.com/office/drawing/2012/chart" uri="{CE6537A1-D6FC-4f65-9D91-7224C49458BB}">
+                  <c15:layout/>
+                </c:ext>
                 <c:ext xmlns:c16="http://schemas.microsoft.com/office/drawing/2014/chart" uri="{C3380CC4-5D6E-409C-BE32-E72D297353CC}">
                   <c16:uniqueId val="{00000005-85B0-4F50-8D93-C0D0A16C4D50}"/>
                 </c:ext>
@@ -592,6 +605,7 @@
             </c:dLbl>
             <c:dLbl>
               <c:idx val="3"/>
+              <c:layout/>
               <c:numFmt formatCode="0%" sourceLinked="0"/>
               <c:spPr/>
               <c:txPr>
@@ -616,7 +630,9 @@
               <c:showPercent val="1"/>
               <c:showBubbleSize val="0"/>
               <c:extLst>
-                <c:ext xmlns:c15="http://schemas.microsoft.com/office/drawing/2012/chart" uri="{CE6537A1-D6FC-4f65-9D91-7224C49458BB}"/>
+                <c:ext xmlns:c15="http://schemas.microsoft.com/office/drawing/2012/chart" uri="{CE6537A1-D6FC-4f65-9D91-7224C49458BB}">
+                  <c15:layout/>
+                </c:ext>
                 <c:ext xmlns:c16="http://schemas.microsoft.com/office/drawing/2014/chart" uri="{C3380CC4-5D6E-409C-BE32-E72D297353CC}">
                   <c16:uniqueId val="{00000007-85B0-4F50-8D93-C0D0A16C4D50}"/>
                 </c:ext>
@@ -624,6 +640,7 @@
             </c:dLbl>
             <c:dLbl>
               <c:idx val="4"/>
+              <c:layout/>
               <c:numFmt formatCode="0%" sourceLinked="0"/>
               <c:spPr/>
               <c:txPr>
@@ -648,7 +665,9 @@
               <c:showPercent val="1"/>
               <c:showBubbleSize val="0"/>
               <c:extLst>
-                <c:ext xmlns:c15="http://schemas.microsoft.com/office/drawing/2012/chart" uri="{CE6537A1-D6FC-4f65-9D91-7224C49458BB}"/>
+                <c:ext xmlns:c15="http://schemas.microsoft.com/office/drawing/2012/chart" uri="{CE6537A1-D6FC-4f65-9D91-7224C49458BB}">
+                  <c15:layout/>
+                </c:ext>
                 <c:ext xmlns:c16="http://schemas.microsoft.com/office/drawing/2014/chart" uri="{C3380CC4-5D6E-409C-BE32-E72D297353CC}">
                   <c16:uniqueId val="{00000009-85B0-4F50-8D93-C0D0A16C4D50}"/>
                 </c:ext>
@@ -765,6 +784,7 @@
     </c:plotArea>
     <c:legend>
       <c:legendPos val="r"/>
+      <c:layout/>
       <c:overlay val="0"/>
       <c:txPr>
         <a:bodyPr/>
@@ -1761,7 +1781,15 @@
             <a:r>
               <a:rPr lang="en-US" dirty="0"/>
               <a:t>Analist bununla NE YAPIYOR? Soldaki grafik en somut cevap: üç ürün, üç ayrı bant, aralarında hiç çakışma yok. Konut yüzde 2,90'dan başlıyor, ihtiyaç 4,99'a çıkıyor. Bu tabloyu elle çıkarmak saatler sürerdi.
-Chatbot'ta aynı veri iki dille anlatılıyor: müşteriye sade, analiste pazar payı ve rakip boşluğu. Taksit tutarlarını biz hesaplamıyoruz — banka ne yayımladıysa o. (31 sn)</a:t>
+Chatbot'ta aynı </a:t>
+            </a:r>
+            <a:r>
+              <a:rPr lang="en-US" dirty="0" err="1"/>
+              <a:t>veri</a:t>
+            </a:r>
+            <a:r>
+              <a:rPr lang="en-US" dirty="0"/>
+              <a:t> iki dille anlatılıyor: müşteriye sade, analiste pazar payı ve rakip boşluğu. Taksit tutarlarını biz hesaplamıyoruz — banka ne yayımladıysa o. (31 sn)</a:t>
             </a:r>
           </a:p>
         </p:txBody>
@@ -2196,7 +2224,15 @@
           <a:p>
             <a:r>
               <a:rPr lang="en-US" dirty="0"/>
-              <a:t>NEDEN bir banka bunu kurabilir? Çünkü veri kurumdan hiç çıkmıyor — ve bunu iddia etmiyoruz, gösteriyoruz.
+              <a:t>NEDEN bir banka bunu kurabilir? Çünkü </a:t>
+            </a:r>
+            <a:r>
+              <a:rPr lang="en-US" dirty="0" err="1"/>
+              <a:t>veri</a:t>
+            </a:r>
+            <a:r>
+              <a:rPr lang="en-US" dirty="0"/>
+              <a:t> kurumdan hiç çıkmıyor — ve bunu iddia etmiyoruz, gösteriyoruz.
 Python'un ağ katmanını yamaladık; localhost dışına çıkan her bağlantı hata veriyor. Sonra şartnamenin KENDİ örnek metnini işledik. Sonuç ekranda: tek bir dış çağrı yapılmadan hepsi doğru çıkarıldı.
 Bir banka için bu pazarlama cümlesi değil, satın alma şartı. (40 sn)</a:t>
             </a:r>
@@ -2307,7 +2343,7 @@
           <a:p>
             <a:fld id="{F7021451-1387-4CA6-816F-3879F97B5CBC}" type="slidenum">
               <a:rPr lang="en-US"/>
-              <a:t>23</a:t>
+              <a:t>25</a:t>
             </a:fld>
             <a:endParaRPr lang="en-US"/>
           </a:p>
@@ -2317,6 +2353,103 @@
     <p:extLst>
       <p:ext uri="{BB962C8B-B14F-4D97-AF65-F5344CB8AC3E}">
         <p14:creationId xmlns:p14="http://schemas.microsoft.com/office/powerpoint/2010/main" val="1024086991"/>
+      </p:ext>
+    </p:extLst>
+  </p:cSld>
+  <p:clrMapOvr>
+    <a:masterClrMapping/>
+  </p:clrMapOvr>
+</p:notes>
+</file>
+
+<file path=ppt/notesSlides/notesSlide24.xml><?xml version="1.0" encoding="utf-8"?>
+<p:notes xmlns:a="http://schemas.openxmlformats.org/drawingml/2006/main" xmlns:r="http://schemas.openxmlformats.org/officeDocument/2006/relationships" xmlns:p="http://schemas.openxmlformats.org/presentationml/2006/main">
+  <p:cSld>
+    <p:spTree>
+      <p:nvGrpSpPr>
+        <p:cNvPr id="1" name=""/>
+        <p:cNvGrpSpPr/>
+        <p:nvPr/>
+      </p:nvGrpSpPr>
+      <p:grpSpPr>
+        <a:xfrm>
+          <a:off x="0" y="0"/>
+          <a:ext cx="0" cy="0"/>
+          <a:chOff x="0" y="0"/>
+          <a:chExt cx="0" cy="0"/>
+        </a:xfrm>
+      </p:grpSpPr>
+      <p:sp>
+        <p:nvSpPr>
+          <p:cNvPr id="2" name="Slide Image Placeholder 1"/>
+          <p:cNvSpPr>
+            <a:spLocks noGrp="1" noRot="1" noChangeAspect="1"/>
+          </p:cNvSpPr>
+          <p:nvPr>
+            <p:ph type="sldImg"/>
+          </p:nvPr>
+        </p:nvSpPr>
+        <p:spPr/>
+      </p:sp>
+      <p:sp>
+        <p:nvSpPr>
+          <p:cNvPr id="3" name="Notes Placeholder 2"/>
+          <p:cNvSpPr>
+            <a:spLocks noGrp="1"/>
+          </p:cNvSpPr>
+          <p:nvPr>
+            <p:ph type="body" idx="1"/>
+          </p:nvPr>
+        </p:nvSpPr>
+        <p:spPr/>
+        <p:txBody>
+          <a:bodyPr/>
+          <a:lstStyle/>
+          <a:p>
+            <a:r>
+              <a:rPr lang="en-US" dirty="0"/>
+              <a:t>NEDEN bir banka bunu kurabilir? Çünkü </a:t>
+            </a:r>
+            <a:r>
+              <a:rPr lang="en-US" dirty="0" err="1"/>
+              <a:t>veri</a:t>
+            </a:r>
+            <a:r>
+              <a:rPr lang="en-US" dirty="0"/>
+              <a:t> kurumdan hiç çıkmıyor — ve bunu iddia etmiyoruz, gösteriyoruz.
+Python'un ağ katmanını yamaladık; localhost dışına çıkan her bağlantı hata veriyor. Sonra şartnamenin KENDİ örnek metnini işledik. Sonuç ekranda: tek bir dış çağrı yapılmadan hepsi doğru çıkarıldı.
+Bir banka için bu pazarlama cümlesi değil, satın alma şartı. (40 sn)</a:t>
+            </a:r>
+          </a:p>
+        </p:txBody>
+      </p:sp>
+      <p:sp>
+        <p:nvSpPr>
+          <p:cNvPr id="4" name="Slide Number Placeholder 3"/>
+          <p:cNvSpPr>
+            <a:spLocks noGrp="1"/>
+          </p:cNvSpPr>
+          <p:nvPr>
+            <p:ph type="sldNum" sz="quarter" idx="10"/>
+          </p:nvPr>
+        </p:nvSpPr>
+        <p:spPr/>
+        <p:txBody>
+          <a:bodyPr/>
+          <a:lstStyle/>
+          <a:p>
+            <a:fld id="{F7021451-1387-4CA6-816F-3879F97B5CBC}" type="slidenum">
+              <a:rPr lang="en-US"/>
+              <a:t>26</a:t>
+            </a:fld>
+            <a:endParaRPr lang="en-US"/>
+          </a:p>
+        </p:txBody>
+      </p:sp>
+    </p:spTree>
+    <p:extLst>
+      <p:ext uri="{BB962C8B-B14F-4D97-AF65-F5344CB8AC3E}">
+        <p14:creationId xmlns:p14="http://schemas.microsoft.com/office/powerpoint/2010/main" val="2165973566"/>
       </p:ext>
     </p:extLst>
   </p:cSld>
@@ -2547,7 +2680,15 @@
           <a:p>
             <a:r>
               <a:rPr lang="en-US" dirty="0"/>
-              <a:t>NEDEN sadece kazımak yetmiyor? Çünkü veri dengesiz. Dokuz bankadan 599 kampanya topladık, ama sağdaki halkaya bakın: portföyün yüzde 81'i kart kampanyası ve kart kampanyaları kâr payı oranı yayımlamaz.
+              <a:t>NEDEN sadece kazımak yetmiyor? Çünkü </a:t>
+            </a:r>
+            <a:r>
+              <a:rPr lang="en-US" dirty="0" err="1"/>
+              <a:t>veri</a:t>
+            </a:r>
+            <a:r>
+              <a:rPr lang="en-US" dirty="0"/>
+              <a:t> dengesiz. Dokuz bankadan 599 kampanya topladık, ama sağdaki halkaya bakın: portföyün yüzde 81'i kart kampanyası ve kart kampanyaları kâr payı oranı yayımlamaz.
 Yani doğru bilgiyi bulmak için metni gerçekten ANLAMAK gerekiyor — nerede oran var, nerede yok. (25 sn)</a:t>
             </a:r>
           </a:p>
@@ -4414,6 +4555,13 @@
       </p:transition>
     </mc:Fallback>
   </mc:AlternateContent>
+  <p:timing>
+    <p:tnLst>
+      <p:par>
+        <p:cTn id="1" dur="indefinite" restart="never" nodeType="tmRoot"/>
+      </p:par>
+    </p:tnLst>
+  </p:timing>
 </p:sld>
 </file>
 
@@ -4570,8 +4718,8 @@
         </p:nvSpPr>
         <p:spPr>
           <a:xfrm>
-            <a:off x="749808" y="2286000"/>
-            <a:ext cx="10689336" cy="2011680"/>
+            <a:off x="2761488" y="2347831"/>
+            <a:ext cx="6852775" cy="2011680"/>
           </a:xfrm>
           <a:prstGeom prst="rect">
             <a:avLst/>
@@ -4587,15 +4735,14 @@
               <a:buNone/>
             </a:pPr>
             <a:r>
-              <a:rPr lang="en-US" sz="6000" dirty="0">
+              <a:rPr lang="tr-TR" sz="6000" dirty="0" smtClean="0">
                 <a:solidFill>
                   <a:srgbClr val="0F172A"/>
                 </a:solidFill>
                 <a:latin typeface="Segoe UI Black" pitchFamily="34" charset="0"/>
                 <a:ea typeface="Segoe UI Black" pitchFamily="34" charset="-122"/>
-                <a:cs typeface="Segoe UI Black" pitchFamily="34" charset="-120"/>
-              </a:rPr>
-              <a:t>Neden bu sayıya güvenelim?</a:t>
+              </a:rPr>
+              <a:t>Veri Güvenilirliği </a:t>
             </a:r>
             <a:endParaRPr lang="en-US" sz="6000" dirty="0"/>
           </a:p>
@@ -4644,6 +4791,13 @@
       </p:transition>
     </mc:Fallback>
   </mc:AlternateContent>
+  <p:timing>
+    <p:tnLst>
+      <p:par>
+        <p:cTn id="1" dur="indefinite" restart="never" nodeType="tmRoot"/>
+      </p:par>
+    </p:tnLst>
+  </p:timing>
 </p:sld>
 </file>
 
@@ -4865,7 +5019,7 @@
         </p:nvSpPr>
         <p:spPr>
           <a:xfrm>
-            <a:off x="749808" y="932688"/>
+            <a:off x="758517" y="932688"/>
             <a:ext cx="10689336" cy="658368"/>
           </a:xfrm>
           <a:prstGeom prst="rect">
@@ -4882,15 +5036,14 @@
               <a:buNone/>
             </a:pPr>
             <a:r>
-              <a:rPr lang="en-US" sz="3700" dirty="0">
+              <a:rPr lang="tr-TR" sz="3700" dirty="0" smtClean="0">
                 <a:solidFill>
                   <a:srgbClr val="171717"/>
                 </a:solidFill>
                 <a:latin typeface="Segoe UI Semibold" pitchFamily="34" charset="0"/>
-                <a:ea typeface="Segoe UI Semibold" pitchFamily="34" charset="-122"/>
                 <a:cs typeface="Segoe UI Semibold" pitchFamily="34" charset="-120"/>
               </a:rPr>
-              <a:t>Her değerin kaynağı görünür</a:t>
+              <a:t>Kampanya Kanıt Gösterimi</a:t>
             </a:r>
             <a:endParaRPr lang="en-US" sz="3700" dirty="0"/>
           </a:p>
@@ -4929,7 +5082,40 @@
                 <a:ea typeface="Segoe UI" pitchFamily="34" charset="-122"/>
                 <a:cs typeface="Segoe UI" pitchFamily="34" charset="-120"/>
               </a:rPr>
-              <a:t>Çoğu NLP çözümü sonucu verir ve “güven bana” der. Biz metnin hangi ifadesinden, hangi yöntemle, ne güvenle çıkardığımızı da gösteriyoruz.</a:t>
+              <a:t>Çoğu NLP çözümü </a:t>
+            </a:r>
+            <a:r>
+              <a:rPr lang="tr-TR" sz="1450" dirty="0" smtClean="0">
+                <a:solidFill>
+                  <a:srgbClr val="525252"/>
+                </a:solidFill>
+                <a:latin typeface="Segoe UI" pitchFamily="34" charset="0"/>
+                <a:ea typeface="Segoe UI" pitchFamily="34" charset="-122"/>
+                <a:cs typeface="Segoe UI" pitchFamily="34" charset="-120"/>
+              </a:rPr>
+              <a:t>sadece </a:t>
+            </a:r>
+            <a:r>
+              <a:rPr lang="en-US" sz="1450" dirty="0" smtClean="0">
+                <a:solidFill>
+                  <a:srgbClr val="525252"/>
+                </a:solidFill>
+                <a:latin typeface="Segoe UI" pitchFamily="34" charset="0"/>
+                <a:ea typeface="Segoe UI" pitchFamily="34" charset="-122"/>
+                <a:cs typeface="Segoe UI" pitchFamily="34" charset="-120"/>
+              </a:rPr>
+              <a:t>sonucu verir. </a:t>
+            </a:r>
+            <a:r>
+              <a:rPr lang="en-US" sz="1450" dirty="0">
+                <a:solidFill>
+                  <a:srgbClr val="525252"/>
+                </a:solidFill>
+                <a:latin typeface="Segoe UI" pitchFamily="34" charset="0"/>
+                <a:ea typeface="Segoe UI" pitchFamily="34" charset="-122"/>
+                <a:cs typeface="Segoe UI" pitchFamily="34" charset="-120"/>
+              </a:rPr>
+              <a:t>Biz metnin hangi ifadesinden, hangi yöntemle, ne güvenle çıkardığımızı da gösteriyoruz.</a:t>
             </a:r>
             <a:endParaRPr lang="en-US" sz="1450" dirty="0"/>
           </a:p>
@@ -5889,6 +6075,13 @@
       </p:transition>
     </mc:Fallback>
   </mc:AlternateContent>
+  <p:timing>
+    <p:tnLst>
+      <p:par>
+        <p:cTn id="1" dur="indefinite" restart="never" nodeType="tmRoot"/>
+      </p:par>
+    </p:tnLst>
+  </p:timing>
 </p:sld>
 </file>
 
@@ -6442,7 +6635,7 @@
                                   <p:childTnLst>
                                     <p:cmd type="call" cmd="playFrom(0.0)">
                                       <p:cBhvr>
-                                        <p:cTn id="6" dur="1" fill="hold"/>
+                                        <p:cTn id="6" dur="4559" fill="hold"/>
                                         <p:tgtEl>
                                           <p:spTgt spid="12"/>
                                         </p:tgtEl>
@@ -7102,7 +7295,7 @@
                                   <p:childTnLst>
                                     <p:cmd type="call" cmd="playFrom(0.0)">
                                       <p:cBhvr>
-                                        <p:cTn id="6" dur="1" fill="hold"/>
+                                        <p:cTn id="6" dur="2240" fill="hold"/>
                                         <p:tgtEl>
                                           <p:spTgt spid="12"/>
                                         </p:tgtEl>
@@ -7517,6 +7710,13 @@
       </p:transition>
     </mc:Fallback>
   </mc:AlternateContent>
+  <p:timing>
+    <p:tnLst>
+      <p:par>
+        <p:cTn id="1" dur="indefinite" restart="never" nodeType="tmRoot"/>
+      </p:par>
+    </p:tnLst>
+  </p:timing>
 </p:sld>
 </file>
 
@@ -7755,15 +7955,14 @@
               <a:buNone/>
             </a:pPr>
             <a:r>
-              <a:rPr lang="en-US" sz="3700" dirty="0">
+              <a:rPr lang="tr-TR" sz="3700" dirty="0" smtClean="0">
                 <a:solidFill>
                   <a:srgbClr val="171717"/>
                 </a:solidFill>
                 <a:latin typeface="Segoe UI Semibold" pitchFamily="34" charset="0"/>
-                <a:ea typeface="Segoe UI Semibold" pitchFamily="34" charset="-122"/>
                 <a:cs typeface="Segoe UI Semibold" pitchFamily="34" charset="-120"/>
               </a:rPr>
-              <a:t>İddia etmiyoruz, ölçüyoruz</a:t>
+              <a:t>Doğruluk</a:t>
             </a:r>
             <a:endParaRPr lang="en-US" sz="3700" dirty="0"/>
           </a:p>
@@ -8562,6 +8761,13 @@
       </p:transition>
     </mc:Fallback>
   </mc:AlternateContent>
+  <p:timing>
+    <p:tnLst>
+      <p:par>
+        <p:cTn id="1" dur="indefinite" restart="never" nodeType="tmRoot"/>
+      </p:par>
+    </p:tnLst>
+  </p:timing>
 </p:sld>
 </file>
 
@@ -8718,7 +8924,7 @@
         </p:nvSpPr>
         <p:spPr>
           <a:xfrm>
-            <a:off x="749808" y="2286000"/>
+            <a:off x="1179576" y="2395728"/>
             <a:ext cx="10689336" cy="2011680"/>
           </a:xfrm>
           <a:prstGeom prst="rect">
@@ -8735,7 +8941,7 @@
               <a:buNone/>
             </a:pPr>
             <a:r>
-              <a:rPr lang="en-US" sz="6000" dirty="0">
+              <a:rPr lang="tr-TR" sz="6000" dirty="0" smtClean="0">
                 <a:solidFill>
                   <a:srgbClr val="0F172A"/>
                 </a:solidFill>
@@ -8743,7 +8949,7 @@
                 <a:ea typeface="Segoe UI Black" pitchFamily="34" charset="-122"/>
                 <a:cs typeface="Segoe UI Black" pitchFamily="34" charset="-120"/>
               </a:rPr>
-              <a:t>Analist bununla ne yapıyor?</a:t>
+              <a:t>Kullanıcılara Nasıl Yardım Sağlarız</a:t>
             </a:r>
             <a:endParaRPr lang="en-US" sz="6000" dirty="0"/>
           </a:p>
@@ -8792,6 +8998,13 @@
       </p:transition>
     </mc:Fallback>
   </mc:AlternateContent>
+  <p:timing>
+    <p:tnLst>
+      <p:par>
+        <p:cTn id="1" dur="indefinite" restart="never" nodeType="tmRoot"/>
+      </p:par>
+    </p:tnLst>
+  </p:timing>
 </p:sld>
 </file>
 
@@ -10519,6 +10732,13 @@
       </p:transition>
     </mc:Fallback>
   </mc:AlternateContent>
+  <p:timing>
+    <p:tnLst>
+      <p:par>
+        <p:cTn id="1" dur="indefinite" restart="never" nodeType="tmRoot"/>
+      </p:par>
+    </p:tnLst>
+  </p:timing>
 </p:sld>
 </file>
 
@@ -11335,7 +11555,7 @@
         </p:nvSpPr>
         <p:spPr>
           <a:xfrm>
-            <a:off x="749808" y="2286000"/>
+            <a:off x="1502664" y="2395728"/>
             <a:ext cx="10689336" cy="2011680"/>
           </a:xfrm>
           <a:prstGeom prst="rect">
@@ -11352,15 +11572,14 @@
               <a:buNone/>
             </a:pPr>
             <a:r>
-              <a:rPr lang="en-US" sz="6000" dirty="0">
+              <a:rPr lang="tr-TR" sz="6000" dirty="0" smtClean="0">
                 <a:solidFill>
                   <a:srgbClr val="0F172A"/>
                 </a:solidFill>
                 <a:latin typeface="Segoe UI Black" pitchFamily="34" charset="0"/>
                 <a:ea typeface="Segoe UI Black" pitchFamily="34" charset="-122"/>
-                <a:cs typeface="Segoe UI Black" pitchFamily="34" charset="-120"/>
-              </a:rPr>
-              <a:t>Neden bu iş hâlâ elle yapılıyor?</a:t>
+              </a:rPr>
+              <a:t>Kampanya Erişilebilirliği</a:t>
             </a:r>
             <a:endParaRPr lang="en-US" sz="6000" dirty="0"/>
           </a:p>
@@ -11409,6 +11628,13 @@
       </p:transition>
     </mc:Fallback>
   </mc:AlternateContent>
+  <p:timing>
+    <p:tnLst>
+      <p:par>
+        <p:cTn id="1" dur="indefinite" restart="never" nodeType="tmRoot"/>
+      </p:par>
+    </p:tnLst>
+  </p:timing>
 </p:sld>
 </file>
 
@@ -11621,7 +11847,7 @@
               <a:buNone/>
             </a:pPr>
             <a:r>
-              <a:rPr lang="en-US" sz="3300" dirty="0">
+              <a:rPr lang="en-US" sz="3300" dirty="0" err="1" smtClean="0">
                 <a:solidFill>
                   <a:srgbClr val="171717"/>
                 </a:solidFill>
@@ -11629,7 +11855,29 @@
                 <a:ea typeface="Segoe UI Semibold" pitchFamily="34" charset="-122"/>
                 <a:cs typeface="Segoe UI Semibold" pitchFamily="34" charset="-120"/>
               </a:rPr>
-              <a:t>Yorum da raporun içinde</a:t>
+              <a:t>Yorum</a:t>
+            </a:r>
+            <a:r>
+              <a:rPr lang="en-US" sz="3300" dirty="0" smtClean="0">
+                <a:solidFill>
+                  <a:srgbClr val="171717"/>
+                </a:solidFill>
+                <a:latin typeface="Segoe UI Semibold" pitchFamily="34" charset="0"/>
+                <a:ea typeface="Segoe UI Semibold" pitchFamily="34" charset="-122"/>
+                <a:cs typeface="Segoe UI Semibold" pitchFamily="34" charset="-120"/>
+              </a:rPr>
+              <a:t> </a:t>
+            </a:r>
+            <a:r>
+              <a:rPr lang="en-US" sz="3300" dirty="0">
+                <a:solidFill>
+                  <a:srgbClr val="171717"/>
+                </a:solidFill>
+                <a:latin typeface="Segoe UI Semibold" pitchFamily="34" charset="0"/>
+                <a:ea typeface="Segoe UI Semibold" pitchFamily="34" charset="-122"/>
+                <a:cs typeface="Segoe UI Semibold" pitchFamily="34" charset="-120"/>
+              </a:rPr>
+              <a:t>raporun içinde</a:t>
             </a:r>
             <a:endParaRPr lang="en-US" sz="3300" dirty="0"/>
           </a:p>
@@ -11643,7 +11891,7 @@
         </p:nvSpPr>
         <p:spPr>
           <a:xfrm>
-            <a:off x="749808" y="2871216"/>
+            <a:off x="781812" y="2374828"/>
             <a:ext cx="4224528" cy="1920240"/>
           </a:xfrm>
           <a:prstGeom prst="rect">
@@ -12225,7 +12473,7 @@
         </p:nvSpPr>
         <p:spPr>
           <a:xfrm>
-            <a:off x="749808" y="2286000"/>
+            <a:off x="2047385" y="2373957"/>
             <a:ext cx="10689336" cy="2011680"/>
           </a:xfrm>
           <a:prstGeom prst="rect">
@@ -12354,6 +12602,13 @@
       </p:transition>
     </mc:Fallback>
   </mc:AlternateContent>
+  <p:timing>
+    <p:tnLst>
+      <p:par>
+        <p:cTn id="1" dur="indefinite" restart="never" nodeType="tmRoot"/>
+      </p:par>
+    </p:tnLst>
+  </p:timing>
 </p:sld>
 </file>
 
@@ -13577,10 +13832,150 @@
       </p:transition>
     </mc:Fallback>
   </mc:AlternateContent>
+  <p:timing>
+    <p:tnLst>
+      <p:par>
+        <p:cTn id="1" dur="indefinite" restart="never" nodeType="tmRoot"/>
+      </p:par>
+    </p:tnLst>
+  </p:timing>
 </p:sld>
 </file>
 
 <file path=ppt/slides/slide23.xml><?xml version="1.0" encoding="utf-8"?>
+<p:sld xmlns:a="http://schemas.openxmlformats.org/drawingml/2006/main" xmlns:r="http://schemas.openxmlformats.org/officeDocument/2006/relationships" xmlns:p="http://schemas.openxmlformats.org/presentationml/2006/main">
+  <p:cSld>
+    <p:spTree>
+      <p:nvGrpSpPr>
+        <p:cNvPr id="1" name=""/>
+        <p:cNvGrpSpPr/>
+        <p:nvPr/>
+      </p:nvGrpSpPr>
+      <p:grpSpPr>
+        <a:xfrm>
+          <a:off x="0" y="0"/>
+          <a:ext cx="0" cy="0"/>
+          <a:chOff x="0" y="0"/>
+          <a:chExt cx="0" cy="0"/>
+        </a:xfrm>
+      </p:grpSpPr>
+      <p:pic>
+        <p:nvPicPr>
+          <p:cNvPr id="2" name="Resim 1"/>
+          <p:cNvPicPr>
+            <a:picLocks noChangeAspect="1"/>
+          </p:cNvPicPr>
+          <p:nvPr/>
+        </p:nvPicPr>
+        <p:blipFill rotWithShape="1">
+          <a:blip r:embed="rId2">
+            <a:extLst>
+              <a:ext uri="{28A0092B-C50C-407E-A947-70E740481C1C}">
+                <a14:useLocalDpi xmlns:a14="http://schemas.microsoft.com/office/drawing/2010/main" val="0"/>
+              </a:ext>
+            </a:extLst>
+          </a:blip>
+          <a:srcRect l="5705" t="10052" r="428" b="551"/>
+          <a:stretch/>
+        </p:blipFill>
+        <p:spPr>
+          <a:xfrm>
+            <a:off x="0" y="322217"/>
+            <a:ext cx="12758318" cy="6296297"/>
+          </a:xfrm>
+          <a:prstGeom prst="rect">
+            <a:avLst/>
+          </a:prstGeom>
+        </p:spPr>
+      </p:pic>
+    </p:spTree>
+    <p:extLst>
+      <p:ext uri="{BB962C8B-B14F-4D97-AF65-F5344CB8AC3E}">
+        <p14:creationId xmlns:p14="http://schemas.microsoft.com/office/powerpoint/2010/main" val="2388878720"/>
+      </p:ext>
+    </p:extLst>
+  </p:cSld>
+  <p:clrMapOvr>
+    <a:masterClrMapping/>
+  </p:clrMapOvr>
+  <p:timing>
+    <p:tnLst>
+      <p:par>
+        <p:cTn id="1" dur="indefinite" restart="never" nodeType="tmRoot"/>
+      </p:par>
+    </p:tnLst>
+  </p:timing>
+</p:sld>
+</file>
+
+<file path=ppt/slides/slide24.xml><?xml version="1.0" encoding="utf-8"?>
+<p:sld xmlns:a="http://schemas.openxmlformats.org/drawingml/2006/main" xmlns:r="http://schemas.openxmlformats.org/officeDocument/2006/relationships" xmlns:p="http://schemas.openxmlformats.org/presentationml/2006/main">
+  <p:cSld>
+    <p:spTree>
+      <p:nvGrpSpPr>
+        <p:cNvPr id="1" name=""/>
+        <p:cNvGrpSpPr/>
+        <p:nvPr/>
+      </p:nvGrpSpPr>
+      <p:grpSpPr>
+        <a:xfrm>
+          <a:off x="0" y="0"/>
+          <a:ext cx="0" cy="0"/>
+          <a:chOff x="0" y="0"/>
+          <a:chExt cx="0" cy="0"/>
+        </a:xfrm>
+      </p:grpSpPr>
+      <p:pic>
+        <p:nvPicPr>
+          <p:cNvPr id="2" name="Resim 1"/>
+          <p:cNvPicPr>
+            <a:picLocks noChangeAspect="1"/>
+          </p:cNvPicPr>
+          <p:nvPr/>
+        </p:nvPicPr>
+        <p:blipFill>
+          <a:blip r:embed="rId2">
+            <a:extLst>
+              <a:ext uri="{28A0092B-C50C-407E-A947-70E740481C1C}">
+                <a14:useLocalDpi xmlns:a14="http://schemas.microsoft.com/office/drawing/2010/main" val="0"/>
+              </a:ext>
+            </a:extLst>
+          </a:blip>
+          <a:stretch>
+            <a:fillRect/>
+          </a:stretch>
+        </p:blipFill>
+        <p:spPr>
+          <a:xfrm>
+            <a:off x="505097" y="0"/>
+            <a:ext cx="11086012" cy="6858000"/>
+          </a:xfrm>
+          <a:prstGeom prst="rect">
+            <a:avLst/>
+          </a:prstGeom>
+        </p:spPr>
+      </p:pic>
+    </p:spTree>
+    <p:extLst>
+      <p:ext uri="{BB962C8B-B14F-4D97-AF65-F5344CB8AC3E}">
+        <p14:creationId xmlns:p14="http://schemas.microsoft.com/office/powerpoint/2010/main" val="153521528"/>
+      </p:ext>
+    </p:extLst>
+  </p:cSld>
+  <p:clrMapOvr>
+    <a:masterClrMapping/>
+  </p:clrMapOvr>
+  <p:timing>
+    <p:tnLst>
+      <p:par>
+        <p:cTn id="1" dur="indefinite" restart="never" nodeType="tmRoot"/>
+      </p:par>
+    </p:tnLst>
+  </p:timing>
+</p:sld>
+</file>
+
+<file path=ppt/slides/slide25.xml><?xml version="1.0" encoding="utf-8"?>
 <p:sld xmlns:a="http://schemas.openxmlformats.org/drawingml/2006/main" xmlns:r="http://schemas.openxmlformats.org/officeDocument/2006/relationships" xmlns:p="http://schemas.openxmlformats.org/presentationml/2006/main">
   <p:cSld name="Slide 20">
     <p:bg>
@@ -14157,6 +14552,724 @@
   <mc:AlternateContent xmlns:mc="http://schemas.openxmlformats.org/markup-compatibility/2006">
     <mc:Choice xmlns:p159="http://schemas.microsoft.com/office/powerpoint/2015/09/main" xmlns="" Requires="p159">
       <p:transition xmlns:p14="http://schemas.microsoft.com/office/powerpoint/2010/main" spd="slow" p14:dur="1500">
+        <p159:morph option="byObject"/>
+      </p:transition>
+    </mc:Choice>
+    <mc:Fallback>
+      <p:transition spd="med">
+        <p:fade/>
+      </p:transition>
+    </mc:Fallback>
+  </mc:AlternateContent>
+  <p:timing>
+    <p:tnLst>
+      <p:par>
+        <p:cTn id="1" dur="indefinite" restart="never" nodeType="tmRoot"/>
+      </p:par>
+    </p:tnLst>
+  </p:timing>
+</p:sld>
+</file>
+
+<file path=ppt/slides/slide26.xml><?xml version="1.0" encoding="utf-8"?>
+<p:sld xmlns:a="http://schemas.openxmlformats.org/drawingml/2006/main" xmlns:r="http://schemas.openxmlformats.org/officeDocument/2006/relationships" xmlns:p="http://schemas.openxmlformats.org/presentationml/2006/main">
+  <p:cSld>
+    <p:bg>
+      <p:bgPr>
+        <a:blipFill dpi="0" rotWithShape="1">
+          <a:blip r:embed="rId3">
+            <a:lum/>
+          </a:blip>
+          <a:srcRect/>
+          <a:stretch>
+            <a:fillRect/>
+          </a:stretch>
+        </a:blipFill>
+        <a:effectLst/>
+      </p:bgPr>
+    </p:bg>
+    <p:spTree>
+      <p:nvGrpSpPr>
+        <p:cNvPr id="1" name=""/>
+        <p:cNvGrpSpPr/>
+        <p:nvPr/>
+      </p:nvGrpSpPr>
+      <p:grpSpPr>
+        <a:xfrm>
+          <a:off x="0" y="0"/>
+          <a:ext cx="0" cy="0"/>
+          <a:chOff x="0" y="0"/>
+          <a:chExt cx="0" cy="0"/>
+        </a:xfrm>
+      </p:grpSpPr>
+      <p:sp>
+        <p:nvSpPr>
+          <p:cNvPr id="35" name="mrf_madde0"/>
+          <p:cNvSpPr/>
+          <p:nvPr/>
+        </p:nvSpPr>
+        <p:spPr>
+          <a:xfrm>
+            <a:off x="745236" y="3527625"/>
+            <a:ext cx="5349240" cy="1170432"/>
+          </a:xfrm>
+          <a:prstGeom prst="roundRect">
+            <a:avLst>
+              <a:gd name="adj" fmla="val 11429"/>
+            </a:avLst>
+          </a:prstGeom>
+          <a:solidFill>
+            <a:schemeClr val="accent1">
+              <a:lumMod val="20000"/>
+              <a:lumOff val="80000"/>
+            </a:schemeClr>
+          </a:solidFill>
+          <a:ln w="12700">
+            <a:solidFill>
+              <a:srgbClr val="A7F3D0"/>
+            </a:solidFill>
+            <a:prstDash val="solid"/>
+          </a:ln>
+        </p:spPr>
+      </p:sp>
+      <p:sp>
+        <p:nvSpPr>
+          <p:cNvPr id="9" name="mrf_madde0"/>
+          <p:cNvSpPr/>
+          <p:nvPr/>
+        </p:nvSpPr>
+        <p:spPr>
+          <a:xfrm>
+            <a:off x="745236" y="1990344"/>
+            <a:ext cx="5349240" cy="1170432"/>
+          </a:xfrm>
+          <a:prstGeom prst="roundRect">
+            <a:avLst>
+              <a:gd name="adj" fmla="val 11429"/>
+            </a:avLst>
+          </a:prstGeom>
+          <a:solidFill>
+            <a:schemeClr val="accent1">
+              <a:lumMod val="20000"/>
+              <a:lumOff val="80000"/>
+            </a:schemeClr>
+          </a:solidFill>
+          <a:ln w="12700">
+            <a:solidFill>
+              <a:srgbClr val="A7F3D0"/>
+            </a:solidFill>
+            <a:prstDash val="solid"/>
+          </a:ln>
+        </p:spPr>
+      </p:sp>
+      <p:sp>
+        <p:nvSpPr>
+          <p:cNvPr id="15" name="mrf_madde2"/>
+          <p:cNvSpPr/>
+          <p:nvPr/>
+        </p:nvSpPr>
+        <p:spPr>
+          <a:xfrm>
+            <a:off x="6360086" y="1982506"/>
+            <a:ext cx="5349240" cy="1170868"/>
+          </a:xfrm>
+          <a:prstGeom prst="roundRect">
+            <a:avLst>
+              <a:gd name="adj" fmla="val 11429"/>
+            </a:avLst>
+          </a:prstGeom>
+          <a:solidFill>
+            <a:schemeClr val="accent1">
+              <a:lumMod val="20000"/>
+              <a:lumOff val="80000"/>
+            </a:schemeClr>
+          </a:solidFill>
+          <a:ln w="12700">
+            <a:solidFill>
+              <a:srgbClr val="A7F3D0"/>
+            </a:solidFill>
+            <a:prstDash val="solid"/>
+          </a:ln>
+        </p:spPr>
+        <p:txBody>
+          <a:bodyPr/>
+          <a:lstStyle/>
+          <a:p>
+            <a:endParaRPr lang="tr-TR" dirty="0"/>
+          </a:p>
+        </p:txBody>
+      </p:sp>
+      <p:pic>
+        <p:nvPicPr>
+          <p:cNvPr id="3" name="mrf_logo" descr="logo.png"/>
+          <p:cNvPicPr>
+            <a:picLocks noChangeAspect="1"/>
+          </p:cNvPicPr>
+          <p:nvPr/>
+        </p:nvPicPr>
+        <p:blipFill>
+          <a:blip r:embed="rId4">
+            <a:alphaModFix amt="88000"/>
+          </a:blip>
+          <a:stretch>
+            <a:fillRect/>
+          </a:stretch>
+        </p:blipFill>
+        <p:spPr>
+          <a:xfrm>
+            <a:off x="9957816" y="6144768"/>
+            <a:ext cx="1481328" cy="457200"/>
+          </a:xfrm>
+          <a:prstGeom prst="rect">
+            <a:avLst/>
+          </a:prstGeom>
+        </p:spPr>
+      </p:pic>
+      <p:sp>
+        <p:nvSpPr>
+          <p:cNvPr id="4" name="mrf_marka0"/>
+          <p:cNvSpPr/>
+          <p:nvPr/>
+        </p:nvSpPr>
+        <p:spPr>
+          <a:xfrm>
+            <a:off x="749808" y="457200"/>
+            <a:ext cx="118872" cy="118872"/>
+          </a:xfrm>
+          <a:prstGeom prst="rect">
+            <a:avLst/>
+          </a:prstGeom>
+          <a:solidFill>
+            <a:srgbClr val="2563EB"/>
+          </a:solidFill>
+          <a:ln w="12700">
+            <a:solidFill>
+              <a:srgbClr val="2563EB"/>
+            </a:solidFill>
+            <a:prstDash val="solid"/>
+          </a:ln>
+        </p:spPr>
+      </p:sp>
+      <p:sp>
+        <p:nvSpPr>
+          <p:cNvPr id="5" name="mrf_marka1"/>
+          <p:cNvSpPr/>
+          <p:nvPr/>
+        </p:nvSpPr>
+        <p:spPr>
+          <a:xfrm>
+            <a:off x="905256" y="457200"/>
+            <a:ext cx="118872" cy="118872"/>
+          </a:xfrm>
+          <a:prstGeom prst="rect">
+            <a:avLst/>
+          </a:prstGeom>
+          <a:solidFill>
+            <a:srgbClr val="06B6D4"/>
+          </a:solidFill>
+          <a:ln w="12700">
+            <a:solidFill>
+              <a:srgbClr val="06B6D4"/>
+            </a:solidFill>
+            <a:prstDash val="solid"/>
+          </a:ln>
+        </p:spPr>
+      </p:sp>
+      <p:sp>
+        <p:nvSpPr>
+          <p:cNvPr id="6" name="mrf_marka2"/>
+          <p:cNvSpPr/>
+          <p:nvPr/>
+        </p:nvSpPr>
+        <p:spPr>
+          <a:xfrm>
+            <a:off x="1060704" y="457200"/>
+            <a:ext cx="118872" cy="118872"/>
+          </a:xfrm>
+          <a:prstGeom prst="rect">
+            <a:avLst/>
+          </a:prstGeom>
+          <a:solidFill>
+            <a:srgbClr val="6366F1"/>
+          </a:solidFill>
+          <a:ln w="12700">
+            <a:solidFill>
+              <a:srgbClr val="6366F1"/>
+            </a:solidFill>
+            <a:prstDash val="solid"/>
+          </a:ln>
+        </p:spPr>
+      </p:sp>
+      <p:sp>
+        <p:nvSpPr>
+          <p:cNvPr id="7" name="mrf_soruKucuk"/>
+          <p:cNvSpPr txBox="1"/>
+          <p:nvPr/>
+        </p:nvSpPr>
+        <p:spPr>
+          <a:xfrm>
+            <a:off x="1497875" y="364889"/>
+            <a:ext cx="10030968" cy="274320"/>
+          </a:xfrm>
+          <a:prstGeom prst="rect">
+            <a:avLst/>
+          </a:prstGeom>
+          <a:noFill/>
+          <a:ln/>
+        </p:spPr>
+        <p:txBody>
+          <a:bodyPr wrap="square" lIns="0" tIns="0" rIns="0" bIns="0" rtlCol="0" anchor="ctr"/>
+          <a:lstStyle/>
+          <a:p>
+            <a:pPr marL="0" indent="0" algn="l">
+              <a:buNone/>
+            </a:pPr>
+            <a:r>
+              <a:rPr lang="en-US" sz="1350" dirty="0">
+                <a:solidFill>
+                  <a:srgbClr val="2563EB"/>
+                </a:solidFill>
+                <a:latin typeface="Segoe UI Semibold" pitchFamily="34" charset="0"/>
+                <a:ea typeface="Segoe UI Semibold" pitchFamily="34" charset="-122"/>
+                <a:cs typeface="Segoe UI Semibold" pitchFamily="34" charset="-120"/>
+              </a:rPr>
+              <a:t>Neden bir banka bunu kurabilir?</a:t>
+            </a:r>
+            <a:endParaRPr lang="en-US" sz="1350" dirty="0"/>
+          </a:p>
+        </p:txBody>
+      </p:sp>
+      <p:sp>
+        <p:nvSpPr>
+          <p:cNvPr id="8" name="mrf_baslik"/>
+          <p:cNvSpPr txBox="1"/>
+          <p:nvPr/>
+        </p:nvSpPr>
+        <p:spPr>
+          <a:xfrm>
+            <a:off x="749808" y="950105"/>
+            <a:ext cx="10689336" cy="658368"/>
+          </a:xfrm>
+          <a:prstGeom prst="rect">
+            <a:avLst/>
+          </a:prstGeom>
+          <a:noFill/>
+          <a:ln/>
+        </p:spPr>
+        <p:txBody>
+          <a:bodyPr wrap="square" lIns="0" tIns="0" rIns="0" bIns="0" rtlCol="0" anchor="ctr"/>
+          <a:lstStyle/>
+          <a:p>
+            <a:pPr marL="0" indent="0" algn="l">
+              <a:buNone/>
+            </a:pPr>
+            <a:r>
+              <a:rPr lang="en-US" sz="3700" dirty="0">
+                <a:solidFill>
+                  <a:srgbClr val="171717"/>
+                </a:solidFill>
+                <a:latin typeface="Segoe UI Semibold" pitchFamily="34" charset="0"/>
+                <a:ea typeface="Segoe UI Semibold" pitchFamily="34" charset="-122"/>
+                <a:cs typeface="Segoe UI Semibold" pitchFamily="34" charset="-120"/>
+              </a:rPr>
+              <a:t>Veri kurumdan hiç çıkmıyor</a:t>
+            </a:r>
+            <a:endParaRPr lang="en-US" sz="3700" dirty="0"/>
+          </a:p>
+        </p:txBody>
+      </p:sp>
+      <p:sp>
+        <p:nvSpPr>
+          <p:cNvPr id="11" name="Text 8"/>
+          <p:cNvSpPr txBox="1"/>
+          <p:nvPr/>
+        </p:nvSpPr>
+        <p:spPr>
+          <a:xfrm>
+            <a:off x="6673595" y="2402475"/>
+            <a:ext cx="4572000" cy="458287"/>
+          </a:xfrm>
+          <a:prstGeom prst="rect">
+            <a:avLst/>
+          </a:prstGeom>
+          <a:noFill/>
+          <a:ln/>
+        </p:spPr>
+        <p:txBody>
+          <a:bodyPr wrap="square" lIns="0" tIns="0" rIns="0" bIns="0" rtlCol="0" anchor="ctr"/>
+          <a:lstStyle/>
+          <a:p>
+            <a:pPr marL="0" indent="0" algn="l">
+              <a:buNone/>
+            </a:pPr>
+            <a:r>
+              <a:rPr lang="tr-TR" sz="1300" dirty="0" smtClean="0">
+                <a:solidFill>
+                  <a:srgbClr val="171717"/>
+                </a:solidFill>
+                <a:latin typeface="Segoe UI" pitchFamily="34" charset="0"/>
+                <a:cs typeface="Segoe UI" pitchFamily="34" charset="-120"/>
+              </a:rPr>
+              <a:t>Mehmet Emre AYÇİÇEK</a:t>
+            </a:r>
+          </a:p>
+          <a:p>
+            <a:pPr marL="0" indent="0" algn="l">
+              <a:buNone/>
+            </a:pPr>
+            <a:endParaRPr lang="tr-TR" sz="1300" dirty="0" smtClean="0">
+              <a:solidFill>
+                <a:srgbClr val="171717"/>
+              </a:solidFill>
+              <a:latin typeface="Segoe UI" pitchFamily="34" charset="0"/>
+              <a:cs typeface="Segoe UI" pitchFamily="34" charset="-120"/>
+            </a:endParaRPr>
+          </a:p>
+          <a:p>
+            <a:pPr marL="0" indent="0" algn="l">
+              <a:buNone/>
+            </a:pPr>
+            <a:r>
+              <a:rPr lang="tr-TR" sz="1300" dirty="0" smtClean="0">
+                <a:solidFill>
+                  <a:srgbClr val="171717"/>
+                </a:solidFill>
+                <a:latin typeface="Segoe UI" pitchFamily="34" charset="0"/>
+                <a:cs typeface="Segoe UI" pitchFamily="34" charset="-120"/>
+              </a:rPr>
+              <a:t>Web sitelerinden veri kazıma ve veri akış </a:t>
+            </a:r>
+            <a:r>
+              <a:rPr lang="tr-TR" sz="1300" smtClean="0">
+                <a:solidFill>
+                  <a:srgbClr val="171717"/>
+                </a:solidFill>
+                <a:latin typeface="Segoe UI" pitchFamily="34" charset="0"/>
+                <a:cs typeface="Segoe UI" pitchFamily="34" charset="-120"/>
+              </a:rPr>
+              <a:t>kanallarının yönetimi</a:t>
+            </a:r>
+            <a:endParaRPr lang="tr-TR" sz="1300" dirty="0" smtClean="0">
+              <a:solidFill>
+                <a:srgbClr val="171717"/>
+              </a:solidFill>
+              <a:latin typeface="Segoe UI" pitchFamily="34" charset="0"/>
+              <a:cs typeface="Segoe UI" pitchFamily="34" charset="-120"/>
+            </a:endParaRPr>
+          </a:p>
+          <a:p>
+            <a:pPr marL="0" indent="0" algn="l">
+              <a:buNone/>
+            </a:pPr>
+            <a:endParaRPr lang="en-US" sz="1300" dirty="0"/>
+          </a:p>
+        </p:txBody>
+      </p:sp>
+      <p:sp>
+        <p:nvSpPr>
+          <p:cNvPr id="14" name="Text 11"/>
+          <p:cNvSpPr txBox="1"/>
+          <p:nvPr/>
+        </p:nvSpPr>
+        <p:spPr>
+          <a:xfrm>
+            <a:off x="7240306" y="3995493"/>
+            <a:ext cx="4572000" cy="640080"/>
+          </a:xfrm>
+          <a:prstGeom prst="rect">
+            <a:avLst/>
+          </a:prstGeom>
+          <a:noFill/>
+          <a:ln/>
+        </p:spPr>
+        <p:txBody>
+          <a:bodyPr wrap="square" lIns="0" tIns="0" rIns="0" bIns="0" rtlCol="0" anchor="ctr"/>
+          <a:lstStyle/>
+          <a:p>
+            <a:pPr marL="0" indent="0" algn="l">
+              <a:buNone/>
+            </a:pPr>
+            <a:r>
+              <a:rPr lang="en-US" sz="1300" dirty="0">
+                <a:solidFill>
+                  <a:srgbClr val="171717"/>
+                </a:solidFill>
+                <a:latin typeface="Segoe UI" pitchFamily="34" charset="0"/>
+                <a:ea typeface="Segoe UI" pitchFamily="34" charset="-122"/>
+                <a:cs typeface="Segoe UI" pitchFamily="34" charset="-120"/>
+              </a:rPr>
+              <a:t>Veri güvenliği — ticari LLM sağlayıcı yok</a:t>
+            </a:r>
+            <a:endParaRPr lang="en-US" sz="1300" dirty="0"/>
+          </a:p>
+        </p:txBody>
+      </p:sp>
+      <p:sp>
+        <p:nvSpPr>
+          <p:cNvPr id="17" name="Text 14"/>
+          <p:cNvSpPr txBox="1"/>
+          <p:nvPr/>
+        </p:nvSpPr>
+        <p:spPr>
+          <a:xfrm>
+            <a:off x="1024128" y="2604081"/>
+            <a:ext cx="4572000" cy="323959"/>
+          </a:xfrm>
+          <a:prstGeom prst="rect">
+            <a:avLst/>
+          </a:prstGeom>
+          <a:noFill/>
+          <a:ln/>
+        </p:spPr>
+        <p:txBody>
+          <a:bodyPr wrap="square" lIns="0" tIns="0" rIns="0" bIns="0" rtlCol="0" anchor="ctr"/>
+          <a:lstStyle/>
+          <a:p>
+            <a:pPr marL="0" indent="0" algn="l">
+              <a:buNone/>
+            </a:pPr>
+            <a:r>
+              <a:rPr lang="tr-TR" sz="1300" dirty="0" smtClean="0"/>
+              <a:t>Fadime Nisa BAYSAL</a:t>
+            </a:r>
+          </a:p>
+          <a:p>
+            <a:pPr marL="0" indent="0" algn="l">
+              <a:buNone/>
+            </a:pPr>
+            <a:endParaRPr lang="tr-TR" sz="1300" dirty="0"/>
+          </a:p>
+          <a:p>
+            <a:pPr marL="0" indent="0" algn="l">
+              <a:buNone/>
+            </a:pPr>
+            <a:r>
+              <a:rPr lang="tr-TR" sz="1300" dirty="0" smtClean="0"/>
+              <a:t>Verilerin işlenmesi ve anlamlandırılması</a:t>
+            </a:r>
+          </a:p>
+          <a:p>
+            <a:pPr marL="0" indent="0" algn="l">
+              <a:buNone/>
+            </a:pPr>
+            <a:endParaRPr lang="tr-TR" sz="1300" dirty="0" smtClean="0"/>
+          </a:p>
+          <a:p>
+            <a:pPr marL="0" indent="0" algn="l">
+              <a:buNone/>
+            </a:pPr>
+            <a:endParaRPr lang="en-US" sz="1300" dirty="0"/>
+          </a:p>
+        </p:txBody>
+      </p:sp>
+      <p:sp>
+        <p:nvSpPr>
+          <p:cNvPr id="20" name="Text 17"/>
+          <p:cNvSpPr txBox="1"/>
+          <p:nvPr/>
+        </p:nvSpPr>
+        <p:spPr>
+          <a:xfrm>
+            <a:off x="1060704" y="3731188"/>
+            <a:ext cx="4572000" cy="640080"/>
+          </a:xfrm>
+          <a:prstGeom prst="rect">
+            <a:avLst/>
+          </a:prstGeom>
+          <a:noFill/>
+          <a:ln/>
+        </p:spPr>
+        <p:txBody>
+          <a:bodyPr wrap="square" lIns="0" tIns="0" rIns="0" bIns="0" rtlCol="0" anchor="ctr"/>
+          <a:lstStyle/>
+          <a:p>
+            <a:pPr marL="0" indent="0" algn="l">
+              <a:buNone/>
+            </a:pPr>
+            <a:r>
+              <a:rPr lang="tr-TR" sz="1300" dirty="0" smtClean="0">
+                <a:solidFill>
+                  <a:srgbClr val="171717"/>
+                </a:solidFill>
+                <a:latin typeface="Segoe UI" pitchFamily="34" charset="0"/>
+                <a:cs typeface="Segoe UI" pitchFamily="34" charset="-120"/>
+              </a:rPr>
+              <a:t>Musa AYÇİÇEK</a:t>
+            </a:r>
+          </a:p>
+          <a:p>
+            <a:pPr marL="0" indent="0" algn="l">
+              <a:buNone/>
+            </a:pPr>
+            <a:endParaRPr lang="tr-TR" sz="1300" dirty="0">
+              <a:solidFill>
+                <a:srgbClr val="171717"/>
+              </a:solidFill>
+              <a:latin typeface="Segoe UI" pitchFamily="34" charset="0"/>
+              <a:cs typeface="Segoe UI" pitchFamily="34" charset="-120"/>
+            </a:endParaRPr>
+          </a:p>
+          <a:p>
+            <a:pPr marL="0" indent="0" algn="l">
+              <a:buNone/>
+            </a:pPr>
+            <a:r>
+              <a:rPr lang="tr-TR" sz="1300" dirty="0" smtClean="0">
+                <a:solidFill>
+                  <a:srgbClr val="171717"/>
+                </a:solidFill>
+                <a:latin typeface="Segoe UI" pitchFamily="34" charset="0"/>
+                <a:cs typeface="Segoe UI" pitchFamily="34" charset="-120"/>
+              </a:rPr>
+              <a:t>Web sitelerinden veri kazıma ve veri akış kanallarının yönetimi</a:t>
+            </a:r>
+            <a:endParaRPr lang="en-US" sz="1300" dirty="0"/>
+          </a:p>
+        </p:txBody>
+      </p:sp>
+      <p:sp>
+        <p:nvSpPr>
+          <p:cNvPr id="36" name="mrf_madde0"/>
+          <p:cNvSpPr/>
+          <p:nvPr/>
+        </p:nvSpPr>
+        <p:spPr>
+          <a:xfrm>
+            <a:off x="6359651" y="3532415"/>
+            <a:ext cx="5349240" cy="1170432"/>
+          </a:xfrm>
+          <a:prstGeom prst="roundRect">
+            <a:avLst>
+              <a:gd name="adj" fmla="val 11429"/>
+            </a:avLst>
+          </a:prstGeom>
+          <a:solidFill>
+            <a:schemeClr val="accent1">
+              <a:lumMod val="20000"/>
+              <a:lumOff val="80000"/>
+            </a:schemeClr>
+          </a:solidFill>
+          <a:ln w="12700">
+            <a:solidFill>
+              <a:srgbClr val="A7F3D0"/>
+            </a:solidFill>
+            <a:prstDash val="solid"/>
+          </a:ln>
+        </p:spPr>
+        <p:txBody>
+          <a:bodyPr/>
+          <a:lstStyle/>
+          <a:p>
+            <a:endParaRPr lang="tr-TR" dirty="0"/>
+          </a:p>
+        </p:txBody>
+      </p:sp>
+      <p:sp>
+        <p:nvSpPr>
+          <p:cNvPr id="39" name="Metin kutusu 38"/>
+          <p:cNvSpPr txBox="1"/>
+          <p:nvPr/>
+        </p:nvSpPr>
+        <p:spPr>
+          <a:xfrm flipH="1">
+            <a:off x="6513359" y="3700352"/>
+            <a:ext cx="4005289" cy="692497"/>
+          </a:xfrm>
+          <a:prstGeom prst="rect">
+            <a:avLst/>
+          </a:prstGeom>
+          <a:noFill/>
+        </p:spPr>
+        <p:txBody>
+          <a:bodyPr wrap="square" rtlCol="0">
+            <a:spAutoFit/>
+          </a:bodyPr>
+          <a:lstStyle/>
+          <a:p>
+            <a:r>
+              <a:rPr lang="tr-TR" sz="1300" dirty="0" smtClean="0">
+                <a:latin typeface="Segoe UI" panose="020B0502040204020203" pitchFamily="34" charset="0"/>
+                <a:cs typeface="Segoe UI" panose="020B0502040204020203" pitchFamily="34" charset="0"/>
+              </a:rPr>
+              <a:t>Ahmet Salih GÖKSU</a:t>
+            </a:r>
+          </a:p>
+          <a:p>
+            <a:endParaRPr lang="tr-TR" sz="1300" dirty="0">
+              <a:latin typeface="Segoe UI" panose="020B0502040204020203" pitchFamily="34" charset="0"/>
+              <a:cs typeface="Segoe UI" panose="020B0502040204020203" pitchFamily="34" charset="0"/>
+            </a:endParaRPr>
+          </a:p>
+          <a:p>
+            <a:r>
+              <a:rPr lang="tr-TR" sz="1300" dirty="0" smtClean="0">
+                <a:latin typeface="Segoe UI" panose="020B0502040204020203" pitchFamily="34" charset="0"/>
+                <a:cs typeface="Segoe UI" panose="020B0502040204020203" pitchFamily="34" charset="0"/>
+              </a:rPr>
+              <a:t>Arayüz ve </a:t>
+            </a:r>
+            <a:r>
+              <a:rPr lang="tr-TR" sz="1300" dirty="0" err="1" smtClean="0">
+                <a:latin typeface="Segoe UI" panose="020B0502040204020203" pitchFamily="34" charset="0"/>
+                <a:cs typeface="Segoe UI" panose="020B0502040204020203" pitchFamily="34" charset="0"/>
+              </a:rPr>
+              <a:t>Chatbot</a:t>
+            </a:r>
+            <a:r>
+              <a:rPr lang="tr-TR" sz="1300" dirty="0" smtClean="0">
+                <a:latin typeface="Segoe UI" panose="020B0502040204020203" pitchFamily="34" charset="0"/>
+                <a:cs typeface="Segoe UI" panose="020B0502040204020203" pitchFamily="34" charset="0"/>
+              </a:rPr>
+              <a:t> tasarımı</a:t>
+            </a:r>
+            <a:endParaRPr lang="tr-TR" sz="1300" dirty="0">
+              <a:latin typeface="Segoe UI" panose="020B0502040204020203" pitchFamily="34" charset="0"/>
+              <a:cs typeface="Segoe UI" panose="020B0502040204020203" pitchFamily="34" charset="0"/>
+            </a:endParaRPr>
+          </a:p>
+        </p:txBody>
+      </p:sp>
+      <p:sp>
+        <p:nvSpPr>
+          <p:cNvPr id="42" name="Dikdörtgen 41"/>
+          <p:cNvSpPr/>
+          <p:nvPr/>
+        </p:nvSpPr>
+        <p:spPr>
+          <a:xfrm>
+            <a:off x="868680" y="5083629"/>
+            <a:ext cx="5989460" cy="369332"/>
+          </a:xfrm>
+          <a:prstGeom prst="rect">
+            <a:avLst/>
+          </a:prstGeom>
+        </p:spPr>
+        <p:txBody>
+          <a:bodyPr wrap="none">
+            <a:spAutoFit/>
+          </a:bodyPr>
+          <a:lstStyle/>
+          <a:p>
+            <a:r>
+              <a:rPr lang="tr-TR" dirty="0"/>
+              <a:t>https://github.com/SmartData58/Teknofest2026_FinAgent.git</a:t>
+            </a:r>
+          </a:p>
+        </p:txBody>
+      </p:sp>
+    </p:spTree>
+    <p:extLst>
+      <p:ext uri="{BB962C8B-B14F-4D97-AF65-F5344CB8AC3E}">
+        <p14:creationId xmlns:p14="http://schemas.microsoft.com/office/powerpoint/2010/main" val="1910947838"/>
+      </p:ext>
+    </p:extLst>
+  </p:cSld>
+  <p:clrMapOvr>
+    <a:masterClrMapping/>
+  </p:clrMapOvr>
+  <mc:AlternateContent xmlns:mc="http://schemas.openxmlformats.org/markup-compatibility/2006">
+    <mc:Choice xmlns:p159="http://schemas.microsoft.com/office/powerpoint/2015/09/main" xmlns="" Requires="p159">
+      <p:transition xmlns:p14="http://schemas.microsoft.com/office/powerpoint/2010/main" spd="slow" p14:dur="1400">
         <p159:morph option="byObject"/>
       </p:transition>
     </mc:Choice>
@@ -14419,7 +15532,73 @@
                 <a:ea typeface="Segoe UI Semibold" pitchFamily="34" charset="-122"/>
                 <a:cs typeface="Segoe UI Semibold" pitchFamily="34" charset="-120"/>
               </a:rPr>
-              <a:t>Aynı bilgi, on farklı biçimde yazılıyor</a:t>
+              <a:t>Aynı bilgi</a:t>
+            </a:r>
+            <a:r>
+              <a:rPr lang="en-US" sz="3700" dirty="0" smtClean="0">
+                <a:solidFill>
+                  <a:srgbClr val="171717"/>
+                </a:solidFill>
+                <a:latin typeface="Segoe UI Semibold" pitchFamily="34" charset="0"/>
+                <a:ea typeface="Segoe UI Semibold" pitchFamily="34" charset="-122"/>
+                <a:cs typeface="Segoe UI Semibold" pitchFamily="34" charset="-120"/>
+              </a:rPr>
+              <a:t>, </a:t>
+            </a:r>
+            <a:r>
+              <a:rPr lang="en-US" sz="3700" dirty="0">
+                <a:solidFill>
+                  <a:srgbClr val="171717"/>
+                </a:solidFill>
+                <a:latin typeface="Segoe UI Semibold" pitchFamily="34" charset="0"/>
+                <a:ea typeface="Segoe UI Semibold" pitchFamily="34" charset="-122"/>
+                <a:cs typeface="Segoe UI Semibold" pitchFamily="34" charset="-120"/>
+              </a:rPr>
+              <a:t>farklı </a:t>
+            </a:r>
+            <a:r>
+              <a:rPr lang="en-US" sz="3700" dirty="0" smtClean="0">
+                <a:solidFill>
+                  <a:srgbClr val="171717"/>
+                </a:solidFill>
+                <a:latin typeface="Segoe UI Semibold" pitchFamily="34" charset="0"/>
+                <a:ea typeface="Segoe UI Semibold" pitchFamily="34" charset="-122"/>
+                <a:cs typeface="Segoe UI Semibold" pitchFamily="34" charset="-120"/>
+              </a:rPr>
+              <a:t>biçim</a:t>
+            </a:r>
+            <a:r>
+              <a:rPr lang="tr-TR" sz="3700" dirty="0" err="1" smtClean="0">
+                <a:solidFill>
+                  <a:srgbClr val="171717"/>
+                </a:solidFill>
+                <a:latin typeface="Segoe UI Semibold" pitchFamily="34" charset="0"/>
+                <a:ea typeface="Segoe UI Semibold" pitchFamily="34" charset="-122"/>
+                <a:cs typeface="Segoe UI Semibold" pitchFamily="34" charset="-120"/>
+              </a:rPr>
+              <a:t>lerde</a:t>
+            </a:r>
+            <a:r>
+              <a:rPr lang="en-US" sz="3700" dirty="0" smtClean="0">
+                <a:solidFill>
+                  <a:srgbClr val="171717"/>
+                </a:solidFill>
+                <a:latin typeface="Segoe UI Semibold" pitchFamily="34" charset="0"/>
+                <a:ea typeface="Segoe UI Semibold" pitchFamily="34" charset="-122"/>
+                <a:cs typeface="Segoe UI Semibold" pitchFamily="34" charset="-120"/>
+              </a:rPr>
+              <a:t> </a:t>
+            </a:r>
+            <a:r>
+              <a:rPr lang="en-US" sz="3700" dirty="0">
+                <a:solidFill>
+                  <a:srgbClr val="171717"/>
+                </a:solidFill>
+                <a:latin typeface="Segoe UI Semibold" pitchFamily="34" charset="0"/>
+                <a:ea typeface="Segoe UI Semibold" pitchFamily="34" charset="-122"/>
+                <a:cs typeface="Segoe UI Semibold" pitchFamily="34" charset="-120"/>
+              </a:rPr>
+              <a:t>yazılıyor</a:t>
             </a:r>
             <a:endParaRPr lang="en-US" sz="3700" dirty="0"/>
           </a:p>
@@ -14590,7 +15769,18 @@
                 <a:ea typeface="Segoe UI" pitchFamily="34" charset="-122"/>
                 <a:cs typeface="Segoe UI" pitchFamily="34" charset="-120"/>
               </a:rPr>
-              <a:t>% 1.89</a:t>
+              <a:t>% </a:t>
+            </a:r>
+            <a:r>
+              <a:rPr lang="en-US" sz="2600" b="1" dirty="0" smtClean="0">
+                <a:solidFill>
+                  <a:srgbClr val="2563EB"/>
+                </a:solidFill>
+                <a:latin typeface="Segoe UI" pitchFamily="34" charset="0"/>
+                <a:ea typeface="Segoe UI" pitchFamily="34" charset="-122"/>
+                <a:cs typeface="Segoe UI" pitchFamily="34" charset="-120"/>
+              </a:rPr>
+              <a:t>1.89</a:t>
             </a:r>
             <a:endParaRPr lang="en-US" sz="2600" dirty="0"/>
           </a:p>
@@ -15132,7 +16322,29 @@
                 <a:ea typeface="Segoe UI" pitchFamily="34" charset="-122"/>
                 <a:cs typeface="Segoe UI" pitchFamily="34" charset="-120"/>
               </a:rPr>
-              <a:t>Kaynak: BDDK katılım bankaları listesi · veri toplama Ağustos 2026</a:t>
+              <a:t>Kaynak: BDDK katılım bankaları listesi · </a:t>
+            </a:r>
+            <a:r>
+              <a:rPr lang="en-US" sz="1000" dirty="0" err="1">
+                <a:solidFill>
+                  <a:srgbClr val="A3A3A3"/>
+                </a:solidFill>
+                <a:latin typeface="Segoe UI" pitchFamily="34" charset="0"/>
+                <a:ea typeface="Segoe UI" pitchFamily="34" charset="-122"/>
+                <a:cs typeface="Segoe UI" pitchFamily="34" charset="-120"/>
+              </a:rPr>
+              <a:t>veri</a:t>
+            </a:r>
+            <a:r>
+              <a:rPr lang="en-US" sz="1000" dirty="0">
+                <a:solidFill>
+                  <a:srgbClr val="A3A3A3"/>
+                </a:solidFill>
+                <a:latin typeface="Segoe UI" pitchFamily="34" charset="0"/>
+                <a:ea typeface="Segoe UI" pitchFamily="34" charset="-122"/>
+                <a:cs typeface="Segoe UI" pitchFamily="34" charset="-120"/>
+              </a:rPr>
+              <a:t> toplama Ağustos 2026</a:t>
             </a:r>
             <a:endParaRPr lang="en-US" sz="1000" dirty="0"/>
           </a:p>
@@ -15155,6 +16367,13 @@
       </p:transition>
     </mc:Fallback>
   </mc:AlternateContent>
+  <p:timing>
+    <p:tnLst>
+      <p:par>
+        <p:cTn id="1" dur="indefinite" restart="never" nodeType="tmRoot"/>
+      </p:par>
+    </p:tnLst>
+  </p:timing>
 </p:sld>
 </file>
 
@@ -15328,15 +16547,14 @@
               <a:buNone/>
             </a:pPr>
             <a:r>
-              <a:rPr lang="en-US" sz="6000" dirty="0">
+              <a:rPr lang="tr-TR" sz="6000" dirty="0" smtClean="0">
                 <a:solidFill>
                   <a:srgbClr val="0F172A"/>
                 </a:solidFill>
                 <a:latin typeface="Segoe UI Black" pitchFamily="34" charset="0"/>
                 <a:ea typeface="Segoe UI Black" pitchFamily="34" charset="-122"/>
-                <a:cs typeface="Segoe UI Black" pitchFamily="34" charset="-120"/>
-              </a:rPr>
-              <a:t>Neden sadece kazımak yetmiyor?</a:t>
+              </a:rPr>
+              <a:t>Katılım Bankacılığı Verileri</a:t>
             </a:r>
             <a:endParaRPr lang="en-US" sz="6000" dirty="0"/>
           </a:p>
@@ -15463,6 +16681,13 @@
       </p:transition>
     </mc:Fallback>
   </mc:AlternateContent>
+  <p:timing>
+    <p:tnLst>
+      <p:par>
+        <p:cTn id="1" dur="indefinite" restart="never" nodeType="tmRoot"/>
+      </p:par>
+    </p:tnLst>
+  </p:timing>
 </p:sld>
 </file>
 
@@ -15684,7 +16909,7 @@
         </p:nvSpPr>
         <p:spPr>
           <a:xfrm>
-            <a:off x="749808" y="932688"/>
+            <a:off x="749808" y="950105"/>
             <a:ext cx="10689336" cy="658368"/>
           </a:xfrm>
           <a:prstGeom prst="rect">
@@ -15709,7 +16934,40 @@
                 <a:ea typeface="Segoe UI Semibold" pitchFamily="34" charset="-122"/>
                 <a:cs typeface="Segoe UI Semibold" pitchFamily="34" charset="-120"/>
               </a:rPr>
-              <a:t>Veri geniş ama dengesiz</a:t>
+              <a:t>Veri </a:t>
+            </a:r>
+            <a:r>
+              <a:rPr lang="tr-TR" sz="3700" dirty="0" smtClean="0">
+                <a:solidFill>
+                  <a:srgbClr val="171717"/>
+                </a:solidFill>
+                <a:latin typeface="Segoe UI Semibold" pitchFamily="34" charset="0"/>
+                <a:ea typeface="Segoe UI Semibold" pitchFamily="34" charset="-122"/>
+                <a:cs typeface="Segoe UI Semibold" pitchFamily="34" charset="-120"/>
+              </a:rPr>
+              <a:t>çok</a:t>
+            </a:r>
+            <a:r>
+              <a:rPr lang="en-US" sz="3700" dirty="0" smtClean="0">
+                <a:solidFill>
+                  <a:srgbClr val="171717"/>
+                </a:solidFill>
+                <a:latin typeface="Segoe UI Semibold" pitchFamily="34" charset="0"/>
+                <a:ea typeface="Segoe UI Semibold" pitchFamily="34" charset="-122"/>
+                <a:cs typeface="Segoe UI Semibold" pitchFamily="34" charset="-120"/>
+              </a:rPr>
+              <a:t> </a:t>
+            </a:r>
+            <a:r>
+              <a:rPr lang="en-US" sz="3700" dirty="0">
+                <a:solidFill>
+                  <a:srgbClr val="171717"/>
+                </a:solidFill>
+                <a:latin typeface="Segoe UI Semibold" pitchFamily="34" charset="0"/>
+                <a:ea typeface="Segoe UI Semibold" pitchFamily="34" charset="-122"/>
+                <a:cs typeface="Segoe UI Semibold" pitchFamily="34" charset="-120"/>
+              </a:rPr>
+              <a:t>ama dengesiz</a:t>
             </a:r>
             <a:endParaRPr lang="en-US" sz="3700" dirty="0"/>
           </a:p>
@@ -15947,6 +17205,13 @@
       </p:transition>
     </mc:Fallback>
   </mc:AlternateContent>
+  <p:timing>
+    <p:tnLst>
+      <p:par>
+        <p:cTn id="1" dur="indefinite" restart="never" nodeType="tmRoot"/>
+      </p:par>
+    </p:tnLst>
+  </p:timing>
 </p:sld>
 </file>
 
@@ -16103,8 +17368,8 @@
         </p:nvSpPr>
         <p:spPr>
           <a:xfrm>
-            <a:off x="749808" y="2286000"/>
-            <a:ext cx="10689336" cy="2011680"/>
+            <a:off x="2639568" y="2286000"/>
+            <a:ext cx="8550946" cy="2011680"/>
           </a:xfrm>
           <a:prstGeom prst="rect">
             <a:avLst/>
@@ -16128,7 +17393,29 @@
                 <a:ea typeface="Segoe UI Black" pitchFamily="34" charset="-122"/>
                 <a:cs typeface="Segoe UI Black" pitchFamily="34" charset="-120"/>
               </a:rPr>
-              <a:t>Neden LLM'e tek başına güvenmiyoruz?</a:t>
+              <a:t>Neden </a:t>
+            </a:r>
+            <a:r>
+              <a:rPr lang="tr-TR" sz="4800" dirty="0" smtClean="0">
+                <a:solidFill>
+                  <a:srgbClr val="0F172A"/>
+                </a:solidFill>
+                <a:latin typeface="Segoe UI Black" pitchFamily="34" charset="0"/>
+                <a:ea typeface="Segoe UI Black" pitchFamily="34" charset="-122"/>
+                <a:cs typeface="Segoe UI Black" pitchFamily="34" charset="-120"/>
+              </a:rPr>
+              <a:t>Hibrit Yaklaşım</a:t>
+            </a:r>
+            <a:r>
+              <a:rPr lang="en-US" sz="4800" dirty="0" smtClean="0">
+                <a:solidFill>
+                  <a:srgbClr val="0F172A"/>
+                </a:solidFill>
+                <a:latin typeface="Segoe UI Black" pitchFamily="34" charset="0"/>
+                <a:ea typeface="Segoe UI Black" pitchFamily="34" charset="-122"/>
+                <a:cs typeface="Segoe UI Black" pitchFamily="34" charset="-120"/>
+              </a:rPr>
+              <a:t>?</a:t>
             </a:r>
             <a:endParaRPr lang="en-US" sz="4800" dirty="0"/>
           </a:p>
